--- a/project/project_background/Final Project Presentation - Ornit Bhonkar 2026.pptx
+++ b/project/project_background/Final Project Presentation - Ornit Bhonkar 2026.pptx
@@ -5,7 +5,7 @@
     <p:sldMasterId id="2147484297" r:id="rId1"/>
   </p:sldMasterIdLst>
   <p:notesMasterIdLst>
-    <p:notesMasterId r:id="rId24"/>
+    <p:notesMasterId r:id="rId20"/>
   </p:notesMasterIdLst>
   <p:sldIdLst>
     <p:sldId id="256" r:id="rId2"/>
@@ -17,19 +17,15 @@
     <p:sldId id="265" r:id="rId8"/>
     <p:sldId id="259" r:id="rId9"/>
     <p:sldId id="272" r:id="rId10"/>
-    <p:sldId id="273" r:id="rId11"/>
-    <p:sldId id="271" r:id="rId12"/>
-    <p:sldId id="366" r:id="rId13"/>
-    <p:sldId id="367" r:id="rId14"/>
-    <p:sldId id="375" r:id="rId15"/>
-    <p:sldId id="368" r:id="rId16"/>
-    <p:sldId id="374" r:id="rId17"/>
-    <p:sldId id="369" r:id="rId18"/>
-    <p:sldId id="365" r:id="rId19"/>
-    <p:sldId id="370" r:id="rId20"/>
-    <p:sldId id="371" r:id="rId21"/>
-    <p:sldId id="372" r:id="rId22"/>
-    <p:sldId id="373" r:id="rId23"/>
+    <p:sldId id="271" r:id="rId11"/>
+    <p:sldId id="366" r:id="rId12"/>
+    <p:sldId id="367" r:id="rId13"/>
+    <p:sldId id="375" r:id="rId14"/>
+    <p:sldId id="368" r:id="rId15"/>
+    <p:sldId id="365" r:id="rId16"/>
+    <p:sldId id="370" r:id="rId17"/>
+    <p:sldId id="371" r:id="rId18"/>
+    <p:sldId id="373" r:id="rId19"/>
   </p:sldIdLst>
   <p:sldSz cx="12192000" cy="6858000"/>
   <p:notesSz cx="6858000" cy="9144000"/>
@@ -3268,7 +3264,7 @@
           <a:p>
             <a:fld id="{4FCD6A08-F84D-254F-876D-619DDBFD23F2}" type="datetimeFigureOut">
               <a:rPr lang="en-IL" smtClean="0"/>
-              <a:t>12/03/2026</a:t>
+              <a:t>19/03/2026</a:t>
             </a:fld>
             <a:endParaRPr lang="en-IL"/>
           </a:p>
@@ -3581,48 +3577,7 @@
           <a:lstStyle/>
           <a:p>
             <a:pPr marL="0" algn="r" defTabSz="914400" rtl="1" eaLnBrk="1" latinLnBrk="0" hangingPunct="1"/>
-            <a:r>
-              <a:rPr lang="he-IL" dirty="0"/>
-              <a:t>שלום לכולם אני </a:t>
-            </a:r>
-            <a:r>
-              <a:rPr lang="he-IL" dirty="0" err="1"/>
-              <a:t>אורנית</a:t>
-            </a:r>
-            <a:r>
-              <a:rPr lang="he-IL" dirty="0"/>
-              <a:t>, ואני הולכת לדבר על הפרויקט שלי שנקרא ... </a:t>
-            </a:r>
-          </a:p>
-          <a:p>
-            <a:pPr marL="0" algn="r" defTabSz="914400" rtl="1" eaLnBrk="1" latinLnBrk="0" hangingPunct="1"/>
-            <a:r>
-              <a:rPr lang="he-IL" dirty="0"/>
-              <a:t>כדי להבין מה הפרויקט הזה אומר, אני צריכה להסביר מה זה </a:t>
-            </a:r>
-            <a:r>
-              <a:rPr lang="en-US" dirty="0"/>
-              <a:t>TP53</a:t>
-            </a:r>
-            <a:r>
-              <a:rPr lang="he-IL" dirty="0"/>
-              <a:t> ו-</a:t>
-            </a:r>
-            <a:r>
-              <a:rPr lang="en-US" dirty="0"/>
-              <a:t>CNV</a:t>
-            </a:r>
-            <a:r>
-              <a:rPr lang="he-IL" dirty="0"/>
-              <a:t>.</a:t>
-            </a:r>
-          </a:p>
-          <a:p>
-            <a:pPr marL="0" algn="r" defTabSz="914400" rtl="1" eaLnBrk="1" latinLnBrk="0" hangingPunct="1"/>
-            <a:r>
-              <a:rPr lang="he-IL" dirty="0"/>
-              <a:t>אלה שני נושאים שמוזכרים לפעמים יחד בהקשר לסרטן ותכף אסביר למה</a:t>
-            </a:r>
+            <a:endParaRPr lang="he-IL" dirty="0"/>
           </a:p>
         </p:txBody>
       </p:sp>
@@ -3667,174 +3622,6 @@
   <p:cSld>
     <p:spTree>
       <p:nvGrpSpPr>
-        <p:cNvPr id="1" name="">
-          <a:extLst>
-            <a:ext uri="{FF2B5EF4-FFF2-40B4-BE49-F238E27FC236}">
-              <a16:creationId xmlns:a16="http://schemas.microsoft.com/office/drawing/2014/main" id="{DF812DA0-78C3-E2BC-A5F2-ABF8DD1F18CE}"/>
-            </a:ext>
-          </a:extLst>
-        </p:cNvPr>
-        <p:cNvGrpSpPr/>
-        <p:nvPr/>
-      </p:nvGrpSpPr>
-      <p:grpSpPr>
-        <a:xfrm>
-          <a:off x="0" y="0"/>
-          <a:ext cx="0" cy="0"/>
-          <a:chOff x="0" y="0"/>
-          <a:chExt cx="0" cy="0"/>
-        </a:xfrm>
-      </p:grpSpPr>
-      <p:sp>
-        <p:nvSpPr>
-          <p:cNvPr id="2" name="Slide Image Placeholder 1">
-            <a:extLst>
-              <a:ext uri="{FF2B5EF4-FFF2-40B4-BE49-F238E27FC236}">
-                <a16:creationId xmlns:a16="http://schemas.microsoft.com/office/drawing/2014/main" id="{BB9D7FC3-56A0-EBA3-9609-B9DDF9436317}"/>
-              </a:ext>
-            </a:extLst>
-          </p:cNvPr>
-          <p:cNvSpPr>
-            <a:spLocks noGrp="1" noRot="1" noChangeAspect="1"/>
-          </p:cNvSpPr>
-          <p:nvPr>
-            <p:ph type="sldImg"/>
-          </p:nvPr>
-        </p:nvSpPr>
-        <p:spPr/>
-      </p:sp>
-      <p:sp>
-        <p:nvSpPr>
-          <p:cNvPr id="3" name="Notes Placeholder 2">
-            <a:extLst>
-              <a:ext uri="{FF2B5EF4-FFF2-40B4-BE49-F238E27FC236}">
-                <a16:creationId xmlns:a16="http://schemas.microsoft.com/office/drawing/2014/main" id="{BFD3940C-BA75-367B-2854-DC459C6E4FC8}"/>
-              </a:ext>
-            </a:extLst>
-          </p:cNvPr>
-          <p:cNvSpPr>
-            <a:spLocks noGrp="1"/>
-          </p:cNvSpPr>
-          <p:nvPr>
-            <p:ph type="body" idx="1"/>
-          </p:nvPr>
-        </p:nvSpPr>
-        <p:spPr/>
-        <p:txBody>
-          <a:bodyPr/>
-          <a:lstStyle/>
-          <a:p>
-            <a:pPr marL="0" algn="r" defTabSz="914400" rtl="1" eaLnBrk="1" latinLnBrk="0" hangingPunct="1"/>
-            <a:r>
-              <a:rPr lang="he-IL" dirty="0"/>
-              <a:t>ל-</a:t>
-            </a:r>
-            <a:r>
-              <a:rPr lang="en-US" dirty="0"/>
-              <a:t>GENIE</a:t>
-            </a:r>
-            <a:r>
-              <a:rPr lang="he-IL" dirty="0"/>
-              <a:t> היה רק </a:t>
-            </a:r>
-            <a:r>
-              <a:rPr lang="en-US" dirty="0"/>
-              <a:t>TP53-specific CNA</a:t>
-            </a:r>
-            <a:r>
-              <a:rPr lang="he-IL" dirty="0"/>
-              <a:t> ורציתי לראות את ההשפעה על הגנום, </a:t>
-            </a:r>
-            <a:r>
-              <a:rPr lang="en-US" dirty="0"/>
-              <a:t> </a:t>
-            </a:r>
-            <a:r>
-              <a:rPr lang="he-IL" dirty="0"/>
-              <a:t>ובאופן ספציפי, גנים של סרטן, אילו גנים מוגברים, אילו גנים מושתקים או נמחקים בכל הגנום, לא רק </a:t>
-            </a:r>
-            <a:r>
-              <a:rPr lang="en-US" dirty="0"/>
-              <a:t>TP53</a:t>
-            </a:r>
-            <a:r>
-              <a:rPr lang="he-IL" dirty="0"/>
-              <a:t>.</a:t>
-            </a:r>
-          </a:p>
-          <a:p>
-            <a:pPr marL="0" algn="r" defTabSz="914400" rtl="1" eaLnBrk="1" latinLnBrk="0" hangingPunct="1"/>
-            <a:r>
-              <a:rPr lang="he-IL" dirty="0"/>
-              <a:t>בגדול </a:t>
-            </a:r>
-            <a:r>
-              <a:rPr lang="en-US" dirty="0"/>
-              <a:t>GENIE</a:t>
-            </a:r>
-            <a:r>
-              <a:rPr lang="he-IL" dirty="0"/>
-              <a:t> אמר לי הגנום נשבר, </a:t>
-            </a:r>
-            <a:r>
-              <a:rPr lang="en-US" dirty="0"/>
-              <a:t>MSK-IMPACT</a:t>
-            </a:r>
-            <a:r>
-              <a:rPr lang="he-IL" dirty="0"/>
-              <a:t> אמר לי מה נשבר.</a:t>
-            </a:r>
-            <a:endParaRPr lang="en-US" dirty="0"/>
-          </a:p>
-        </p:txBody>
-      </p:sp>
-      <p:sp>
-        <p:nvSpPr>
-          <p:cNvPr id="4" name="Slide Number Placeholder 3">
-            <a:extLst>
-              <a:ext uri="{FF2B5EF4-FFF2-40B4-BE49-F238E27FC236}">
-                <a16:creationId xmlns:a16="http://schemas.microsoft.com/office/drawing/2014/main" id="{B5DDC7C4-DD9D-503D-7A0E-8FF1827D9E7A}"/>
-              </a:ext>
-            </a:extLst>
-          </p:cNvPr>
-          <p:cNvSpPr>
-            <a:spLocks noGrp="1"/>
-          </p:cNvSpPr>
-          <p:nvPr>
-            <p:ph type="sldNum" sz="quarter" idx="5"/>
-          </p:nvPr>
-        </p:nvSpPr>
-        <p:spPr/>
-        <p:txBody>
-          <a:bodyPr/>
-          <a:lstStyle/>
-          <a:p>
-            <a:fld id="{7242DB82-1DC1-9846-88D7-11B539157949}" type="slidenum">
-              <a:rPr lang="en-IL" smtClean="0"/>
-              <a:t>10</a:t>
-            </a:fld>
-            <a:endParaRPr lang="en-IL"/>
-          </a:p>
-        </p:txBody>
-      </p:sp>
-    </p:spTree>
-    <p:extLst>
-      <p:ext uri="{BB962C8B-B14F-4D97-AF65-F5344CB8AC3E}">
-        <p14:creationId xmlns:p14="http://schemas.microsoft.com/office/powerpoint/2010/main" val="191436885"/>
-      </p:ext>
-    </p:extLst>
-  </p:cSld>
-  <p:clrMapOvr>
-    <a:masterClrMapping/>
-  </p:clrMapOvr>
-</p:notes>
-</file>
-
-<file path=ppt/notesSlides/notesSlide11.xml><?xml version="1.0" encoding="utf-8"?>
-<p:notes xmlns:a="http://schemas.openxmlformats.org/drawingml/2006/main" xmlns:r="http://schemas.openxmlformats.org/officeDocument/2006/relationships" xmlns:p="http://schemas.openxmlformats.org/presentationml/2006/main">
-  <p:cSld>
-    <p:spTree>
-      <p:nvGrpSpPr>
         <p:cNvPr id="1" name=""/>
         <p:cNvGrpSpPr/>
         <p:nvPr/>
@@ -3875,229 +3662,7 @@
           <a:lstStyle/>
           <a:p>
             <a:pPr marL="0" algn="r" defTabSz="914400" rtl="1" eaLnBrk="1" latinLnBrk="0" hangingPunct="1"/>
-            <a:r>
-              <a:rPr lang="he-IL" dirty="0"/>
-              <a:t>כאן לקחתי את </a:t>
-            </a:r>
-            <a:r>
-              <a:rPr lang="he-IL" dirty="0" err="1"/>
-              <a:t>הדטא</a:t>
-            </a:r>
-            <a:r>
-              <a:rPr lang="he-IL" dirty="0"/>
-              <a:t> של </a:t>
-            </a:r>
-            <a:r>
-              <a:rPr lang="he-IL" dirty="0" err="1"/>
-              <a:t>ג׳יני</a:t>
-            </a:r>
-            <a:r>
-              <a:rPr lang="he-IL" dirty="0"/>
-              <a:t> עם פרופיל  tp53 לכל אחד </a:t>
-            </a:r>
-            <a:r>
-              <a:rPr lang="he-IL" dirty="0" err="1"/>
-              <a:t>מהסאמפלים</a:t>
-            </a:r>
-            <a:r>
-              <a:rPr lang="he-IL" dirty="0"/>
-              <a:t> (מוטנט או לא).</a:t>
-            </a:r>
-          </a:p>
-          <a:p>
-            <a:pPr marL="0" algn="r" defTabSz="914400" rtl="1" eaLnBrk="1" latinLnBrk="0" hangingPunct="1"/>
             <a:endParaRPr lang="he-IL" dirty="0"/>
-          </a:p>
-          <a:p>
-            <a:pPr marL="0" algn="r" defTabSz="914400" rtl="1" eaLnBrk="1" latinLnBrk="0" hangingPunct="1"/>
-            <a:r>
-              <a:rPr lang="he-IL" dirty="0"/>
-              <a:t>ב-</a:t>
-            </a:r>
-            <a:r>
-              <a:rPr lang="en-US" dirty="0"/>
-              <a:t>TP53 CNA values</a:t>
-            </a:r>
-            <a:r>
-              <a:rPr lang="he-IL" dirty="0"/>
-              <a:t>: 0 אומר </a:t>
-            </a:r>
-            <a:r>
-              <a:rPr lang="en-US" dirty="0"/>
-              <a:t>WT</a:t>
-            </a:r>
-            <a:r>
-              <a:rPr lang="he-IL" dirty="0"/>
-              <a:t>, ז״א אין </a:t>
-            </a:r>
-            <a:r>
-              <a:rPr lang="en-US" dirty="0"/>
-              <a:t>copy number change</a:t>
-            </a:r>
-            <a:r>
-              <a:rPr lang="he-IL" dirty="0"/>
-              <a:t>, </a:t>
-            </a:r>
-            <a:r>
-              <a:rPr lang="en-US" dirty="0"/>
-              <a:t>-1</a:t>
-            </a:r>
-            <a:r>
-              <a:rPr lang="he-IL" dirty="0"/>
-              <a:t> זה </a:t>
-            </a:r>
-            <a:r>
-              <a:rPr lang="en-US" dirty="0"/>
-              <a:t>shallow deletion</a:t>
-            </a:r>
-            <a:r>
-              <a:rPr lang="he-IL" dirty="0"/>
-              <a:t>, </a:t>
-            </a:r>
-            <a:r>
-              <a:rPr lang="en-US" dirty="0"/>
-              <a:t>-2</a:t>
-            </a:r>
-            <a:r>
-              <a:rPr lang="he-IL" dirty="0"/>
-              <a:t> זה </a:t>
-            </a:r>
-            <a:r>
-              <a:rPr lang="en-US" dirty="0"/>
-              <a:t>deep deletion</a:t>
-            </a:r>
-            <a:r>
-              <a:rPr lang="he-IL" dirty="0"/>
-              <a:t>, 1 זה </a:t>
-            </a:r>
-            <a:r>
-              <a:rPr lang="en-US" dirty="0"/>
-              <a:t>low amplification</a:t>
-            </a:r>
-            <a:r>
-              <a:rPr lang="he-IL" dirty="0"/>
-              <a:t>, 2 זה </a:t>
-            </a:r>
-            <a:r>
-              <a:rPr lang="en-US" dirty="0"/>
-              <a:t>high amplification</a:t>
-            </a:r>
-            <a:r>
-              <a:rPr lang="he-IL" dirty="0"/>
-              <a:t>. </a:t>
-            </a:r>
-            <a:r>
-              <a:rPr lang="en-US" dirty="0"/>
-              <a:t>NP</a:t>
-            </a:r>
-            <a:r>
-              <a:rPr lang="he-IL" dirty="0"/>
-              <a:t> אומר שזה </a:t>
-            </a:r>
-            <a:r>
-              <a:rPr lang="en-US" dirty="0"/>
-              <a:t>not profiled</a:t>
-            </a:r>
-            <a:r>
-              <a:rPr lang="he-IL" dirty="0"/>
-              <a:t>. אז כאן, כל מה שהוא 0 הוא </a:t>
-            </a:r>
-            <a:r>
-              <a:rPr lang="en-US" dirty="0"/>
-              <a:t>WT</a:t>
-            </a:r>
-            <a:r>
-              <a:rPr lang="he-IL" dirty="0"/>
-              <a:t>. את זה בדקתי מול </a:t>
-            </a:r>
-            <a:r>
-              <a:rPr lang="en-US" dirty="0" err="1"/>
-              <a:t>mutantions.txt</a:t>
-            </a:r>
-            <a:r>
-              <a:rPr lang="he-IL" dirty="0"/>
-              <a:t> </a:t>
-            </a:r>
-            <a:r>
-              <a:rPr lang="he-IL" dirty="0" err="1"/>
-              <a:t>מג׳יני</a:t>
-            </a:r>
-            <a:r>
-              <a:rPr lang="he-IL" dirty="0"/>
-              <a:t>, ששם הם מציינים לכל </a:t>
-            </a:r>
-            <a:r>
-              <a:rPr lang="he-IL" dirty="0" err="1"/>
-              <a:t>סאמפל</a:t>
-            </a:r>
-            <a:r>
-              <a:rPr lang="he-IL" dirty="0"/>
-              <a:t> איזו מוטציה של </a:t>
-            </a:r>
-            <a:r>
-              <a:rPr lang="en-US" dirty="0"/>
-              <a:t>TP53</a:t>
-            </a:r>
-            <a:r>
-              <a:rPr lang="he-IL" dirty="0"/>
-              <a:t> יש לו. </a:t>
-            </a:r>
-            <a:r>
-              <a:rPr lang="en-US" dirty="0"/>
-              <a:t>WT</a:t>
-            </a:r>
-            <a:r>
-              <a:rPr lang="he-IL" dirty="0"/>
-              <a:t> אמיתי זה כשאין לנו מוטציה ואין לנו </a:t>
-            </a:r>
-            <a:r>
-              <a:rPr lang="en-US" dirty="0"/>
-              <a:t>CNA</a:t>
-            </a:r>
-            <a:r>
-              <a:rPr lang="he-IL" dirty="0"/>
-              <a:t>. מוטציה מוגדרת </a:t>
-            </a:r>
-            <a:r>
-              <a:rPr lang="he-IL" dirty="0" err="1"/>
-              <a:t>ככזו</a:t>
-            </a:r>
-            <a:r>
-              <a:rPr lang="he-IL" dirty="0"/>
-              <a:t> אם מצוין ב-</a:t>
-            </a:r>
-            <a:r>
-              <a:rPr lang="en-US" dirty="0" err="1"/>
-              <a:t>mutations.txt</a:t>
-            </a:r>
-            <a:r>
-              <a:rPr lang="he-IL" dirty="0"/>
-              <a:t> שיש פה </a:t>
-            </a:r>
-            <a:r>
-              <a:rPr lang="en-US" dirty="0"/>
-              <a:t>somatic point mutation</a:t>
-            </a:r>
-            <a:r>
-              <a:rPr lang="he-IL" dirty="0"/>
-              <a:t>, לא משנה אם יש לנו </a:t>
-            </a:r>
-            <a:r>
-              <a:rPr lang="en-US" dirty="0"/>
-              <a:t>CNA</a:t>
-            </a:r>
-            <a:r>
-              <a:rPr lang="he-IL" dirty="0"/>
-              <a:t> עליו או לא. אם יש רק </a:t>
-            </a:r>
-            <a:r>
-              <a:rPr lang="en-US" dirty="0"/>
-              <a:t>CNA</a:t>
-            </a:r>
-            <a:r>
-              <a:rPr lang="he-IL" dirty="0"/>
-              <a:t>, אז לא החשבתי את זה כמוטציה.</a:t>
-            </a:r>
           </a:p>
         </p:txBody>
       </p:sp>
@@ -4118,7 +3683,7 @@
           <a:p>
             <a:fld id="{7242DB82-1DC1-9846-88D7-11B539157949}" type="slidenum">
               <a:rPr lang="en-IL" smtClean="0"/>
-              <a:t>11</a:t>
+              <a:t>10</a:t>
             </a:fld>
             <a:endParaRPr lang="en-IL"/>
           </a:p>
@@ -4137,7 +3702,7 @@
 </p:notes>
 </file>
 
-<file path=ppt/notesSlides/notesSlide12.xml><?xml version="1.0" encoding="utf-8"?>
+<file path=ppt/notesSlides/notesSlide11.xml><?xml version="1.0" encoding="utf-8"?>
 <p:notes xmlns:a="http://schemas.openxmlformats.org/drawingml/2006/main" xmlns:r="http://schemas.openxmlformats.org/officeDocument/2006/relationships" xmlns:p="http://schemas.openxmlformats.org/presentationml/2006/main">
   <p:cSld>
     <p:spTree>
@@ -4200,151 +3765,7 @@
           <a:lstStyle/>
           <a:p>
             <a:pPr marL="0" algn="r" defTabSz="914400" rtl="1" eaLnBrk="1" latinLnBrk="0" hangingPunct="1"/>
-            <a:r>
-              <a:rPr lang="he-IL" dirty="0"/>
-              <a:t>אז ראיתי </a:t>
-            </a:r>
-            <a:r>
-              <a:rPr lang="he-IL" dirty="0" err="1"/>
-              <a:t>שסאמפלים</a:t>
-            </a:r>
-            <a:r>
-              <a:rPr lang="he-IL" dirty="0"/>
-              <a:t> עם מוטציות ב-</a:t>
-            </a:r>
-            <a:r>
-              <a:rPr lang="en-US" dirty="0"/>
-              <a:t>TP53</a:t>
-            </a:r>
-            <a:r>
-              <a:rPr lang="he-IL" dirty="0"/>
-              <a:t> יש להן יותר כאוס </a:t>
-            </a:r>
-            <a:r>
-              <a:rPr lang="he-IL" dirty="0" err="1"/>
-              <a:t>גנומי</a:t>
-            </a:r>
-            <a:r>
-              <a:rPr lang="he-IL" dirty="0"/>
-              <a:t>, אבל האם יש איזושהי קורלציה בין כמה המוטציה פונקציונאלית לבין הכאוס </a:t>
-            </a:r>
-            <a:r>
-              <a:rPr lang="he-IL" dirty="0" err="1"/>
-              <a:t>הגנומי</a:t>
-            </a:r>
-            <a:r>
-              <a:rPr lang="he-IL" dirty="0"/>
-              <a:t> שמדדנו? ז״א האם ככל שמוטציה פחות פונקציונאלית ככה יש לנו יותר כאוס?</a:t>
-            </a:r>
-          </a:p>
-          <a:p>
-            <a:pPr marL="0" algn="r" defTabSz="914400" rtl="1" eaLnBrk="1" latinLnBrk="0" hangingPunct="1"/>
-            <a:r>
-              <a:rPr lang="he-IL" dirty="0"/>
-              <a:t>את ה-</a:t>
-            </a:r>
-            <a:r>
-              <a:rPr lang="en-US" dirty="0"/>
-              <a:t>EFS</a:t>
-            </a:r>
-            <a:r>
-              <a:rPr lang="he-IL" dirty="0"/>
-              <a:t> הוצאתי מ-</a:t>
-            </a:r>
-            <a:r>
-              <a:rPr lang="en-US" dirty="0" err="1"/>
-              <a:t>Giancomelli</a:t>
-            </a:r>
-            <a:r>
-              <a:rPr lang="he-IL" dirty="0"/>
-              <a:t>.</a:t>
-            </a:r>
-          </a:p>
-          <a:p>
-            <a:pPr marL="0" algn="r" defTabSz="914400" rtl="1" eaLnBrk="1" latinLnBrk="0" hangingPunct="1"/>
-            <a:r>
-              <a:rPr lang="he-IL" dirty="0"/>
-              <a:t>לקחתי את שם המוטציה (נניח </a:t>
-            </a:r>
-            <a:r>
-              <a:rPr lang="en-US" dirty="0"/>
-              <a:t>R175H</a:t>
-            </a:r>
-            <a:r>
-              <a:rPr lang="he-IL" dirty="0"/>
-              <a:t>) </a:t>
-            </a:r>
-            <a:r>
-              <a:rPr lang="he-IL" dirty="0" err="1"/>
-              <a:t>מג׳יני</a:t>
-            </a:r>
-            <a:r>
-              <a:rPr lang="he-IL" dirty="0"/>
-              <a:t> ובדקתי </a:t>
-            </a:r>
-            <a:r>
-              <a:rPr lang="he-IL" dirty="0" err="1"/>
-              <a:t>בדטא</a:t>
-            </a:r>
-            <a:r>
-              <a:rPr lang="he-IL" dirty="0"/>
-              <a:t> של </a:t>
-            </a:r>
-            <a:r>
-              <a:rPr lang="en-US" dirty="0"/>
-              <a:t>Giacomelli</a:t>
-            </a:r>
-            <a:r>
-              <a:rPr lang="he-IL" dirty="0"/>
-              <a:t> מה ה-</a:t>
-            </a:r>
-            <a:r>
-              <a:rPr lang="en-US" dirty="0"/>
-              <a:t>EFS</a:t>
-            </a:r>
-            <a:r>
-              <a:rPr lang="he-IL" dirty="0"/>
-              <a:t> של המוטציה הזו. </a:t>
-            </a:r>
-          </a:p>
-          <a:p>
-            <a:pPr marL="0" algn="r" defTabSz="914400" rtl="1" eaLnBrk="1" latinLnBrk="0" hangingPunct="1"/>
-            <a:r>
-              <a:rPr lang="he-IL" dirty="0"/>
-              <a:t>הקורלציה קיימת, אבל האפקט הוא די נמוך. יצא לי </a:t>
-            </a:r>
-            <a:r>
-              <a:rPr lang="he-IL" dirty="0" err="1"/>
-              <a:t>סיגניפיקנטי</a:t>
-            </a:r>
-            <a:r>
-              <a:rPr lang="he-IL" dirty="0"/>
-              <a:t> ככל הנראה בגלל כמות </a:t>
-            </a:r>
-            <a:r>
-              <a:rPr lang="he-IL" dirty="0" err="1"/>
-              <a:t>סאמפלים</a:t>
-            </a:r>
-            <a:r>
-              <a:rPr lang="he-IL" dirty="0"/>
-              <a:t> גבוהה, אבל האפקט הביולוגי די נמוך, ז״א כמה </a:t>
-            </a:r>
-            <a:r>
-              <a:rPr lang="en-US" dirty="0"/>
-              <a:t>TP53</a:t>
-            </a:r>
-            <a:r>
-              <a:rPr lang="he-IL" dirty="0"/>
-              <a:t> לא פונקציונלי לא בהכרח חוזה לנו כמה כאוס </a:t>
-            </a:r>
-            <a:r>
-              <a:rPr lang="he-IL" dirty="0" err="1"/>
-              <a:t>גנומי</a:t>
-            </a:r>
-            <a:r>
-              <a:rPr lang="he-IL" dirty="0"/>
-              <a:t> יהיה.</a:t>
-            </a:r>
+            <a:endParaRPr lang="he-IL" dirty="0"/>
           </a:p>
         </p:txBody>
       </p:sp>
@@ -4371,7 +3792,7 @@
           <a:p>
             <a:fld id="{7242DB82-1DC1-9846-88D7-11B539157949}" type="slidenum">
               <a:rPr lang="en-IL" smtClean="0"/>
-              <a:t>12</a:t>
+              <a:t>11</a:t>
             </a:fld>
             <a:endParaRPr lang="en-IL"/>
           </a:p>
@@ -4390,7 +3811,7 @@
 </p:notes>
 </file>
 
-<file path=ppt/notesSlides/notesSlide13.xml><?xml version="1.0" encoding="utf-8"?>
+<file path=ppt/notesSlides/notesSlide12.xml><?xml version="1.0" encoding="utf-8"?>
 <p:notes xmlns:a="http://schemas.openxmlformats.org/drawingml/2006/main" xmlns:r="http://schemas.openxmlformats.org/officeDocument/2006/relationships" xmlns:p="http://schemas.openxmlformats.org/presentationml/2006/main">
   <p:cSld>
     <p:spTree>
@@ -4453,98 +3874,7 @@
           <a:lstStyle/>
           <a:p>
             <a:pPr marL="0" algn="r" defTabSz="914400" rtl="1" eaLnBrk="1" latinLnBrk="0" hangingPunct="1"/>
-            <a:r>
-              <a:rPr lang="he-IL" dirty="0"/>
-              <a:t>כאן רציתי לבדוק האם מוטציות שכיחות גורמות ליותר </a:t>
-            </a:r>
-            <a:r>
-              <a:rPr lang="en-US" dirty="0"/>
-              <a:t>FGA</a:t>
-            </a:r>
-            <a:r>
-              <a:rPr lang="he-IL" dirty="0"/>
-              <a:t> לעומת מוטציות נדירות. הגרף השמאלי מראה את המוטציות הכי שכיחות ב-</a:t>
-            </a:r>
-            <a:r>
-              <a:rPr lang="en-US" dirty="0"/>
-              <a:t>TP53</a:t>
-            </a:r>
-            <a:r>
-              <a:rPr lang="he-IL" dirty="0"/>
-              <a:t>, מסודרות עפ״י חציון יורד משמאל לימין. הקו המקווקו הכחול זה החציון של ה-</a:t>
-            </a:r>
-            <a:r>
-              <a:rPr lang="en-US" dirty="0"/>
-              <a:t>FGA</a:t>
-            </a:r>
-            <a:r>
-              <a:rPr lang="he-IL" dirty="0"/>
-              <a:t> של ה-</a:t>
-            </a:r>
-            <a:r>
-              <a:rPr lang="en-US" dirty="0"/>
-              <a:t>WT</a:t>
-            </a:r>
-            <a:r>
-              <a:rPr lang="he-IL" dirty="0"/>
-              <a:t>. אפשר לראות די ברור שהחציונים של כל המוטציות הכי שכיחות הן מעל הממוצע של ה-</a:t>
-            </a:r>
-            <a:r>
-              <a:rPr lang="en-US" dirty="0"/>
-              <a:t>WT</a:t>
-            </a:r>
-            <a:r>
-              <a:rPr lang="he-IL" dirty="0"/>
-              <a:t>, ז״א כולן גורמות לכאוס </a:t>
-            </a:r>
-            <a:r>
-              <a:rPr lang="he-IL" dirty="0" err="1"/>
-              <a:t>גנומי</a:t>
-            </a:r>
-            <a:r>
-              <a:rPr lang="he-IL" dirty="0"/>
-              <a:t>, אבל המוטציות הנדירות גורמות ליותר כאוס, וגם הן יותר </a:t>
-            </a:r>
-            <a:r>
-              <a:rPr lang="he-IL" dirty="0" err="1"/>
-              <a:t>וריאביליות</a:t>
-            </a:r>
-            <a:r>
-              <a:rPr lang="he-IL" dirty="0"/>
-              <a:t>. ההבדל גם </a:t>
-            </a:r>
-            <a:r>
-              <a:rPr lang="he-IL" dirty="0" err="1"/>
-              <a:t>סיגניפיקנטי</a:t>
-            </a:r>
-            <a:r>
-              <a:rPr lang="he-IL" dirty="0"/>
-              <a:t> סטטיסטית. מה שכן, לקחתי את המוטציות הנדירות ביותר עם </a:t>
-            </a:r>
-            <a:r>
-              <a:rPr lang="en-US" dirty="0"/>
-              <a:t>n=10</a:t>
-            </a:r>
-            <a:r>
-              <a:rPr lang="he-IL" dirty="0"/>
-              <a:t> לעומת השכיחות יותר, עם מאות </a:t>
-            </a:r>
-            <a:r>
-              <a:rPr lang="he-IL" dirty="0" err="1"/>
-              <a:t>סאמפלים</a:t>
-            </a:r>
-            <a:r>
-              <a:rPr lang="he-IL" dirty="0"/>
-              <a:t> לכל אחד, אז החציון הוא לא בהכרח יציב. אם היו לנו יותר </a:t>
-            </a:r>
-            <a:r>
-              <a:rPr lang="he-IL" dirty="0" err="1"/>
-              <a:t>סאמפלים</a:t>
-            </a:r>
-            <a:r>
-              <a:rPr lang="he-IL" dirty="0"/>
-              <a:t> אולי התמונה הייתה אחרת.</a:t>
-            </a:r>
+            <a:endParaRPr lang="he-IL" dirty="0"/>
           </a:p>
         </p:txBody>
       </p:sp>
@@ -4571,7 +3901,7 @@
           <a:p>
             <a:fld id="{7242DB82-1DC1-9846-88D7-11B539157949}" type="slidenum">
               <a:rPr lang="en-IL" smtClean="0"/>
-              <a:t>13</a:t>
+              <a:t>12</a:t>
             </a:fld>
             <a:endParaRPr lang="en-IL"/>
           </a:p>
@@ -4590,7 +3920,7 @@
 </p:notes>
 </file>
 
-<file path=ppt/notesSlides/notesSlide14.xml><?xml version="1.0" encoding="utf-8"?>
+<file path=ppt/notesSlides/notesSlide13.xml><?xml version="1.0" encoding="utf-8"?>
 <p:notes xmlns:a="http://schemas.openxmlformats.org/drawingml/2006/main" xmlns:r="http://schemas.openxmlformats.org/officeDocument/2006/relationships" xmlns:p="http://schemas.openxmlformats.org/presentationml/2006/main">
   <p:cSld>
     <p:spTree>
@@ -4653,104 +3983,6 @@
           <a:lstStyle/>
           <a:p>
             <a:pPr marL="0" algn="r" defTabSz="914400" rtl="1" eaLnBrk="1" latinLnBrk="0" hangingPunct="1"/>
-            <a:r>
-              <a:rPr lang="he-IL" dirty="0"/>
-              <a:t>פה רציתי לעשות אנליזה עפ״י מיקום החומצות האמיניות. רציתי לראות האם יש אזורים מסוימים בגנום עם יותר מוטציות או לא.</a:t>
-            </a:r>
-          </a:p>
-          <a:p>
-            <a:pPr marL="0" algn="r" defTabSz="914400" rtl="1" eaLnBrk="1" latinLnBrk="0" hangingPunct="1"/>
-            <a:r>
-              <a:rPr lang="he-IL" dirty="0"/>
-              <a:t>בצד שמאל אפשר לראות את האזורים הכי שכיחים נמצאים סביב חומצות אמינו </a:t>
-            </a:r>
-            <a:r>
-              <a:rPr lang="en-US" dirty="0"/>
-              <a:t>245</a:t>
-            </a:r>
-            <a:r>
-              <a:rPr lang="he-IL" dirty="0"/>
-              <a:t>, </a:t>
-            </a:r>
-            <a:r>
-              <a:rPr lang="en-US" dirty="0"/>
-              <a:t>248</a:t>
-            </a:r>
-            <a:r>
-              <a:rPr lang="he-IL" dirty="0"/>
-              <a:t>, </a:t>
-            </a:r>
-            <a:r>
-              <a:rPr lang="en-US" dirty="0"/>
-              <a:t>273</a:t>
-            </a:r>
-            <a:r>
-              <a:rPr lang="he-IL" dirty="0"/>
-              <a:t>, 175. אלו </a:t>
-            </a:r>
-            <a:r>
-              <a:rPr lang="he-IL" dirty="0" err="1"/>
-              <a:t>הוטספוט</a:t>
-            </a:r>
-            <a:r>
-              <a:rPr lang="he-IL" dirty="0"/>
-              <a:t> קנוניים, כולם נמצאים ב-</a:t>
-            </a:r>
-            <a:r>
-              <a:rPr lang="en-US" dirty="0"/>
-              <a:t>DNA binding domains</a:t>
-            </a:r>
-            <a:r>
-              <a:rPr lang="he-IL" dirty="0"/>
-              <a:t> (שהוא בעצמו </a:t>
-            </a:r>
-            <a:r>
-              <a:rPr lang="he-IL" dirty="0" err="1"/>
-              <a:t>באיזור</a:t>
-            </a:r>
-            <a:r>
-              <a:rPr lang="he-IL" dirty="0"/>
-              <a:t> ה-100-290 חומצות אמיניות). כן אפשר להגיד שרוב המוטציות נמצאות באזור הזה, אבל עפ״י הגרף הימני, אי אפשר להגיד שזה אומר שבהכרח שנקבל יותר כאוס </a:t>
-            </a:r>
-            <a:r>
-              <a:rPr lang="he-IL" dirty="0" err="1"/>
-              <a:t>גנומי</a:t>
-            </a:r>
-            <a:r>
-              <a:rPr lang="he-IL" dirty="0"/>
-              <a:t>. המוטציות ההרסניות ביותר הן גם הנדירות ביותר.</a:t>
-            </a:r>
-          </a:p>
-          <a:p>
-            <a:pPr marL="0" algn="r" defTabSz="914400" rtl="1" eaLnBrk="1" latinLnBrk="0" hangingPunct="1"/>
-            <a:r>
-              <a:rPr lang="he-IL" dirty="0"/>
-              <a:t>מה שכן, בגלל שאין הרבה מהמוטציות הנדירות ביותר, אי אפשר להגיד שבהכרח הן הכי הרסניות, כי </a:t>
-            </a:r>
-            <a:r>
-              <a:rPr lang="he-IL" dirty="0" err="1"/>
-              <a:t>הסאמפל</a:t>
-            </a:r>
-            <a:r>
-              <a:rPr lang="he-IL" dirty="0"/>
-              <a:t> </a:t>
-            </a:r>
-            <a:r>
-              <a:rPr lang="he-IL" dirty="0" err="1"/>
-              <a:t>סייז</a:t>
-            </a:r>
-            <a:r>
-              <a:rPr lang="he-IL" dirty="0"/>
-              <a:t> נמוך. ז״א היה מעניין לראות האם התוצאות האלה חוזרות על עצמן כשיש לנו את אותם מספר </a:t>
-            </a:r>
-            <a:r>
-              <a:rPr lang="he-IL" dirty="0" err="1"/>
-              <a:t>סאמפלים</a:t>
-            </a:r>
-            <a:r>
-              <a:rPr lang="he-IL" dirty="0"/>
-              <a:t>.</a:t>
-            </a:r>
             <a:endParaRPr lang="en-IL" dirty="0"/>
           </a:p>
         </p:txBody>
@@ -4778,7 +4010,7 @@
           <a:p>
             <a:fld id="{7242DB82-1DC1-9846-88D7-11B539157949}" type="slidenum">
               <a:rPr lang="en-IL" smtClean="0"/>
-              <a:t>14</a:t>
+              <a:t>13</a:t>
             </a:fld>
             <a:endParaRPr lang="en-IL"/>
           </a:p>
@@ -4797,7 +4029,7 @@
 </p:notes>
 </file>
 
-<file path=ppt/notesSlides/notesSlide15.xml><?xml version="1.0" encoding="utf-8"?>
+<file path=ppt/notesSlides/notesSlide14.xml><?xml version="1.0" encoding="utf-8"?>
 <p:notes xmlns:a="http://schemas.openxmlformats.org/drawingml/2006/main" xmlns:r="http://schemas.openxmlformats.org/officeDocument/2006/relationships" xmlns:p="http://schemas.openxmlformats.org/presentationml/2006/main">
   <p:cSld>
     <p:spTree>
@@ -4860,181 +4092,6 @@
           <a:lstStyle/>
           <a:p>
             <a:pPr marL="0" algn="r" defTabSz="914400" rtl="1" eaLnBrk="1" latinLnBrk="0" hangingPunct="1"/>
-            <a:r>
-              <a:rPr lang="he-IL" dirty="0"/>
-              <a:t>אחרי זה השאלה האחרונה שרציתי לענות עליה היא האם יש לסוגי סרטן מסוימים נטייה לאפקט חזק יותר של כאוס </a:t>
-            </a:r>
-            <a:r>
-              <a:rPr lang="he-IL" dirty="0" err="1"/>
-              <a:t>גנומי</a:t>
-            </a:r>
-            <a:r>
-              <a:rPr lang="he-IL" dirty="0"/>
-              <a:t>? בצד שמאל בדקתי </a:t>
-            </a:r>
-            <a:r>
-              <a:rPr lang="he-IL" dirty="0" err="1"/>
-              <a:t>מהה</a:t>
-            </a:r>
-            <a:r>
-              <a:rPr lang="he-IL" dirty="0"/>
-              <a:t>-</a:t>
-            </a:r>
-            <a:r>
-              <a:rPr lang="en-US" dirty="0"/>
-              <a:t>Fold Change</a:t>
-            </a:r>
-            <a:r>
-              <a:rPr lang="he-IL" dirty="0"/>
-              <a:t> בין מוטציה ל-</a:t>
-            </a:r>
-            <a:r>
-              <a:rPr lang="en-US" dirty="0"/>
-              <a:t>WT</a:t>
-            </a:r>
-            <a:r>
-              <a:rPr lang="he-IL" dirty="0"/>
-              <a:t>, ז״א ההבדלים הכי גדולים בין מוטציות ל-</a:t>
-            </a:r>
-            <a:r>
-              <a:rPr lang="en-US" dirty="0"/>
-              <a:t>WT</a:t>
-            </a:r>
-            <a:r>
-              <a:rPr lang="he-IL" dirty="0"/>
-              <a:t> קרו בסרטנים שנמצאים גבוה יותר. לקחתי סוגי סרטן עם לפחות 30 </a:t>
-            </a:r>
-            <a:r>
-              <a:rPr lang="he-IL" dirty="0" err="1"/>
-              <a:t>סאמפלים</a:t>
-            </a:r>
-            <a:r>
-              <a:rPr lang="he-IL" dirty="0"/>
-              <a:t>, גם מוטנט וגם ב-</a:t>
-            </a:r>
-            <a:r>
-              <a:rPr lang="en-US" dirty="0"/>
-              <a:t>WT</a:t>
-            </a:r>
-            <a:r>
-              <a:rPr lang="he-IL" dirty="0"/>
-              <a:t> (</a:t>
-            </a:r>
-            <a:r>
-              <a:rPr lang="en-US" dirty="0" err="1"/>
-              <a:t>mann-whitney</a:t>
-            </a:r>
-            <a:r>
-              <a:rPr lang="en-US" dirty="0"/>
-              <a:t> U test</a:t>
-            </a:r>
-            <a:r>
-              <a:rPr lang="he-IL" dirty="0"/>
-              <a:t>, </a:t>
-            </a:r>
-            <a:r>
-              <a:rPr lang="he-IL" dirty="0" err="1"/>
-              <a:t>וה</a:t>
-            </a:r>
-            <a:r>
-              <a:rPr lang="he-IL" dirty="0"/>
-              <a:t>-</a:t>
-            </a:r>
-            <a:r>
-              <a:rPr lang="en-US" dirty="0"/>
-              <a:t>p-values</a:t>
-            </a:r>
-            <a:r>
-              <a:rPr lang="he-IL" dirty="0"/>
-              <a:t> תוקנו ל-</a:t>
-            </a:r>
-            <a:r>
-              <a:rPr lang="en-US" dirty="0"/>
-              <a:t>FDR</a:t>
-            </a:r>
-            <a:r>
-              <a:rPr lang="he-IL" dirty="0"/>
-              <a:t>), את השאר העפתי.</a:t>
-            </a:r>
-          </a:p>
-          <a:p>
-            <a:pPr marL="0" algn="r" defTabSz="914400" rtl="1" eaLnBrk="1" latinLnBrk="0" hangingPunct="1"/>
-            <a:r>
-              <a:rPr lang="he-IL" dirty="0"/>
-              <a:t>בצד הימני בדקתי את ה-</a:t>
-            </a:r>
-            <a:r>
-              <a:rPr lang="en-US" dirty="0"/>
-              <a:t>raw FGA</a:t>
-            </a:r>
-            <a:r>
-              <a:rPr lang="he-IL" dirty="0"/>
-              <a:t> ל-</a:t>
-            </a:r>
-            <a:r>
-              <a:rPr lang="en-US" dirty="0" err="1"/>
-              <a:t>wt</a:t>
-            </a:r>
-            <a:r>
-              <a:rPr lang="he-IL" dirty="0"/>
-              <a:t> ומוטנט עפ״י סוג סרטן. כאן דווקא רואים משהו אחר, למשל סרטני דם (</a:t>
-            </a:r>
-            <a:r>
-              <a:rPr lang="en-US" dirty="0"/>
-              <a:t>blood cancer</a:t>
-            </a:r>
-            <a:r>
-              <a:rPr lang="he-IL" dirty="0"/>
-              <a:t>, </a:t>
-            </a:r>
-            <a:r>
-              <a:rPr lang="en-US" dirty="0"/>
-              <a:t>myelodysplastic syndromes</a:t>
-            </a:r>
-            <a:r>
-              <a:rPr lang="he-IL" dirty="0"/>
-              <a:t> ולוקמיה) אמנם יש להם </a:t>
-            </a:r>
-            <a:r>
-              <a:rPr lang="he-IL" dirty="0" err="1"/>
-              <a:t>פולד</a:t>
-            </a:r>
-            <a:r>
-              <a:rPr lang="he-IL" dirty="0"/>
-              <a:t> </a:t>
-            </a:r>
-            <a:r>
-              <a:rPr lang="he-IL" dirty="0" err="1"/>
-              <a:t>צ׳יינג</a:t>
-            </a:r>
-            <a:r>
-              <a:rPr lang="he-IL" dirty="0"/>
-              <a:t>׳ גבוה לכאורה, אבל בגלל שב-</a:t>
-            </a:r>
-            <a:r>
-              <a:rPr lang="en-US" dirty="0"/>
-              <a:t>WT</a:t>
-            </a:r>
-            <a:r>
-              <a:rPr lang="he-IL" dirty="0"/>
-              <a:t> ה-</a:t>
-            </a:r>
-            <a:r>
-              <a:rPr lang="en-US" dirty="0"/>
-              <a:t>FGA</a:t>
-            </a:r>
-            <a:r>
-              <a:rPr lang="he-IL" dirty="0"/>
-              <a:t> כל כך קרוב ל-0 כל עליה בערכים הופכת להיות משמעותית. לעומת זאת </a:t>
-            </a:r>
-            <a:r>
-              <a:rPr lang="en-US" dirty="0"/>
-              <a:t>solid tumors</a:t>
-            </a:r>
-            <a:r>
-              <a:rPr lang="he-IL" dirty="0"/>
-              <a:t> מראים אפקטים חזקים.</a:t>
-            </a:r>
             <a:endParaRPr lang="en-IL" dirty="0"/>
           </a:p>
         </p:txBody>
@@ -5062,7 +4119,7 @@
           <a:p>
             <a:fld id="{7242DB82-1DC1-9846-88D7-11B539157949}" type="slidenum">
               <a:rPr lang="en-IL" smtClean="0"/>
-              <a:t>15</a:t>
+              <a:t>14</a:t>
             </a:fld>
             <a:endParaRPr lang="en-IL"/>
           </a:p>
@@ -5081,460 +4138,7 @@
 </p:notes>
 </file>
 
-<file path=ppt/notesSlides/notesSlide16.xml><?xml version="1.0" encoding="utf-8"?>
-<p:notes xmlns:a="http://schemas.openxmlformats.org/drawingml/2006/main" xmlns:r="http://schemas.openxmlformats.org/officeDocument/2006/relationships" xmlns:p="http://schemas.openxmlformats.org/presentationml/2006/main">
-  <p:cSld>
-    <p:spTree>
-      <p:nvGrpSpPr>
-        <p:cNvPr id="1" name="">
-          <a:extLst>
-            <a:ext uri="{FF2B5EF4-FFF2-40B4-BE49-F238E27FC236}">
-              <a16:creationId xmlns:a16="http://schemas.microsoft.com/office/drawing/2014/main" id="{FA7CF7D1-D124-53BB-A836-93876410A1DF}"/>
-            </a:ext>
-          </a:extLst>
-        </p:cNvPr>
-        <p:cNvGrpSpPr/>
-        <p:nvPr/>
-      </p:nvGrpSpPr>
-      <p:grpSpPr>
-        <a:xfrm>
-          <a:off x="0" y="0"/>
-          <a:ext cx="0" cy="0"/>
-          <a:chOff x="0" y="0"/>
-          <a:chExt cx="0" cy="0"/>
-        </a:xfrm>
-      </p:grpSpPr>
-      <p:sp>
-        <p:nvSpPr>
-          <p:cNvPr id="2" name="Slide Image Placeholder 1">
-            <a:extLst>
-              <a:ext uri="{FF2B5EF4-FFF2-40B4-BE49-F238E27FC236}">
-                <a16:creationId xmlns:a16="http://schemas.microsoft.com/office/drawing/2014/main" id="{976F4C45-FA5A-F555-1F40-14DD12967C1F}"/>
-              </a:ext>
-            </a:extLst>
-          </p:cNvPr>
-          <p:cNvSpPr>
-            <a:spLocks noGrp="1" noRot="1" noChangeAspect="1"/>
-          </p:cNvSpPr>
-          <p:nvPr>
-            <p:ph type="sldImg"/>
-          </p:nvPr>
-        </p:nvSpPr>
-        <p:spPr/>
-      </p:sp>
-      <p:sp>
-        <p:nvSpPr>
-          <p:cNvPr id="3" name="Notes Placeholder 2">
-            <a:extLst>
-              <a:ext uri="{FF2B5EF4-FFF2-40B4-BE49-F238E27FC236}">
-                <a16:creationId xmlns:a16="http://schemas.microsoft.com/office/drawing/2014/main" id="{D689B0D2-2A59-6DB8-1B64-11E5BF2C8194}"/>
-              </a:ext>
-            </a:extLst>
-          </p:cNvPr>
-          <p:cNvSpPr>
-            <a:spLocks noGrp="1"/>
-          </p:cNvSpPr>
-          <p:nvPr>
-            <p:ph type="body" idx="1"/>
-          </p:nvPr>
-        </p:nvSpPr>
-        <p:spPr/>
-        <p:txBody>
-          <a:bodyPr/>
-          <a:lstStyle/>
-          <a:p>
-            <a:pPr marL="0" algn="r" defTabSz="914400" rtl="1" eaLnBrk="1" latinLnBrk="0" hangingPunct="1"/>
-            <a:r>
-              <a:rPr lang="he-IL" dirty="0"/>
-              <a:t>פה עברנו כבר לאנליזה המשנית, רציתי לבדוק באופן ספציפי אילו גנים נמחקים הכי הרבה ואילו גנים מוגברים הכי הרבה.</a:t>
-            </a:r>
-            <a:endParaRPr lang="en-US" dirty="0"/>
-          </a:p>
-          <a:p>
-            <a:pPr marL="0" algn="r" defTabSz="914400" rtl="1" eaLnBrk="1" latinLnBrk="0" hangingPunct="1"/>
-            <a:r>
-              <a:rPr lang="he-IL" dirty="0"/>
-              <a:t>לקחתי את </a:t>
-            </a:r>
-            <a:r>
-              <a:rPr lang="he-IL" dirty="0" err="1"/>
-              <a:t>הסאמפלים</a:t>
-            </a:r>
-            <a:r>
-              <a:rPr lang="he-IL" dirty="0"/>
-              <a:t> המוטנטים עם ה-</a:t>
-            </a:r>
-            <a:r>
-              <a:rPr lang="en-US" dirty="0"/>
-              <a:t>FGA</a:t>
-            </a:r>
-            <a:r>
-              <a:rPr lang="he-IL" dirty="0"/>
-              <a:t> הכי גבוה </a:t>
-            </a:r>
-            <a:r>
-              <a:rPr lang="he-IL" dirty="0" err="1"/>
-              <a:t>וסאמפלים</a:t>
-            </a:r>
-            <a:r>
-              <a:rPr lang="he-IL" dirty="0"/>
-              <a:t> </a:t>
-            </a:r>
-            <a:r>
-              <a:rPr lang="en-US" dirty="0"/>
-              <a:t>WT</a:t>
-            </a:r>
-            <a:r>
-              <a:rPr lang="he-IL" dirty="0"/>
-              <a:t> עם </a:t>
-            </a:r>
-            <a:r>
-              <a:rPr lang="en-US" dirty="0"/>
-              <a:t>FGA</a:t>
-            </a:r>
-            <a:r>
-              <a:rPr lang="he-IL" dirty="0"/>
-              <a:t> נמוך, ובדקתי מה האחוז של </a:t>
-            </a:r>
-            <a:r>
-              <a:rPr lang="he-IL" dirty="0" err="1"/>
-              <a:t>הסאמפלים</a:t>
-            </a:r>
-            <a:r>
-              <a:rPr lang="he-IL" dirty="0"/>
-              <a:t> עם המוטציות ב-</a:t>
-            </a:r>
-            <a:r>
-              <a:rPr lang="en-US" dirty="0"/>
-              <a:t>TP53</a:t>
-            </a:r>
-            <a:r>
-              <a:rPr lang="he-IL" dirty="0"/>
-              <a:t> עם </a:t>
-            </a:r>
-            <a:r>
-              <a:rPr lang="en-US" dirty="0"/>
-              <a:t>FGA</a:t>
-            </a:r>
-            <a:r>
-              <a:rPr lang="he-IL" dirty="0"/>
-              <a:t> גבוה יש להם גן מסוים שהוא מוגבר או נמחק, פחות האחוז של הגידולים עם </a:t>
-            </a:r>
-            <a:r>
-              <a:rPr lang="en-US" dirty="0"/>
-              <a:t>TP53</a:t>
-            </a:r>
-            <a:r>
-              <a:rPr lang="he-IL" dirty="0"/>
-              <a:t> שהוא </a:t>
-            </a:r>
-            <a:r>
-              <a:rPr lang="en-US" dirty="0"/>
-              <a:t>WT</a:t>
-            </a:r>
-            <a:r>
-              <a:rPr lang="he-IL" dirty="0"/>
-              <a:t> עם </a:t>
-            </a:r>
-            <a:r>
-              <a:rPr lang="en-US" dirty="0"/>
-              <a:t>FGA</a:t>
-            </a:r>
-            <a:r>
-              <a:rPr lang="he-IL" dirty="0"/>
-              <a:t> נמוך (</a:t>
-            </a:r>
-            <a:r>
-              <a:rPr lang="en-US" sz="1200" b="0" i="0" kern="1200" dirty="0" err="1">
-                <a:solidFill>
-                  <a:schemeClr val="tx1"/>
-                </a:solidFill>
-                <a:effectLst/>
-                <a:latin typeface="+mn-lt"/>
-                <a:ea typeface="+mn-ea"/>
-                <a:cs typeface="+mn-cs"/>
-              </a:rPr>
-              <a:t>fisher_exact</a:t>
-            </a:r>
-            <a:r>
-              <a:rPr lang="en-US" sz="1200" b="0" i="0" kern="1200" dirty="0">
-                <a:solidFill>
-                  <a:schemeClr val="tx1"/>
-                </a:solidFill>
-                <a:effectLst/>
-                <a:latin typeface="+mn-lt"/>
-                <a:ea typeface="+mn-ea"/>
-                <a:cs typeface="+mn-cs"/>
-              </a:rPr>
-              <a:t> method</a:t>
-            </a:r>
-            <a:r>
-              <a:rPr lang="he-IL" sz="1200" b="0" i="0" kern="1200" dirty="0">
-                <a:solidFill>
-                  <a:schemeClr val="tx1"/>
-                </a:solidFill>
-                <a:effectLst/>
-                <a:latin typeface="+mn-lt"/>
-                <a:ea typeface="+mn-ea"/>
-                <a:cs typeface="+mn-cs"/>
-              </a:rPr>
-              <a:t>)</a:t>
-            </a:r>
-            <a:endParaRPr lang="en-US" dirty="0"/>
-          </a:p>
-          <a:p>
-            <a:pPr marL="0" algn="r" defTabSz="914400" rtl="1" eaLnBrk="1" latinLnBrk="0" hangingPunct="1"/>
-            <a:r>
-              <a:rPr lang="he-IL" dirty="0"/>
-              <a:t>רואים פה בבירור שיש כאן </a:t>
-            </a:r>
-            <a:r>
-              <a:rPr lang="he-IL" dirty="0" err="1"/>
-              <a:t>אונקוגנים</a:t>
-            </a:r>
-            <a:r>
-              <a:rPr lang="he-IL" dirty="0"/>
-              <a:t> קלאסיים כמו </a:t>
-            </a:r>
-            <a:r>
-              <a:rPr lang="en-US" dirty="0"/>
-              <a:t>MYC</a:t>
-            </a:r>
-            <a:r>
-              <a:rPr lang="he-IL" dirty="0"/>
-              <a:t> לצד </a:t>
-            </a:r>
-            <a:r>
-              <a:rPr lang="he-IL" dirty="0" err="1"/>
-              <a:t>טומר</a:t>
-            </a:r>
-            <a:r>
-              <a:rPr lang="he-IL" dirty="0"/>
-              <a:t> </a:t>
-            </a:r>
-            <a:r>
-              <a:rPr lang="he-IL" dirty="0" err="1"/>
-              <a:t>סופרסורים</a:t>
-            </a:r>
-            <a:r>
-              <a:rPr lang="he-IL" dirty="0"/>
-              <a:t> שנמחקים כמו </a:t>
-            </a:r>
-            <a:r>
-              <a:rPr lang="en-US" dirty="0"/>
-              <a:t>CDKN2A</a:t>
-            </a:r>
-            <a:r>
-              <a:rPr lang="he-IL" dirty="0"/>
-              <a:t> ו-</a:t>
-            </a:r>
-            <a:r>
-              <a:rPr lang="en-US" dirty="0"/>
-              <a:t>PTEN</a:t>
-            </a:r>
-            <a:r>
-              <a:rPr lang="he-IL" dirty="0"/>
-              <a:t> או גנים שמבקרים </a:t>
-            </a:r>
-            <a:r>
-              <a:rPr lang="en-US" dirty="0"/>
-              <a:t>cell cycle</a:t>
-            </a:r>
-            <a:r>
-              <a:rPr lang="he-IL" dirty="0"/>
-              <a:t> כמו </a:t>
-            </a:r>
-            <a:r>
-              <a:rPr lang="en-US" dirty="0"/>
-              <a:t>RB1</a:t>
-            </a:r>
-            <a:r>
-              <a:rPr lang="he-IL" dirty="0"/>
-              <a:t> ו-</a:t>
-            </a:r>
-            <a:r>
-              <a:rPr lang="en-US" dirty="0"/>
-              <a:t>CDKN2B</a:t>
-            </a:r>
-            <a:r>
-              <a:rPr lang="he-IL" dirty="0"/>
-              <a:t>.</a:t>
-            </a:r>
-          </a:p>
-        </p:txBody>
-      </p:sp>
-      <p:sp>
-        <p:nvSpPr>
-          <p:cNvPr id="4" name="Slide Number Placeholder 3">
-            <a:extLst>
-              <a:ext uri="{FF2B5EF4-FFF2-40B4-BE49-F238E27FC236}">
-                <a16:creationId xmlns:a16="http://schemas.microsoft.com/office/drawing/2014/main" id="{96C1921B-77A7-152E-B244-6B2E6BCB634E}"/>
-              </a:ext>
-            </a:extLst>
-          </p:cNvPr>
-          <p:cNvSpPr>
-            <a:spLocks noGrp="1"/>
-          </p:cNvSpPr>
-          <p:nvPr>
-            <p:ph type="sldNum" sz="quarter" idx="5"/>
-          </p:nvPr>
-        </p:nvSpPr>
-        <p:spPr/>
-        <p:txBody>
-          <a:bodyPr/>
-          <a:lstStyle/>
-          <a:p>
-            <a:fld id="{7242DB82-1DC1-9846-88D7-11B539157949}" type="slidenum">
-              <a:rPr lang="en-IL" smtClean="0"/>
-              <a:t>16</a:t>
-            </a:fld>
-            <a:endParaRPr lang="en-IL"/>
-          </a:p>
-        </p:txBody>
-      </p:sp>
-    </p:spTree>
-    <p:extLst>
-      <p:ext uri="{BB962C8B-B14F-4D97-AF65-F5344CB8AC3E}">
-        <p14:creationId xmlns:p14="http://schemas.microsoft.com/office/powerpoint/2010/main" val="1591463100"/>
-      </p:ext>
-    </p:extLst>
-  </p:cSld>
-  <p:clrMapOvr>
-    <a:masterClrMapping/>
-  </p:clrMapOvr>
-</p:notes>
-</file>
-
-<file path=ppt/notesSlides/notesSlide17.xml><?xml version="1.0" encoding="utf-8"?>
-<p:notes xmlns:a="http://schemas.openxmlformats.org/drawingml/2006/main" xmlns:r="http://schemas.openxmlformats.org/officeDocument/2006/relationships" xmlns:p="http://schemas.openxmlformats.org/presentationml/2006/main">
-  <p:cSld>
-    <p:spTree>
-      <p:nvGrpSpPr>
-        <p:cNvPr id="1" name="">
-          <a:extLst>
-            <a:ext uri="{FF2B5EF4-FFF2-40B4-BE49-F238E27FC236}">
-              <a16:creationId xmlns:a16="http://schemas.microsoft.com/office/drawing/2014/main" id="{8370C2FE-6C67-3C13-FFE5-BC922B1F3332}"/>
-            </a:ext>
-          </a:extLst>
-        </p:cNvPr>
-        <p:cNvGrpSpPr/>
-        <p:nvPr/>
-      </p:nvGrpSpPr>
-      <p:grpSpPr>
-        <a:xfrm>
-          <a:off x="0" y="0"/>
-          <a:ext cx="0" cy="0"/>
-          <a:chOff x="0" y="0"/>
-          <a:chExt cx="0" cy="0"/>
-        </a:xfrm>
-      </p:grpSpPr>
-      <p:sp>
-        <p:nvSpPr>
-          <p:cNvPr id="2" name="Slide Image Placeholder 1">
-            <a:extLst>
-              <a:ext uri="{FF2B5EF4-FFF2-40B4-BE49-F238E27FC236}">
-                <a16:creationId xmlns:a16="http://schemas.microsoft.com/office/drawing/2014/main" id="{347F933F-C19D-FEBC-DFA0-E37AAAABB256}"/>
-              </a:ext>
-            </a:extLst>
-          </p:cNvPr>
-          <p:cNvSpPr>
-            <a:spLocks noGrp="1" noRot="1" noChangeAspect="1"/>
-          </p:cNvSpPr>
-          <p:nvPr>
-            <p:ph type="sldImg"/>
-          </p:nvPr>
-        </p:nvSpPr>
-        <p:spPr/>
-      </p:sp>
-      <p:sp>
-        <p:nvSpPr>
-          <p:cNvPr id="3" name="Notes Placeholder 2">
-            <a:extLst>
-              <a:ext uri="{FF2B5EF4-FFF2-40B4-BE49-F238E27FC236}">
-                <a16:creationId xmlns:a16="http://schemas.microsoft.com/office/drawing/2014/main" id="{3D0E0DF6-259D-DB4A-26CD-16F98DD8D4F9}"/>
-              </a:ext>
-            </a:extLst>
-          </p:cNvPr>
-          <p:cNvSpPr>
-            <a:spLocks noGrp="1"/>
-          </p:cNvSpPr>
-          <p:nvPr>
-            <p:ph type="body" idx="1"/>
-          </p:nvPr>
-        </p:nvSpPr>
-        <p:spPr/>
-        <p:txBody>
-          <a:bodyPr/>
-          <a:lstStyle/>
-          <a:p>
-            <a:pPr marL="0" algn="r" defTabSz="914400" rtl="1" eaLnBrk="1" latinLnBrk="0" hangingPunct="1"/>
-            <a:r>
-              <a:rPr lang="he-IL" dirty="0"/>
-              <a:t>כאן בעזרת </a:t>
-            </a:r>
-            <a:r>
-              <a:rPr lang="en-US" dirty="0" err="1"/>
-              <a:t>gseapy</a:t>
-            </a:r>
-            <a:r>
-              <a:rPr lang="he-IL" dirty="0"/>
-              <a:t> בדקתי אילו מסלולים מוגברים כתוצאה מכאוס </a:t>
-            </a:r>
-            <a:r>
-              <a:rPr lang="he-IL" dirty="0" err="1"/>
-              <a:t>גנומי</a:t>
-            </a:r>
-            <a:r>
-              <a:rPr lang="he-IL" dirty="0"/>
-              <a:t>. ובהתאמה למה שראינו בשקופית הקודמת, אנחנו רואים </a:t>
-            </a:r>
-            <a:endParaRPr lang="en-IL" dirty="0"/>
-          </a:p>
-        </p:txBody>
-      </p:sp>
-      <p:sp>
-        <p:nvSpPr>
-          <p:cNvPr id="4" name="Slide Number Placeholder 3">
-            <a:extLst>
-              <a:ext uri="{FF2B5EF4-FFF2-40B4-BE49-F238E27FC236}">
-                <a16:creationId xmlns:a16="http://schemas.microsoft.com/office/drawing/2014/main" id="{D8C7538C-0906-F16E-839B-1E04AAEC9990}"/>
-              </a:ext>
-            </a:extLst>
-          </p:cNvPr>
-          <p:cNvSpPr>
-            <a:spLocks noGrp="1"/>
-          </p:cNvSpPr>
-          <p:nvPr>
-            <p:ph type="sldNum" sz="quarter" idx="5"/>
-          </p:nvPr>
-        </p:nvSpPr>
-        <p:spPr/>
-        <p:txBody>
-          <a:bodyPr/>
-          <a:lstStyle/>
-          <a:p>
-            <a:fld id="{7242DB82-1DC1-9846-88D7-11B539157949}" type="slidenum">
-              <a:rPr lang="en-IL" smtClean="0"/>
-              <a:t>17</a:t>
-            </a:fld>
-            <a:endParaRPr lang="en-IL"/>
-          </a:p>
-        </p:txBody>
-      </p:sp>
-    </p:spTree>
-    <p:extLst>
-      <p:ext uri="{BB962C8B-B14F-4D97-AF65-F5344CB8AC3E}">
-        <p14:creationId xmlns:p14="http://schemas.microsoft.com/office/powerpoint/2010/main" val="2456906902"/>
-      </p:ext>
-    </p:extLst>
-  </p:cSld>
-  <p:clrMapOvr>
-    <a:masterClrMapping/>
-  </p:clrMapOvr>
-</p:notes>
-</file>
-
-<file path=ppt/notesSlides/notesSlide18.xml><?xml version="1.0" encoding="utf-8"?>
+<file path=ppt/notesSlides/notesSlide15.xml><?xml version="1.0" encoding="utf-8"?>
 <p:notes xmlns:a="http://schemas.openxmlformats.org/drawingml/2006/main" xmlns:r="http://schemas.openxmlformats.org/officeDocument/2006/relationships" xmlns:p="http://schemas.openxmlformats.org/presentationml/2006/main">
   <p:cSld>
     <p:spTree>
@@ -5596,7 +4200,8 @@
           <a:bodyPr/>
           <a:lstStyle/>
           <a:p>
-            <a:endParaRPr lang="en-IL" dirty="0"/>
+            <a:pPr marL="0" algn="r" defTabSz="914400" rtl="1" eaLnBrk="1" latinLnBrk="0" hangingPunct="1"/>
+            <a:endParaRPr lang="he-IL" dirty="0"/>
           </a:p>
         </p:txBody>
       </p:sp>
@@ -5623,7 +4228,7 @@
           <a:p>
             <a:fld id="{7242DB82-1DC1-9846-88D7-11B539157949}" type="slidenum">
               <a:rPr lang="en-IL" smtClean="0"/>
-              <a:t>18</a:t>
+              <a:t>15</a:t>
             </a:fld>
             <a:endParaRPr lang="en-IL"/>
           </a:p>
@@ -5642,7 +4247,7 @@
 </p:notes>
 </file>
 
-<file path=ppt/notesSlides/notesSlide19.xml><?xml version="1.0" encoding="utf-8"?>
+<file path=ppt/notesSlides/notesSlide16.xml><?xml version="1.0" encoding="utf-8"?>
 <p:notes xmlns:a="http://schemas.openxmlformats.org/drawingml/2006/main" xmlns:r="http://schemas.openxmlformats.org/officeDocument/2006/relationships" xmlns:p="http://schemas.openxmlformats.org/presentationml/2006/main">
   <p:cSld>
     <p:spTree>
@@ -5704,6 +4309,7 @@
           <a:bodyPr/>
           <a:lstStyle/>
           <a:p>
+            <a:pPr marL="0" algn="r" defTabSz="914400" rtl="1" eaLnBrk="1" latinLnBrk="0" hangingPunct="1"/>
             <a:endParaRPr lang="en-IL" dirty="0"/>
           </a:p>
         </p:txBody>
@@ -5731,7 +4337,7 @@
           <a:p>
             <a:fld id="{7242DB82-1DC1-9846-88D7-11B539157949}" type="slidenum">
               <a:rPr lang="en-IL" smtClean="0"/>
-              <a:t>19</a:t>
+              <a:t>16</a:t>
             </a:fld>
             <a:endParaRPr lang="en-IL"/>
           </a:p>
@@ -5741,6 +4347,414 @@
     <p:extLst>
       <p:ext uri="{BB962C8B-B14F-4D97-AF65-F5344CB8AC3E}">
         <p14:creationId xmlns:p14="http://schemas.microsoft.com/office/powerpoint/2010/main" val="1775813623"/>
+      </p:ext>
+    </p:extLst>
+  </p:cSld>
+  <p:clrMapOvr>
+    <a:masterClrMapping/>
+  </p:clrMapOvr>
+</p:notes>
+</file>
+
+<file path=ppt/notesSlides/notesSlide17.xml><?xml version="1.0" encoding="utf-8"?>
+<p:notes xmlns:a="http://schemas.openxmlformats.org/drawingml/2006/main" xmlns:r="http://schemas.openxmlformats.org/officeDocument/2006/relationships" xmlns:p="http://schemas.openxmlformats.org/presentationml/2006/main">
+  <p:cSld>
+    <p:spTree>
+      <p:nvGrpSpPr>
+        <p:cNvPr id="1" name="">
+          <a:extLst>
+            <a:ext uri="{FF2B5EF4-FFF2-40B4-BE49-F238E27FC236}">
+              <a16:creationId xmlns:a16="http://schemas.microsoft.com/office/drawing/2014/main" id="{236BD74F-AEBA-8953-5957-21DA5B5E5A7D}"/>
+            </a:ext>
+          </a:extLst>
+        </p:cNvPr>
+        <p:cNvGrpSpPr/>
+        <p:nvPr/>
+      </p:nvGrpSpPr>
+      <p:grpSpPr>
+        <a:xfrm>
+          <a:off x="0" y="0"/>
+          <a:ext cx="0" cy="0"/>
+          <a:chOff x="0" y="0"/>
+          <a:chExt cx="0" cy="0"/>
+        </a:xfrm>
+      </p:grpSpPr>
+      <p:sp>
+        <p:nvSpPr>
+          <p:cNvPr id="2" name="Slide Image Placeholder 1">
+            <a:extLst>
+              <a:ext uri="{FF2B5EF4-FFF2-40B4-BE49-F238E27FC236}">
+                <a16:creationId xmlns:a16="http://schemas.microsoft.com/office/drawing/2014/main" id="{F181FBE0-C4F8-56CC-49FE-4D80F75B166C}"/>
+              </a:ext>
+            </a:extLst>
+          </p:cNvPr>
+          <p:cNvSpPr>
+            <a:spLocks noGrp="1" noRot="1" noChangeAspect="1"/>
+          </p:cNvSpPr>
+          <p:nvPr>
+            <p:ph type="sldImg"/>
+          </p:nvPr>
+        </p:nvSpPr>
+        <p:spPr/>
+      </p:sp>
+      <p:sp>
+        <p:nvSpPr>
+          <p:cNvPr id="3" name="Notes Placeholder 2">
+            <a:extLst>
+              <a:ext uri="{FF2B5EF4-FFF2-40B4-BE49-F238E27FC236}">
+                <a16:creationId xmlns:a16="http://schemas.microsoft.com/office/drawing/2014/main" id="{DBD1C479-4B61-32ED-2058-C6E2381053B8}"/>
+              </a:ext>
+            </a:extLst>
+          </p:cNvPr>
+          <p:cNvSpPr>
+            <a:spLocks noGrp="1"/>
+          </p:cNvSpPr>
+          <p:nvPr>
+            <p:ph type="body" idx="1"/>
+          </p:nvPr>
+        </p:nvSpPr>
+        <p:spPr/>
+        <p:txBody>
+          <a:bodyPr/>
+          <a:lstStyle/>
+          <a:p>
+            <a:pPr marL="0" algn="r" defTabSz="914400" rtl="1" eaLnBrk="1" latinLnBrk="0" hangingPunct="1"/>
+            <a:endParaRPr lang="en-IL" dirty="0"/>
+          </a:p>
+        </p:txBody>
+      </p:sp>
+      <p:sp>
+        <p:nvSpPr>
+          <p:cNvPr id="4" name="Slide Number Placeholder 3">
+            <a:extLst>
+              <a:ext uri="{FF2B5EF4-FFF2-40B4-BE49-F238E27FC236}">
+                <a16:creationId xmlns:a16="http://schemas.microsoft.com/office/drawing/2014/main" id="{C540340E-3F34-C6D4-E1EC-5C655231E989}"/>
+              </a:ext>
+            </a:extLst>
+          </p:cNvPr>
+          <p:cNvSpPr>
+            <a:spLocks noGrp="1"/>
+          </p:cNvSpPr>
+          <p:nvPr>
+            <p:ph type="sldNum" sz="quarter" idx="5"/>
+          </p:nvPr>
+        </p:nvSpPr>
+        <p:spPr/>
+        <p:txBody>
+          <a:bodyPr/>
+          <a:lstStyle/>
+          <a:p>
+            <a:fld id="{7242DB82-1DC1-9846-88D7-11B539157949}" type="slidenum">
+              <a:rPr lang="en-IL" smtClean="0"/>
+              <a:t>17</a:t>
+            </a:fld>
+            <a:endParaRPr lang="en-IL"/>
+          </a:p>
+        </p:txBody>
+      </p:sp>
+    </p:spTree>
+    <p:extLst>
+      <p:ext uri="{BB962C8B-B14F-4D97-AF65-F5344CB8AC3E}">
+        <p14:creationId xmlns:p14="http://schemas.microsoft.com/office/powerpoint/2010/main" val="553818819"/>
+      </p:ext>
+    </p:extLst>
+  </p:cSld>
+  <p:clrMapOvr>
+    <a:masterClrMapping/>
+  </p:clrMapOvr>
+</p:notes>
+</file>
+
+<file path=ppt/notesSlides/notesSlide18.xml><?xml version="1.0" encoding="utf-8"?>
+<p:notes xmlns:a="http://schemas.openxmlformats.org/drawingml/2006/main" xmlns:r="http://schemas.openxmlformats.org/officeDocument/2006/relationships" xmlns:p="http://schemas.openxmlformats.org/presentationml/2006/main">
+  <p:cSld>
+    <p:spTree>
+      <p:nvGrpSpPr>
+        <p:cNvPr id="1" name="">
+          <a:extLst>
+            <a:ext uri="{FF2B5EF4-FFF2-40B4-BE49-F238E27FC236}">
+              <a16:creationId xmlns:a16="http://schemas.microsoft.com/office/drawing/2014/main" id="{E4ACCE8D-9330-B3DB-5B69-D303099550DD}"/>
+            </a:ext>
+          </a:extLst>
+        </p:cNvPr>
+        <p:cNvGrpSpPr/>
+        <p:nvPr/>
+      </p:nvGrpSpPr>
+      <p:grpSpPr>
+        <a:xfrm>
+          <a:off x="0" y="0"/>
+          <a:ext cx="0" cy="0"/>
+          <a:chOff x="0" y="0"/>
+          <a:chExt cx="0" cy="0"/>
+        </a:xfrm>
+      </p:grpSpPr>
+      <p:sp>
+        <p:nvSpPr>
+          <p:cNvPr id="2" name="Slide Image Placeholder 1">
+            <a:extLst>
+              <a:ext uri="{FF2B5EF4-FFF2-40B4-BE49-F238E27FC236}">
+                <a16:creationId xmlns:a16="http://schemas.microsoft.com/office/drawing/2014/main" id="{EC3B9118-304F-2BE6-8422-0DD687862C2D}"/>
+              </a:ext>
+            </a:extLst>
+          </p:cNvPr>
+          <p:cNvSpPr>
+            <a:spLocks noGrp="1" noRot="1" noChangeAspect="1"/>
+          </p:cNvSpPr>
+          <p:nvPr>
+            <p:ph type="sldImg"/>
+          </p:nvPr>
+        </p:nvSpPr>
+        <p:spPr/>
+      </p:sp>
+      <p:sp>
+        <p:nvSpPr>
+          <p:cNvPr id="3" name="Notes Placeholder 2">
+            <a:extLst>
+              <a:ext uri="{FF2B5EF4-FFF2-40B4-BE49-F238E27FC236}">
+                <a16:creationId xmlns:a16="http://schemas.microsoft.com/office/drawing/2014/main" id="{3797C7D5-11A5-3A69-7067-279DCBDAB834}"/>
+              </a:ext>
+            </a:extLst>
+          </p:cNvPr>
+          <p:cNvSpPr>
+            <a:spLocks noGrp="1"/>
+          </p:cNvSpPr>
+          <p:nvPr>
+            <p:ph type="body" idx="1"/>
+          </p:nvPr>
+        </p:nvSpPr>
+        <p:spPr/>
+        <p:txBody>
+          <a:bodyPr/>
+          <a:lstStyle/>
+          <a:p>
+            <a:r>
+              <a:rPr lang="en-US" sz="1200" b="0" i="0" kern="1200" dirty="0">
+                <a:solidFill>
+                  <a:schemeClr val="tx1"/>
+                </a:solidFill>
+                <a:effectLst/>
+                <a:latin typeface="+mn-lt"/>
+                <a:ea typeface="+mn-ea"/>
+                <a:cs typeface="+mn-cs"/>
+              </a:rPr>
+              <a:t>pandas, </a:t>
+            </a:r>
+            <a:r>
+              <a:rPr lang="en-US" sz="1200" b="0" i="0" kern="1200" dirty="0" err="1">
+                <a:solidFill>
+                  <a:schemeClr val="tx1"/>
+                </a:solidFill>
+                <a:effectLst/>
+                <a:latin typeface="+mn-lt"/>
+                <a:ea typeface="+mn-ea"/>
+                <a:cs typeface="+mn-cs"/>
+              </a:rPr>
+              <a:t>numpy</a:t>
+            </a:r>
+            <a:r>
+              <a:rPr lang="he-IL" sz="1200" b="0" i="0" kern="1200" dirty="0">
+                <a:solidFill>
+                  <a:schemeClr val="tx1"/>
+                </a:solidFill>
+                <a:effectLst/>
+                <a:latin typeface="+mn-lt"/>
+                <a:ea typeface="+mn-ea"/>
+                <a:cs typeface="+mn-cs"/>
+              </a:rPr>
+              <a:t>:</a:t>
+            </a:r>
+            <a:r>
+              <a:rPr lang="en-US" sz="1200" b="0" i="0" kern="1200" dirty="0">
+                <a:solidFill>
+                  <a:schemeClr val="tx1"/>
+                </a:solidFill>
+                <a:effectLst/>
+                <a:latin typeface="+mn-lt"/>
+                <a:ea typeface="+mn-ea"/>
+                <a:cs typeface="+mn-cs"/>
+              </a:rPr>
+              <a:t> data wrangling</a:t>
+            </a:r>
+          </a:p>
+          <a:p>
+            <a:r>
+              <a:rPr lang="en-US" sz="1200" b="0" i="0" kern="1200" dirty="0" err="1">
+                <a:solidFill>
+                  <a:schemeClr val="tx1"/>
+                </a:solidFill>
+                <a:effectLst/>
+                <a:latin typeface="+mn-lt"/>
+                <a:ea typeface="+mn-ea"/>
+                <a:cs typeface="+mn-cs"/>
+              </a:rPr>
+              <a:t>scipy.stats</a:t>
+            </a:r>
+            <a:r>
+              <a:rPr lang="he-IL" sz="1200" b="0" i="0" kern="1200" dirty="0">
+                <a:solidFill>
+                  <a:schemeClr val="tx1"/>
+                </a:solidFill>
+                <a:effectLst/>
+                <a:latin typeface="+mn-lt"/>
+                <a:ea typeface="+mn-ea"/>
+                <a:cs typeface="+mn-cs"/>
+              </a:rPr>
+              <a:t>:</a:t>
+            </a:r>
+            <a:r>
+              <a:rPr lang="en-US" sz="1200" b="0" i="0" kern="1200" dirty="0">
+                <a:solidFill>
+                  <a:schemeClr val="tx1"/>
+                </a:solidFill>
+                <a:effectLst/>
+                <a:latin typeface="+mn-lt"/>
+                <a:ea typeface="+mn-ea"/>
+                <a:cs typeface="+mn-cs"/>
+              </a:rPr>
+              <a:t> statistical tests</a:t>
+            </a:r>
+          </a:p>
+          <a:p>
+            <a:r>
+              <a:rPr lang="en-US" sz="1200" b="0" i="0" kern="1200" dirty="0" err="1">
+                <a:solidFill>
+                  <a:schemeClr val="tx1"/>
+                </a:solidFill>
+                <a:effectLst/>
+                <a:latin typeface="+mn-lt"/>
+                <a:ea typeface="+mn-ea"/>
+                <a:cs typeface="+mn-cs"/>
+              </a:rPr>
+              <a:t>Statsmodels</a:t>
+            </a:r>
+            <a:r>
+              <a:rPr lang="he-IL" sz="1200" b="0" i="0" kern="1200" dirty="0">
+                <a:solidFill>
+                  <a:schemeClr val="tx1"/>
+                </a:solidFill>
+                <a:effectLst/>
+                <a:latin typeface="+mn-lt"/>
+                <a:ea typeface="+mn-ea"/>
+                <a:cs typeface="+mn-cs"/>
+              </a:rPr>
+              <a:t>:</a:t>
+            </a:r>
+            <a:r>
+              <a:rPr lang="en-US" sz="1200" b="0" i="0" kern="1200" dirty="0">
+                <a:solidFill>
+                  <a:schemeClr val="tx1"/>
+                </a:solidFill>
+                <a:effectLst/>
+                <a:latin typeface="+mn-lt"/>
+                <a:ea typeface="+mn-ea"/>
+                <a:cs typeface="+mn-cs"/>
+              </a:rPr>
+              <a:t> BH FDR correction (</a:t>
+            </a:r>
+            <a:r>
+              <a:rPr lang="en-US" sz="1200" b="0" i="0" kern="1200" dirty="0" err="1">
+                <a:solidFill>
+                  <a:schemeClr val="tx1"/>
+                </a:solidFill>
+                <a:effectLst/>
+                <a:latin typeface="+mn-lt"/>
+                <a:ea typeface="+mn-ea"/>
+                <a:cs typeface="+mn-cs"/>
+              </a:rPr>
+              <a:t>multipletests</a:t>
+            </a:r>
+            <a:r>
+              <a:rPr lang="en-US" sz="1200" b="0" i="0" kern="1200" dirty="0">
+                <a:solidFill>
+                  <a:schemeClr val="tx1"/>
+                </a:solidFill>
+                <a:effectLst/>
+                <a:latin typeface="+mn-lt"/>
+                <a:ea typeface="+mn-ea"/>
+                <a:cs typeface="+mn-cs"/>
+              </a:rPr>
+              <a:t>)</a:t>
+            </a:r>
+          </a:p>
+          <a:p>
+            <a:r>
+              <a:rPr lang="en-US" sz="1200" b="0" i="0" kern="1200" dirty="0">
+                <a:solidFill>
+                  <a:schemeClr val="tx1"/>
+                </a:solidFill>
+                <a:effectLst/>
+                <a:latin typeface="+mn-lt"/>
+                <a:ea typeface="+mn-ea"/>
+                <a:cs typeface="+mn-cs"/>
+              </a:rPr>
+              <a:t>matplotlib, seaborn</a:t>
+            </a:r>
+            <a:r>
+              <a:rPr lang="he-IL" sz="1200" b="0" i="0" kern="1200" dirty="0">
+                <a:solidFill>
+                  <a:schemeClr val="tx1"/>
+                </a:solidFill>
+                <a:effectLst/>
+                <a:latin typeface="+mn-lt"/>
+                <a:ea typeface="+mn-ea"/>
+                <a:cs typeface="+mn-cs"/>
+              </a:rPr>
+              <a:t>:</a:t>
+            </a:r>
+            <a:r>
+              <a:rPr lang="en-US" sz="1200" b="0" i="0" kern="1200" dirty="0">
+                <a:solidFill>
+                  <a:schemeClr val="tx1"/>
+                </a:solidFill>
+                <a:effectLst/>
+                <a:latin typeface="+mn-lt"/>
+                <a:ea typeface="+mn-ea"/>
+                <a:cs typeface="+mn-cs"/>
+              </a:rPr>
+              <a:t> visualization</a:t>
+            </a:r>
+          </a:p>
+          <a:p>
+            <a:br>
+              <a:rPr lang="en-US" dirty="0"/>
+            </a:br>
+            <a:endParaRPr lang="he-IL" dirty="0"/>
+          </a:p>
+        </p:txBody>
+      </p:sp>
+      <p:sp>
+        <p:nvSpPr>
+          <p:cNvPr id="4" name="Slide Number Placeholder 3">
+            <a:extLst>
+              <a:ext uri="{FF2B5EF4-FFF2-40B4-BE49-F238E27FC236}">
+                <a16:creationId xmlns:a16="http://schemas.microsoft.com/office/drawing/2014/main" id="{D056188F-620B-449A-B931-04C627F70D9A}"/>
+              </a:ext>
+            </a:extLst>
+          </p:cNvPr>
+          <p:cNvSpPr>
+            <a:spLocks noGrp="1"/>
+          </p:cNvSpPr>
+          <p:nvPr>
+            <p:ph type="sldNum" sz="quarter" idx="5"/>
+          </p:nvPr>
+        </p:nvSpPr>
+        <p:spPr/>
+        <p:txBody>
+          <a:bodyPr/>
+          <a:lstStyle/>
+          <a:p>
+            <a:fld id="{7242DB82-1DC1-9846-88D7-11B539157949}" type="slidenum">
+              <a:rPr lang="en-IL" smtClean="0"/>
+              <a:t>18</a:t>
+            </a:fld>
+            <a:endParaRPr lang="en-IL"/>
+          </a:p>
+        </p:txBody>
+      </p:sp>
+    </p:spTree>
+    <p:extLst>
+      <p:ext uri="{BB962C8B-B14F-4D97-AF65-F5344CB8AC3E}">
+        <p14:creationId xmlns:p14="http://schemas.microsoft.com/office/powerpoint/2010/main" val="1189219837"/>
       </p:ext>
     </p:extLst>
   </p:cSld>
@@ -5813,152 +4827,6 @@
           <a:lstStyle/>
           <a:p>
             <a:pPr marL="0" algn="r" defTabSz="914400" rtl="1" eaLnBrk="1" latinLnBrk="0" hangingPunct="1"/>
-            <a:r>
-              <a:rPr lang="he-IL" dirty="0"/>
-              <a:t>אני אעשה </a:t>
-            </a:r>
-            <a:r>
-              <a:rPr lang="he-IL" dirty="0" err="1"/>
-              <a:t>ריקאפ</a:t>
-            </a:r>
-            <a:r>
-              <a:rPr lang="he-IL" dirty="0"/>
-              <a:t> קצר: </a:t>
-            </a:r>
-            <a:r>
-              <a:rPr lang="en-US" dirty="0"/>
-              <a:t>TP53</a:t>
-            </a:r>
-            <a:r>
-              <a:rPr lang="he-IL" dirty="0"/>
-              <a:t> הוא בעצם </a:t>
-            </a:r>
-            <a:r>
-              <a:rPr lang="he-IL" dirty="0" err="1"/>
-              <a:t>טומר</a:t>
-            </a:r>
-            <a:r>
-              <a:rPr lang="he-IL" dirty="0"/>
-              <a:t> </a:t>
-            </a:r>
-            <a:r>
-              <a:rPr lang="he-IL" dirty="0" err="1"/>
-              <a:t>סופרסור</a:t>
-            </a:r>
-            <a:r>
-              <a:rPr lang="he-IL" dirty="0"/>
-              <a:t> מרכזי, שמתפקד כמעין </a:t>
-            </a:r>
-            <a:r>
-              <a:rPr lang="he-IL" dirty="0" err="1"/>
-              <a:t>סופרהירו</a:t>
-            </a:r>
-            <a:r>
-              <a:rPr lang="he-IL" dirty="0"/>
-              <a:t> של התא: אם יש צורך להפעיל סטרס </a:t>
-            </a:r>
-            <a:r>
-              <a:rPr lang="he-IL" dirty="0" err="1"/>
-              <a:t>ריספונס</a:t>
-            </a:r>
-            <a:r>
-              <a:rPr lang="he-IL" dirty="0"/>
-              <a:t>, הליכי תיקון דנ״א, </a:t>
-            </a:r>
-            <a:r>
-              <a:rPr lang="he-IL" dirty="0" err="1"/>
-              <a:t>אפופטוזיס</a:t>
-            </a:r>
-            <a:r>
-              <a:rPr lang="he-IL" dirty="0"/>
-              <a:t> וכן הלאה, </a:t>
-            </a:r>
-            <a:r>
-              <a:rPr lang="en-US" dirty="0"/>
-              <a:t>TP53</a:t>
-            </a:r>
-            <a:r>
-              <a:rPr lang="he-IL" dirty="0"/>
-              <a:t> נמצא שם ומניע או מבקר את התהליכים האלו. מוטציות ב-</a:t>
-            </a:r>
-            <a:r>
-              <a:rPr lang="en-US" dirty="0"/>
-              <a:t>TP53</a:t>
-            </a:r>
-            <a:r>
-              <a:rPr lang="he-IL" dirty="0"/>
-              <a:t> יכולות להשפיע על המסלולים האלו, והן יושבות על איזשהו ספקטרום מבחינת הפנוטיפ שהן גורמות לו, ז״א מוטציות שונות ב-</a:t>
-            </a:r>
-            <a:r>
-              <a:rPr lang="en-US" dirty="0"/>
-              <a:t>TP53</a:t>
-            </a:r>
-            <a:r>
-              <a:rPr lang="he-IL" dirty="0"/>
-              <a:t> יובילו לקשת של </a:t>
-            </a:r>
-            <a:r>
-              <a:rPr lang="he-IL" dirty="0" err="1"/>
-              <a:t>פנוטיפים</a:t>
-            </a:r>
-            <a:r>
-              <a:rPr lang="he-IL" dirty="0"/>
-              <a:t> ולא מדובר באחד יחיד.</a:t>
-            </a:r>
-          </a:p>
-          <a:p>
-            <a:pPr marL="0" algn="r" defTabSz="914400" rtl="1" eaLnBrk="1" latinLnBrk="0" hangingPunct="1"/>
-            <a:endParaRPr lang="he-IL" dirty="0"/>
-          </a:p>
-          <a:p>
-            <a:pPr marL="0" marR="0" lvl="0" indent="0" algn="r" defTabSz="914400" rtl="1" eaLnBrk="1" fontAlgn="auto" latinLnBrk="0" hangingPunct="1">
-              <a:lnSpc>
-                <a:spcPct val="100000"/>
-              </a:lnSpc>
-              <a:spcBef>
-                <a:spcPts val="0"/>
-              </a:spcBef>
-              <a:spcAft>
-                <a:spcPts val="0"/>
-              </a:spcAft>
-              <a:buClrTx/>
-              <a:buSzTx/>
-              <a:buFontTx/>
-              <a:buNone/>
-              <a:tabLst/>
-              <a:defRPr/>
-            </a:pPr>
-            <a:r>
-              <a:rPr lang="he-IL" dirty="0"/>
-              <a:t>אחת ההשערות שלי היא ש-</a:t>
-            </a:r>
-            <a:r>
-              <a:rPr lang="en-US" dirty="0"/>
-              <a:t>TP53</a:t>
-            </a:r>
-            <a:r>
-              <a:rPr lang="he-IL" dirty="0"/>
-              <a:t> פגום יכול להוביל ל-</a:t>
-            </a:r>
-            <a:r>
-              <a:rPr lang="en-US" dirty="0"/>
-              <a:t>Copy number variation</a:t>
-            </a:r>
-            <a:r>
-              <a:rPr lang="he-IL" dirty="0"/>
-              <a:t> וכתוצאה מכך לכאוס </a:t>
-            </a:r>
-            <a:r>
-              <a:rPr lang="he-IL" dirty="0" err="1"/>
-              <a:t>גנומי</a:t>
-            </a:r>
-            <a:r>
-              <a:rPr lang="he-IL" dirty="0"/>
-              <a:t>.</a:t>
-            </a:r>
-          </a:p>
-          <a:p>
-            <a:pPr marL="0" algn="r" defTabSz="914400" rtl="1" eaLnBrk="1" latinLnBrk="0" hangingPunct="1"/>
             <a:endParaRPr lang="he-IL" dirty="0"/>
           </a:p>
         </p:txBody>
@@ -5996,331 +4864,6 @@
     <p:extLst>
       <p:ext uri="{BB962C8B-B14F-4D97-AF65-F5344CB8AC3E}">
         <p14:creationId xmlns:p14="http://schemas.microsoft.com/office/powerpoint/2010/main" val="230172384"/>
-      </p:ext>
-    </p:extLst>
-  </p:cSld>
-  <p:clrMapOvr>
-    <a:masterClrMapping/>
-  </p:clrMapOvr>
-</p:notes>
-</file>
-
-<file path=ppt/notesSlides/notesSlide20.xml><?xml version="1.0" encoding="utf-8"?>
-<p:notes xmlns:a="http://schemas.openxmlformats.org/drawingml/2006/main" xmlns:r="http://schemas.openxmlformats.org/officeDocument/2006/relationships" xmlns:p="http://schemas.openxmlformats.org/presentationml/2006/main">
-  <p:cSld>
-    <p:spTree>
-      <p:nvGrpSpPr>
-        <p:cNvPr id="1" name="">
-          <a:extLst>
-            <a:ext uri="{FF2B5EF4-FFF2-40B4-BE49-F238E27FC236}">
-              <a16:creationId xmlns:a16="http://schemas.microsoft.com/office/drawing/2014/main" id="{236BD74F-AEBA-8953-5957-21DA5B5E5A7D}"/>
-            </a:ext>
-          </a:extLst>
-        </p:cNvPr>
-        <p:cNvGrpSpPr/>
-        <p:nvPr/>
-      </p:nvGrpSpPr>
-      <p:grpSpPr>
-        <a:xfrm>
-          <a:off x="0" y="0"/>
-          <a:ext cx="0" cy="0"/>
-          <a:chOff x="0" y="0"/>
-          <a:chExt cx="0" cy="0"/>
-        </a:xfrm>
-      </p:grpSpPr>
-      <p:sp>
-        <p:nvSpPr>
-          <p:cNvPr id="2" name="Slide Image Placeholder 1">
-            <a:extLst>
-              <a:ext uri="{FF2B5EF4-FFF2-40B4-BE49-F238E27FC236}">
-                <a16:creationId xmlns:a16="http://schemas.microsoft.com/office/drawing/2014/main" id="{F181FBE0-C4F8-56CC-49FE-4D80F75B166C}"/>
-              </a:ext>
-            </a:extLst>
-          </p:cNvPr>
-          <p:cNvSpPr>
-            <a:spLocks noGrp="1" noRot="1" noChangeAspect="1"/>
-          </p:cNvSpPr>
-          <p:nvPr>
-            <p:ph type="sldImg"/>
-          </p:nvPr>
-        </p:nvSpPr>
-        <p:spPr/>
-      </p:sp>
-      <p:sp>
-        <p:nvSpPr>
-          <p:cNvPr id="3" name="Notes Placeholder 2">
-            <a:extLst>
-              <a:ext uri="{FF2B5EF4-FFF2-40B4-BE49-F238E27FC236}">
-                <a16:creationId xmlns:a16="http://schemas.microsoft.com/office/drawing/2014/main" id="{DBD1C479-4B61-32ED-2058-C6E2381053B8}"/>
-              </a:ext>
-            </a:extLst>
-          </p:cNvPr>
-          <p:cNvSpPr>
-            <a:spLocks noGrp="1"/>
-          </p:cNvSpPr>
-          <p:nvPr>
-            <p:ph type="body" idx="1"/>
-          </p:nvPr>
-        </p:nvSpPr>
-        <p:spPr/>
-        <p:txBody>
-          <a:bodyPr/>
-          <a:lstStyle/>
-          <a:p>
-            <a:endParaRPr lang="en-IL" dirty="0"/>
-          </a:p>
-        </p:txBody>
-      </p:sp>
-      <p:sp>
-        <p:nvSpPr>
-          <p:cNvPr id="4" name="Slide Number Placeholder 3">
-            <a:extLst>
-              <a:ext uri="{FF2B5EF4-FFF2-40B4-BE49-F238E27FC236}">
-                <a16:creationId xmlns:a16="http://schemas.microsoft.com/office/drawing/2014/main" id="{C540340E-3F34-C6D4-E1EC-5C655231E989}"/>
-              </a:ext>
-            </a:extLst>
-          </p:cNvPr>
-          <p:cNvSpPr>
-            <a:spLocks noGrp="1"/>
-          </p:cNvSpPr>
-          <p:nvPr>
-            <p:ph type="sldNum" sz="quarter" idx="5"/>
-          </p:nvPr>
-        </p:nvSpPr>
-        <p:spPr/>
-        <p:txBody>
-          <a:bodyPr/>
-          <a:lstStyle/>
-          <a:p>
-            <a:fld id="{7242DB82-1DC1-9846-88D7-11B539157949}" type="slidenum">
-              <a:rPr lang="en-IL" smtClean="0"/>
-              <a:t>20</a:t>
-            </a:fld>
-            <a:endParaRPr lang="en-IL"/>
-          </a:p>
-        </p:txBody>
-      </p:sp>
-    </p:spTree>
-    <p:extLst>
-      <p:ext uri="{BB962C8B-B14F-4D97-AF65-F5344CB8AC3E}">
-        <p14:creationId xmlns:p14="http://schemas.microsoft.com/office/powerpoint/2010/main" val="553818819"/>
-      </p:ext>
-    </p:extLst>
-  </p:cSld>
-  <p:clrMapOvr>
-    <a:masterClrMapping/>
-  </p:clrMapOvr>
-</p:notes>
-</file>
-
-<file path=ppt/notesSlides/notesSlide21.xml><?xml version="1.0" encoding="utf-8"?>
-<p:notes xmlns:a="http://schemas.openxmlformats.org/drawingml/2006/main" xmlns:r="http://schemas.openxmlformats.org/officeDocument/2006/relationships" xmlns:p="http://schemas.openxmlformats.org/presentationml/2006/main">
-  <p:cSld>
-    <p:spTree>
-      <p:nvGrpSpPr>
-        <p:cNvPr id="1" name="">
-          <a:extLst>
-            <a:ext uri="{FF2B5EF4-FFF2-40B4-BE49-F238E27FC236}">
-              <a16:creationId xmlns:a16="http://schemas.microsoft.com/office/drawing/2014/main" id="{C893C9C7-0A84-19E0-282D-872CF81B60D7}"/>
-            </a:ext>
-          </a:extLst>
-        </p:cNvPr>
-        <p:cNvGrpSpPr/>
-        <p:nvPr/>
-      </p:nvGrpSpPr>
-      <p:grpSpPr>
-        <a:xfrm>
-          <a:off x="0" y="0"/>
-          <a:ext cx="0" cy="0"/>
-          <a:chOff x="0" y="0"/>
-          <a:chExt cx="0" cy="0"/>
-        </a:xfrm>
-      </p:grpSpPr>
-      <p:sp>
-        <p:nvSpPr>
-          <p:cNvPr id="2" name="Slide Image Placeholder 1">
-            <a:extLst>
-              <a:ext uri="{FF2B5EF4-FFF2-40B4-BE49-F238E27FC236}">
-                <a16:creationId xmlns:a16="http://schemas.microsoft.com/office/drawing/2014/main" id="{8A07D94A-7328-5289-D8F9-F0AD4D9AD1B6}"/>
-              </a:ext>
-            </a:extLst>
-          </p:cNvPr>
-          <p:cNvSpPr>
-            <a:spLocks noGrp="1" noRot="1" noChangeAspect="1"/>
-          </p:cNvSpPr>
-          <p:nvPr>
-            <p:ph type="sldImg"/>
-          </p:nvPr>
-        </p:nvSpPr>
-        <p:spPr/>
-      </p:sp>
-      <p:sp>
-        <p:nvSpPr>
-          <p:cNvPr id="3" name="Notes Placeholder 2">
-            <a:extLst>
-              <a:ext uri="{FF2B5EF4-FFF2-40B4-BE49-F238E27FC236}">
-                <a16:creationId xmlns:a16="http://schemas.microsoft.com/office/drawing/2014/main" id="{83E45201-1E61-EE11-C528-A54632CD2F0B}"/>
-              </a:ext>
-            </a:extLst>
-          </p:cNvPr>
-          <p:cNvSpPr>
-            <a:spLocks noGrp="1"/>
-          </p:cNvSpPr>
-          <p:nvPr>
-            <p:ph type="body" idx="1"/>
-          </p:nvPr>
-        </p:nvSpPr>
-        <p:spPr/>
-        <p:txBody>
-          <a:bodyPr/>
-          <a:lstStyle/>
-          <a:p>
-            <a:endParaRPr lang="en-IL" dirty="0"/>
-          </a:p>
-        </p:txBody>
-      </p:sp>
-      <p:sp>
-        <p:nvSpPr>
-          <p:cNvPr id="4" name="Slide Number Placeholder 3">
-            <a:extLst>
-              <a:ext uri="{FF2B5EF4-FFF2-40B4-BE49-F238E27FC236}">
-                <a16:creationId xmlns:a16="http://schemas.microsoft.com/office/drawing/2014/main" id="{2EB256CB-51C4-A26F-AE16-ABE7BD5E5E3B}"/>
-              </a:ext>
-            </a:extLst>
-          </p:cNvPr>
-          <p:cNvSpPr>
-            <a:spLocks noGrp="1"/>
-          </p:cNvSpPr>
-          <p:nvPr>
-            <p:ph type="sldNum" sz="quarter" idx="5"/>
-          </p:nvPr>
-        </p:nvSpPr>
-        <p:spPr/>
-        <p:txBody>
-          <a:bodyPr/>
-          <a:lstStyle/>
-          <a:p>
-            <a:fld id="{7242DB82-1DC1-9846-88D7-11B539157949}" type="slidenum">
-              <a:rPr lang="en-IL" smtClean="0"/>
-              <a:t>21</a:t>
-            </a:fld>
-            <a:endParaRPr lang="en-IL"/>
-          </a:p>
-        </p:txBody>
-      </p:sp>
-    </p:spTree>
-    <p:extLst>
-      <p:ext uri="{BB962C8B-B14F-4D97-AF65-F5344CB8AC3E}">
-        <p14:creationId xmlns:p14="http://schemas.microsoft.com/office/powerpoint/2010/main" val="941794388"/>
-      </p:ext>
-    </p:extLst>
-  </p:cSld>
-  <p:clrMapOvr>
-    <a:masterClrMapping/>
-  </p:clrMapOvr>
-</p:notes>
-</file>
-
-<file path=ppt/notesSlides/notesSlide22.xml><?xml version="1.0" encoding="utf-8"?>
-<p:notes xmlns:a="http://schemas.openxmlformats.org/drawingml/2006/main" xmlns:r="http://schemas.openxmlformats.org/officeDocument/2006/relationships" xmlns:p="http://schemas.openxmlformats.org/presentationml/2006/main">
-  <p:cSld>
-    <p:spTree>
-      <p:nvGrpSpPr>
-        <p:cNvPr id="1" name="">
-          <a:extLst>
-            <a:ext uri="{FF2B5EF4-FFF2-40B4-BE49-F238E27FC236}">
-              <a16:creationId xmlns:a16="http://schemas.microsoft.com/office/drawing/2014/main" id="{E4ACCE8D-9330-B3DB-5B69-D303099550DD}"/>
-            </a:ext>
-          </a:extLst>
-        </p:cNvPr>
-        <p:cNvGrpSpPr/>
-        <p:nvPr/>
-      </p:nvGrpSpPr>
-      <p:grpSpPr>
-        <a:xfrm>
-          <a:off x="0" y="0"/>
-          <a:ext cx="0" cy="0"/>
-          <a:chOff x="0" y="0"/>
-          <a:chExt cx="0" cy="0"/>
-        </a:xfrm>
-      </p:grpSpPr>
-      <p:sp>
-        <p:nvSpPr>
-          <p:cNvPr id="2" name="Slide Image Placeholder 1">
-            <a:extLst>
-              <a:ext uri="{FF2B5EF4-FFF2-40B4-BE49-F238E27FC236}">
-                <a16:creationId xmlns:a16="http://schemas.microsoft.com/office/drawing/2014/main" id="{EC3B9118-304F-2BE6-8422-0DD687862C2D}"/>
-              </a:ext>
-            </a:extLst>
-          </p:cNvPr>
-          <p:cNvSpPr>
-            <a:spLocks noGrp="1" noRot="1" noChangeAspect="1"/>
-          </p:cNvSpPr>
-          <p:nvPr>
-            <p:ph type="sldImg"/>
-          </p:nvPr>
-        </p:nvSpPr>
-        <p:spPr/>
-      </p:sp>
-      <p:sp>
-        <p:nvSpPr>
-          <p:cNvPr id="3" name="Notes Placeholder 2">
-            <a:extLst>
-              <a:ext uri="{FF2B5EF4-FFF2-40B4-BE49-F238E27FC236}">
-                <a16:creationId xmlns:a16="http://schemas.microsoft.com/office/drawing/2014/main" id="{3797C7D5-11A5-3A69-7067-279DCBDAB834}"/>
-              </a:ext>
-            </a:extLst>
-          </p:cNvPr>
-          <p:cNvSpPr>
-            <a:spLocks noGrp="1"/>
-          </p:cNvSpPr>
-          <p:nvPr>
-            <p:ph type="body" idx="1"/>
-          </p:nvPr>
-        </p:nvSpPr>
-        <p:spPr/>
-        <p:txBody>
-          <a:bodyPr/>
-          <a:lstStyle/>
-          <a:p>
-            <a:pPr marL="0" algn="r" defTabSz="914400" rtl="1" eaLnBrk="1" latinLnBrk="0" hangingPunct="1"/>
-            <a:endParaRPr lang="he-IL" dirty="0"/>
-          </a:p>
-        </p:txBody>
-      </p:sp>
-      <p:sp>
-        <p:nvSpPr>
-          <p:cNvPr id="4" name="Slide Number Placeholder 3">
-            <a:extLst>
-              <a:ext uri="{FF2B5EF4-FFF2-40B4-BE49-F238E27FC236}">
-                <a16:creationId xmlns:a16="http://schemas.microsoft.com/office/drawing/2014/main" id="{D056188F-620B-449A-B931-04C627F70D9A}"/>
-              </a:ext>
-            </a:extLst>
-          </p:cNvPr>
-          <p:cNvSpPr>
-            <a:spLocks noGrp="1"/>
-          </p:cNvSpPr>
-          <p:nvPr>
-            <p:ph type="sldNum" sz="quarter" idx="5"/>
-          </p:nvPr>
-        </p:nvSpPr>
-        <p:spPr/>
-        <p:txBody>
-          <a:bodyPr/>
-          <a:lstStyle/>
-          <a:p>
-            <a:fld id="{7242DB82-1DC1-9846-88D7-11B539157949}" type="slidenum">
-              <a:rPr lang="en-IL" smtClean="0"/>
-              <a:t>22</a:t>
-            </a:fld>
-            <a:endParaRPr lang="en-IL"/>
-          </a:p>
-        </p:txBody>
-      </p:sp>
-    </p:spTree>
-    <p:extLst>
-      <p:ext uri="{BB962C8B-B14F-4D97-AF65-F5344CB8AC3E}">
-        <p14:creationId xmlns:p14="http://schemas.microsoft.com/office/powerpoint/2010/main" val="1189219837"/>
       </p:ext>
     </p:extLst>
   </p:cSld>
@@ -6391,179 +4934,6 @@
         <p:txBody>
           <a:bodyPr/>
           <a:lstStyle/>
-          <a:p>
-            <a:pPr marL="0" algn="r" defTabSz="914400" rtl="1" eaLnBrk="1" latinLnBrk="0" hangingPunct="1"/>
-            <a:r>
-              <a:rPr lang="he-IL" dirty="0"/>
-              <a:t>מה זה </a:t>
-            </a:r>
-            <a:r>
-              <a:rPr lang="en-US" dirty="0"/>
-              <a:t>Copy number variation</a:t>
-            </a:r>
-            <a:r>
-              <a:rPr lang="he-IL" dirty="0"/>
-              <a:t>? מדובר במספר עותקים שונה מהרגיל של גן מסוים, בין אם זה מחיקה של גן או אמפליפיקציה של גן. בהתאמה, אם יש לנו הרבה עותקים מגן מסוים, יהיה לנו יותר רנ״א וסביר להניח שיהיה לנו יותר חלבון. אותו דבר אם יש לנו החסרה של עותק, ככל הנראה יהיה לנו פחות חלבון. זה בעייתי אם פתאום יש לנו החסרה של גן </a:t>
-            </a:r>
-            <a:r>
-              <a:rPr lang="he-IL" dirty="0" err="1"/>
-              <a:t>טומר</a:t>
-            </a:r>
-            <a:r>
-              <a:rPr lang="he-IL" dirty="0"/>
-              <a:t> </a:t>
-            </a:r>
-            <a:r>
-              <a:rPr lang="he-IL" dirty="0" err="1"/>
-              <a:t>סופרסור</a:t>
-            </a:r>
-            <a:r>
-              <a:rPr lang="he-IL" dirty="0"/>
-              <a:t>, שאחראי למשל על בקרת חלוקת התא. אם יש לנו החסרה של עותקים ממנו, אנחנו עלולים לקבל חלוקה בלתי נשלטת של התא.</a:t>
-            </a:r>
-            <a:endParaRPr lang="en-US" dirty="0"/>
-          </a:p>
-          <a:p>
-            <a:pPr marL="0" algn="r" defTabSz="914400" rtl="1" eaLnBrk="1" latinLnBrk="0" hangingPunct="1"/>
-            <a:endParaRPr lang="en-US" dirty="0"/>
-          </a:p>
-          <a:p>
-            <a:pPr marL="0" algn="r" defTabSz="914400" rtl="1" eaLnBrk="1" latinLnBrk="0" hangingPunct="1"/>
-            <a:r>
-              <a:rPr lang="he-IL" dirty="0"/>
-              <a:t>אני אשתמש במדד שנקרא </a:t>
-            </a:r>
-            <a:r>
-              <a:rPr lang="en-US" dirty="0"/>
-              <a:t>FGA</a:t>
-            </a:r>
-            <a:r>
-              <a:rPr lang="he-IL" dirty="0"/>
-              <a:t>.</a:t>
-            </a:r>
-            <a:endParaRPr lang="en-US" dirty="0"/>
-          </a:p>
-          <a:p>
-            <a:pPr marL="0" marR="0" lvl="0" indent="0" algn="r" defTabSz="914400" rtl="1" eaLnBrk="1" fontAlgn="auto" latinLnBrk="0" hangingPunct="1">
-              <a:lnSpc>
-                <a:spcPct val="100000"/>
-              </a:lnSpc>
-              <a:spcBef>
-                <a:spcPts val="0"/>
-              </a:spcBef>
-              <a:spcAft>
-                <a:spcPts val="0"/>
-              </a:spcAft>
-              <a:buClrTx/>
-              <a:buSzTx/>
-              <a:buFontTx/>
-              <a:buNone/>
-              <a:tabLst/>
-              <a:defRPr/>
-            </a:pPr>
-            <a:r>
-              <a:rPr lang="en-US" sz="1200" b="1" i="0" kern="1200" dirty="0">
-                <a:solidFill>
-                  <a:schemeClr val="tx1"/>
-                </a:solidFill>
-                <a:effectLst/>
-                <a:latin typeface="+mn-lt"/>
-                <a:ea typeface="+mn-ea"/>
-                <a:cs typeface="+mn-cs"/>
-              </a:rPr>
-              <a:t>FGA = (number of base pairs with copy number gain or loss) / (total base pairs profiled)</a:t>
-            </a:r>
-          </a:p>
-          <a:p>
-            <a:pPr algn="r" rtl="1"/>
-            <a:r>
-              <a:rPr lang="en-US" dirty="0"/>
-              <a:t>FGA</a:t>
-            </a:r>
-            <a:r>
-              <a:rPr lang="he-IL" dirty="0"/>
-              <a:t> בודק מה הגודל של ה-</a:t>
-            </a:r>
-            <a:r>
-              <a:rPr lang="en-US" dirty="0"/>
-              <a:t>fraction</a:t>
-            </a:r>
-            <a:r>
-              <a:rPr lang="he-IL" dirty="0"/>
-              <a:t> מהגנום שיש לו </a:t>
-            </a:r>
-            <a:r>
-              <a:rPr lang="en-US" dirty="0"/>
-              <a:t>CNV</a:t>
-            </a:r>
-            <a:r>
-              <a:rPr lang="he-IL" dirty="0"/>
-              <a:t>.</a:t>
-            </a:r>
-          </a:p>
-          <a:p>
-            <a:pPr algn="r" rtl="1"/>
-            <a:r>
-              <a:rPr lang="en-US" dirty="0"/>
-              <a:t>CNV</a:t>
-            </a:r>
-            <a:r>
-              <a:rPr lang="he-IL" dirty="0"/>
-              <a:t> מתייחס למקרה ספציפי, </a:t>
-            </a:r>
-            <a:r>
-              <a:rPr lang="en-US" dirty="0"/>
-              <a:t>FGA</a:t>
-            </a:r>
-            <a:r>
-              <a:rPr lang="he-IL" dirty="0"/>
-              <a:t> הוא </a:t>
-            </a:r>
-            <a:r>
-              <a:rPr lang="he-IL" dirty="0" err="1"/>
-              <a:t>סקאלאר</a:t>
-            </a:r>
-            <a:r>
-              <a:rPr lang="he-IL" dirty="0"/>
-              <a:t> אחד שמתאר את ה-</a:t>
-            </a:r>
-            <a:r>
-              <a:rPr lang="en-US" dirty="0"/>
-              <a:t>burden</a:t>
-            </a:r>
-            <a:r>
-              <a:rPr lang="he-IL" dirty="0"/>
-              <a:t> של כל האירועים האלו.</a:t>
-            </a:r>
-          </a:p>
-          <a:p>
-            <a:pPr marL="0" marR="0" lvl="0" indent="0" algn="r" defTabSz="914400" rtl="1" eaLnBrk="1" fontAlgn="auto" latinLnBrk="0" hangingPunct="1">
-              <a:lnSpc>
-                <a:spcPct val="100000"/>
-              </a:lnSpc>
-              <a:spcBef>
-                <a:spcPts val="0"/>
-              </a:spcBef>
-              <a:spcAft>
-                <a:spcPts val="0"/>
-              </a:spcAft>
-              <a:buClrTx/>
-              <a:buSzTx/>
-              <a:buFontTx/>
-              <a:buNone/>
-              <a:tabLst/>
-              <a:defRPr/>
-            </a:pPr>
-            <a:endParaRPr lang="en-US" sz="1200" b="0" i="0" kern="1200" dirty="0">
-              <a:solidFill>
-                <a:schemeClr val="tx1"/>
-              </a:solidFill>
-              <a:effectLst/>
-              <a:latin typeface="+mn-lt"/>
-              <a:ea typeface="+mn-ea"/>
-              <a:cs typeface="+mn-cs"/>
-            </a:endParaRPr>
-          </a:p>
           <a:p>
             <a:pPr marL="0" algn="r" defTabSz="914400" rtl="1" eaLnBrk="1" latinLnBrk="0" hangingPunct="1"/>
             <a:endParaRPr lang="he-IL" dirty="0"/>
@@ -6691,138 +5061,7 @@
               <a:tabLst/>
               <a:defRPr/>
             </a:pPr>
-            <a:r>
-              <a:rPr lang="he-IL" dirty="0"/>
-              <a:t>כדי למדוד </a:t>
-            </a:r>
-            <a:r>
-              <a:rPr lang="en-US" dirty="0"/>
-              <a:t>CNA</a:t>
-            </a:r>
-            <a:r>
-              <a:rPr lang="he-IL" dirty="0"/>
-              <a:t>, נעזרתי במאמר של </a:t>
-            </a:r>
-            <a:r>
-              <a:rPr lang="en-US" dirty="0" err="1"/>
-              <a:t>Giancomelli</a:t>
-            </a:r>
-            <a:r>
-              <a:rPr lang="en-US" dirty="0"/>
-              <a:t> et al</a:t>
-            </a:r>
-            <a:r>
-              <a:rPr lang="he-IL" dirty="0"/>
-              <a:t> שפורסם </a:t>
-            </a:r>
-            <a:r>
-              <a:rPr lang="he-IL" dirty="0" err="1"/>
-              <a:t>בנייצ׳ר</a:t>
-            </a:r>
-            <a:r>
-              <a:rPr lang="he-IL" dirty="0"/>
-              <a:t> לפני כמה שנים. הם יצרו שם ספרייה ענקית שכוללת כמעט את כל המוטציות האפשריות ב-</a:t>
-            </a:r>
-            <a:r>
-              <a:rPr lang="en-US" dirty="0"/>
-              <a:t>TP53</a:t>
-            </a:r>
-            <a:r>
-              <a:rPr lang="he-IL" dirty="0"/>
-              <a:t>, סה״כ </a:t>
-            </a:r>
-            <a:r>
-              <a:rPr lang="en-US" dirty="0"/>
-              <a:t>8,258</a:t>
-            </a:r>
-            <a:r>
-              <a:rPr lang="he-IL" dirty="0"/>
-              <a:t> וריאנטים. כל מוטציה הוכנסה לתאים אנושיים וסומנה בברקוד כדי לעקוב אחרי בריצוף ובדקו מה ההשפעה על התא מבחינת קצב הגידול של תאים סרטניים.</a:t>
-            </a:r>
             <a:endParaRPr lang="en-US" dirty="0"/>
-          </a:p>
-          <a:p>
-            <a:pPr marL="0" algn="r" defTabSz="914400" rtl="1" eaLnBrk="1" latinLnBrk="0" hangingPunct="1"/>
-            <a:endParaRPr lang="he-IL" sz="1200" b="0" i="0" kern="1200" dirty="0">
-              <a:solidFill>
-                <a:schemeClr val="tx1"/>
-              </a:solidFill>
-              <a:effectLst/>
-              <a:latin typeface="+mn-lt"/>
-              <a:ea typeface="+mn-ea"/>
-              <a:cs typeface="+mn-cs"/>
-            </a:endParaRPr>
-          </a:p>
-          <a:p>
-            <a:pPr marL="0" algn="r" defTabSz="914400" rtl="1" eaLnBrk="1" latinLnBrk="0" hangingPunct="1"/>
-            <a:r>
-              <a:rPr lang="he-IL" dirty="0"/>
-              <a:t>כדי למדוד כמה כל מוטציה ב-</a:t>
-            </a:r>
-            <a:r>
-              <a:rPr lang="en-US" dirty="0"/>
-              <a:t>TP53 </a:t>
-            </a:r>
-            <a:r>
-              <a:rPr lang="he-IL" dirty="0"/>
-              <a:t>באמת פוגעת בתפקוד החלבון, השתמשתי בנתונים שלהם מניסוי </a:t>
-            </a:r>
-            <a:r>
-              <a:rPr lang="he-IL" dirty="0" err="1"/>
-              <a:t>קריספר</a:t>
-            </a:r>
-            <a:r>
-              <a:rPr lang="he-IL" dirty="0"/>
-              <a:t> שהם עשו, שבדק ניסויית למעלה מ-8,000 וריאנטים שונים של </a:t>
-            </a:r>
-            <a:r>
-              <a:rPr lang="en-US" dirty="0"/>
-              <a:t>TP53.</a:t>
-            </a:r>
-            <a:br>
-              <a:rPr lang="en-US" dirty="0"/>
-            </a:br>
-            <a:r>
-              <a:rPr lang="he-IL" dirty="0"/>
-              <a:t>הרעיון פשוט: הכניסו כל וריאנט לתאי סרטן ריאה, חלק עם </a:t>
-            </a:r>
-            <a:r>
-              <a:rPr lang="en-US" dirty="0"/>
-              <a:t>p53 </a:t>
-            </a:r>
-            <a:r>
-              <a:rPr lang="he-IL" dirty="0"/>
-              <a:t> תקין, וחלק ללא</a:t>
-            </a:r>
-            <a:r>
-              <a:rPr lang="en-US" dirty="0"/>
-              <a:t> p53 </a:t>
-            </a:r>
-            <a:r>
-              <a:rPr lang="he-IL" dirty="0"/>
-              <a:t>בכלל, ואז חשפו אותם לתרופות שמפעילות את הביטוי של </a:t>
-            </a:r>
-            <a:r>
-              <a:rPr lang="he-IL" dirty="0" err="1"/>
-              <a:t>p</a:t>
-            </a:r>
-            <a:r>
-              <a:rPr lang="en-US" dirty="0"/>
-              <a:t>53</a:t>
-            </a:r>
-            <a:r>
-              <a:rPr lang="he-IL" dirty="0"/>
-              <a:t>.</a:t>
-            </a:r>
-            <a:endParaRPr lang="en-US" sz="1200" b="0" i="0" kern="1200" dirty="0">
-              <a:solidFill>
-                <a:schemeClr val="tx1"/>
-              </a:solidFill>
-              <a:effectLst/>
-              <a:latin typeface="+mn-lt"/>
-              <a:ea typeface="+mn-ea"/>
-              <a:cs typeface="+mn-cs"/>
-            </a:endParaRPr>
           </a:p>
         </p:txBody>
       </p:sp>
@@ -6947,42 +5186,6 @@
               <a:tabLst/>
               <a:defRPr/>
             </a:pPr>
-            <a:r>
-              <a:rPr lang="he-IL" sz="1200" b="0" i="0" kern="1200" dirty="0">
-                <a:solidFill>
-                  <a:schemeClr val="tx1"/>
-                </a:solidFill>
-                <a:effectLst/>
-                <a:latin typeface="+mn-lt"/>
-                <a:ea typeface="+mn-ea"/>
-                <a:cs typeface="+mn-cs"/>
-              </a:rPr>
-              <a:t>בשלב השני הם רצו למדוד את שכיחות האלל הספציפי שהם בודקים. אחרי 12 ימים הם ריצפו את התאים ששרדו כדי לראות אילו וריאנטים נשארו בחיים. לכל אלל חישבו </a:t>
-            </a:r>
-            <a:r>
-              <a:rPr lang="en-US" sz="1200" b="0" i="0" kern="1200" dirty="0">
-                <a:solidFill>
-                  <a:schemeClr val="tx1"/>
-                </a:solidFill>
-                <a:effectLst/>
-                <a:latin typeface="+mn-lt"/>
-                <a:ea typeface="+mn-ea"/>
-                <a:cs typeface="+mn-cs"/>
-              </a:rPr>
-              <a:t>log2FoldChange</a:t>
-            </a:r>
-            <a:r>
-              <a:rPr lang="he-IL" sz="1200" b="0" i="0" kern="1200" dirty="0">
-                <a:solidFill>
-                  <a:schemeClr val="tx1"/>
-                </a:solidFill>
-                <a:effectLst/>
-                <a:latin typeface="+mn-lt"/>
-                <a:ea typeface="+mn-ea"/>
-                <a:cs typeface="+mn-cs"/>
-              </a:rPr>
-              <a:t> ביחס לנקודת הזמן הבסיסית, ז״א האם האלל התעשר או הידלל תחת הלחץ.</a:t>
-            </a:r>
             <a:endParaRPr lang="en-US" sz="1200" b="0" i="0" kern="1200" dirty="0">
               <a:solidFill>
                 <a:schemeClr val="tx1"/>
@@ -7116,74 +5319,6 @@
               <a:tabLst/>
               <a:defRPr/>
             </a:pPr>
-            <a:r>
-              <a:rPr lang="he-IL" dirty="0"/>
-              <a:t>בשלב השלישי הם נתנו ציון לכל אחד </a:t>
-            </a:r>
-            <a:r>
-              <a:rPr lang="he-IL" dirty="0" err="1"/>
-              <a:t>מהוריאנטים</a:t>
-            </a:r>
-            <a:r>
-              <a:rPr lang="he-IL" dirty="0"/>
-              <a:t>, אם וריאנט מתנהג כמו </a:t>
-            </a:r>
-            <a:r>
-              <a:rPr lang="en-US" dirty="0"/>
-              <a:t>p53</a:t>
-            </a:r>
-            <a:r>
-              <a:rPr lang="he-IL" dirty="0"/>
-              <a:t>, או כאילו הוא לא נמצא, או משהו באמצע. מהשילוב של שלושת המדידות האלה קיבלנו מספר יחיד, שזה ה-</a:t>
-            </a:r>
-            <a:r>
-              <a:rPr lang="en-US" dirty="0"/>
-              <a:t>Experimental Functional Score</a:t>
-            </a:r>
-            <a:r>
-              <a:rPr lang="he-IL" dirty="0"/>
-              <a:t> שהשתמשתי בו, שאומר לנו כמה וריאנט של </a:t>
-            </a:r>
-            <a:r>
-              <a:rPr lang="en-US" dirty="0"/>
-              <a:t>p53</a:t>
-            </a:r>
-            <a:r>
-              <a:rPr lang="he-IL" dirty="0"/>
-              <a:t> הוא פעיל. ציון נמוך משמע אובדן תפקוד, ציון גבוה = התנהגות דומה ל-</a:t>
-            </a:r>
-            <a:r>
-              <a:rPr lang="en-US" dirty="0"/>
-              <a:t>p53</a:t>
-            </a:r>
-            <a:r>
-              <a:rPr lang="he-IL" dirty="0"/>
-              <a:t> תקין. הערכים הם </a:t>
-            </a:r>
-            <a:r>
-              <a:rPr lang="en-US" dirty="0"/>
-              <a:t>z-score</a:t>
-            </a:r>
-            <a:r>
-              <a:rPr lang="he-IL" dirty="0"/>
-              <a:t>, אז הם יכולים להיות שליליים או חיוביים. אם הערך שלילי מאוד, המוטציה שוברת את </a:t>
-            </a:r>
-            <a:r>
-              <a:rPr lang="en-US" dirty="0"/>
-              <a:t>p53</a:t>
-            </a:r>
-            <a:r>
-              <a:rPr lang="he-IL" dirty="0"/>
-              <a:t>, אם הוא קרוב ל-0, המוטציה משפיעה הרבה ואם הציון הוא חיובי, הוא דומה ל-</a:t>
-            </a:r>
-            <a:r>
-              <a:rPr lang="en-US" dirty="0"/>
-              <a:t>WT</a:t>
-            </a:r>
-            <a:r>
-              <a:rPr lang="he-IL" dirty="0"/>
-              <a:t>.</a:t>
-            </a:r>
             <a:endParaRPr lang="en-US" sz="1200" b="0" i="0" kern="1200" dirty="0">
               <a:solidFill>
                 <a:schemeClr val="tx1"/>
@@ -7301,85 +5436,6 @@
             </a:pPr>
             <a:endParaRPr lang="he-IL" b="0" dirty="0"/>
           </a:p>
-          <a:p>
-            <a:pPr marL="0" marR="0" lvl="0" indent="0" algn="r" defTabSz="914400" rtl="1" eaLnBrk="1" fontAlgn="auto" latinLnBrk="0" hangingPunct="1">
-              <a:lnSpc>
-                <a:spcPct val="100000"/>
-              </a:lnSpc>
-              <a:spcBef>
-                <a:spcPts val="0"/>
-              </a:spcBef>
-              <a:spcAft>
-                <a:spcPts val="0"/>
-              </a:spcAft>
-              <a:buClrTx/>
-              <a:buSzTx/>
-              <a:buFontTx/>
-              <a:buNone/>
-              <a:tabLst/>
-              <a:defRPr/>
-            </a:pPr>
-            <a:r>
-              <a:rPr lang="he-IL" b="0" dirty="0"/>
-              <a:t>ההיפותזה שאני הולכת לעבוד איתה היא שלחולים עם מוטציות tp53 שיש להם ציון </a:t>
-            </a:r>
-            <a:r>
-              <a:rPr lang="he-IL" b="0" dirty="0" err="1"/>
-              <a:t>פיטנס</a:t>
-            </a:r>
-            <a:r>
-              <a:rPr lang="he-IL" b="0" dirty="0"/>
-              <a:t> נמוך</a:t>
-            </a:r>
-            <a:r>
-              <a:rPr lang="en-US" b="0" dirty="0"/>
-              <a:t> </a:t>
-            </a:r>
-            <a:r>
-              <a:rPr lang="he-IL" b="0" dirty="0"/>
-              <a:t>(</a:t>
-            </a:r>
-            <a:r>
-              <a:rPr lang="en-US" b="0" dirty="0"/>
-              <a:t>EFS</a:t>
-            </a:r>
-            <a:r>
-              <a:rPr lang="he-IL" b="0" dirty="0"/>
-              <a:t>), יהיה אחוז גבוה יותר של כאוס </a:t>
-            </a:r>
-            <a:r>
-              <a:rPr lang="he-IL" b="0" dirty="0" err="1"/>
-              <a:t>גנומי</a:t>
-            </a:r>
-            <a:r>
-              <a:rPr lang="he-IL" b="0" dirty="0"/>
-              <a:t> (</a:t>
-            </a:r>
-            <a:r>
-              <a:rPr lang="en-US" b="0" dirty="0"/>
-              <a:t>FGA</a:t>
-            </a:r>
-            <a:r>
-              <a:rPr lang="he-IL" b="0" dirty="0"/>
-              <a:t>).</a:t>
-            </a:r>
-          </a:p>
-          <a:p>
-            <a:pPr lvl="1"/>
-            <a:r>
-              <a:rPr lang="en-US" sz="1200" b="1" i="0" kern="1200" dirty="0">
-                <a:solidFill>
-                  <a:schemeClr val="tx1"/>
-                </a:solidFill>
-                <a:effectLst/>
-                <a:latin typeface="+mn-lt"/>
-                <a:ea typeface="+mn-ea"/>
-                <a:cs typeface="+mn-cs"/>
-              </a:rPr>
-              <a:t>more negative = more LOF = hypothesis predicts more FGA</a:t>
-            </a:r>
-            <a:endParaRPr lang="he-IL" b="0" dirty="0"/>
-          </a:p>
         </p:txBody>
       </p:sp>
       <p:sp>
@@ -7461,193 +5517,6 @@
         <p:txBody>
           <a:bodyPr/>
           <a:lstStyle/>
-          <a:p>
-            <a:pPr marL="0" algn="r" defTabSz="914400" rtl="1" eaLnBrk="1" latinLnBrk="0" hangingPunct="1"/>
-            <a:r>
-              <a:rPr lang="he-IL" sz="1200" b="0" i="0" kern="1200" dirty="0">
-                <a:solidFill>
-                  <a:schemeClr val="tx1"/>
-                </a:solidFill>
-                <a:effectLst/>
-                <a:latin typeface="+mn-lt"/>
-                <a:ea typeface="+mn-ea"/>
-                <a:cs typeface="+mn-cs"/>
-              </a:rPr>
-              <a:t>אני רוצה לבדוק 3 דברים:</a:t>
-            </a:r>
-          </a:p>
-          <a:p>
-            <a:pPr marL="228600" indent="-228600" algn="r" defTabSz="914400" rtl="1" eaLnBrk="1" latinLnBrk="0" hangingPunct="1">
-              <a:buAutoNum type="arabicPeriod"/>
-            </a:pPr>
-            <a:r>
-              <a:rPr lang="he-IL" sz="1200" b="0" i="0" kern="1200" dirty="0">
-                <a:solidFill>
-                  <a:schemeClr val="tx1"/>
-                </a:solidFill>
-                <a:effectLst/>
-                <a:latin typeface="+mn-lt"/>
-                <a:ea typeface="+mn-ea"/>
-                <a:cs typeface="+mn-cs"/>
-              </a:rPr>
-              <a:t>האם יש קורלציה בין ה-</a:t>
-            </a:r>
-            <a:r>
-              <a:rPr lang="en-US" sz="1200" b="0" i="0" kern="1200" dirty="0">
-                <a:solidFill>
-                  <a:schemeClr val="tx1"/>
-                </a:solidFill>
-                <a:effectLst/>
-                <a:latin typeface="+mn-lt"/>
-                <a:ea typeface="+mn-ea"/>
-                <a:cs typeface="+mn-cs"/>
-              </a:rPr>
-              <a:t>functional score</a:t>
-            </a:r>
-            <a:r>
-              <a:rPr lang="he-IL" sz="1200" b="0" i="0" kern="1200" dirty="0">
-                <a:solidFill>
-                  <a:schemeClr val="tx1"/>
-                </a:solidFill>
-                <a:effectLst/>
-                <a:latin typeface="+mn-lt"/>
-                <a:ea typeface="+mn-ea"/>
-                <a:cs typeface="+mn-cs"/>
-              </a:rPr>
-              <a:t> של מוטציה כלשהי ב-</a:t>
-            </a:r>
-            <a:r>
-              <a:rPr lang="en-US" sz="1200" b="0" i="0" kern="1200" dirty="0">
-                <a:solidFill>
-                  <a:schemeClr val="tx1"/>
-                </a:solidFill>
-                <a:effectLst/>
-                <a:latin typeface="+mn-lt"/>
-                <a:ea typeface="+mn-ea"/>
-                <a:cs typeface="+mn-cs"/>
-              </a:rPr>
-              <a:t>p53</a:t>
-            </a:r>
-            <a:r>
-              <a:rPr lang="he-IL" sz="1200" b="0" i="0" kern="1200" dirty="0">
-                <a:solidFill>
-                  <a:schemeClr val="tx1"/>
-                </a:solidFill>
-                <a:effectLst/>
-                <a:latin typeface="+mn-lt"/>
-                <a:ea typeface="+mn-ea"/>
-                <a:cs typeface="+mn-cs"/>
-              </a:rPr>
-              <a:t> ל-</a:t>
-            </a:r>
-            <a:r>
-              <a:rPr lang="en-US" sz="1200" b="0" i="0" kern="1200" dirty="0">
-                <a:solidFill>
-                  <a:schemeClr val="tx1"/>
-                </a:solidFill>
-                <a:effectLst/>
-                <a:latin typeface="+mn-lt"/>
-                <a:ea typeface="+mn-ea"/>
-                <a:cs typeface="+mn-cs"/>
-              </a:rPr>
-              <a:t>FGA</a:t>
-            </a:r>
-            <a:r>
-              <a:rPr lang="he-IL" sz="1200" b="0" i="0" kern="1200" dirty="0">
-                <a:solidFill>
-                  <a:schemeClr val="tx1"/>
-                </a:solidFill>
-                <a:effectLst/>
-                <a:latin typeface="+mn-lt"/>
-                <a:ea typeface="+mn-ea"/>
-                <a:cs typeface="+mn-cs"/>
-              </a:rPr>
-              <a:t> גבוה יותר אצל החולים?</a:t>
-            </a:r>
-          </a:p>
-          <a:p>
-            <a:pPr marL="228600" indent="-228600" algn="r" defTabSz="914400" rtl="1" eaLnBrk="1" latinLnBrk="0" hangingPunct="1">
-              <a:buAutoNum type="arabicPeriod"/>
-            </a:pPr>
-            <a:r>
-              <a:rPr lang="he-IL" sz="1200" b="0" i="0" kern="1200" dirty="0">
-                <a:solidFill>
-                  <a:schemeClr val="tx1"/>
-                </a:solidFill>
-                <a:effectLst/>
-                <a:latin typeface="+mn-lt"/>
-                <a:ea typeface="+mn-ea"/>
-                <a:cs typeface="+mn-cs"/>
-              </a:rPr>
-              <a:t>האם יש מוטציות באזורים שהם </a:t>
-            </a:r>
-            <a:r>
-              <a:rPr lang="he-IL" sz="1200" b="0" i="0" kern="1200" dirty="0" err="1">
-                <a:solidFill>
-                  <a:schemeClr val="tx1"/>
-                </a:solidFill>
-                <a:effectLst/>
-                <a:latin typeface="+mn-lt"/>
-                <a:ea typeface="+mn-ea"/>
-                <a:cs typeface="+mn-cs"/>
-              </a:rPr>
-              <a:t>הוטספוט</a:t>
-            </a:r>
-            <a:r>
-              <a:rPr lang="he-IL" sz="1200" b="0" i="0" kern="1200" dirty="0">
-                <a:solidFill>
-                  <a:schemeClr val="tx1"/>
-                </a:solidFill>
-                <a:effectLst/>
-                <a:latin typeface="+mn-lt"/>
-                <a:ea typeface="+mn-ea"/>
-                <a:cs typeface="+mn-cs"/>
-              </a:rPr>
-              <a:t> שגורמים ליותר כאוס </a:t>
-            </a:r>
-            <a:r>
-              <a:rPr lang="he-IL" sz="1200" b="0" i="0" kern="1200" dirty="0" err="1">
-                <a:solidFill>
-                  <a:schemeClr val="tx1"/>
-                </a:solidFill>
-                <a:effectLst/>
-                <a:latin typeface="+mn-lt"/>
-                <a:ea typeface="+mn-ea"/>
-                <a:cs typeface="+mn-cs"/>
-              </a:rPr>
-              <a:t>גנומי</a:t>
-            </a:r>
-            <a:r>
-              <a:rPr lang="he-IL" sz="1200" b="0" i="0" kern="1200" dirty="0">
-                <a:solidFill>
-                  <a:schemeClr val="tx1"/>
-                </a:solidFill>
-                <a:effectLst/>
-                <a:latin typeface="+mn-lt"/>
-                <a:ea typeface="+mn-ea"/>
-                <a:cs typeface="+mn-cs"/>
-              </a:rPr>
-              <a:t>?</a:t>
-            </a:r>
-          </a:p>
-          <a:p>
-            <a:pPr marL="228600" indent="-228600" algn="r" defTabSz="914400" rtl="1" eaLnBrk="1" latinLnBrk="0" hangingPunct="1">
-              <a:buAutoNum type="arabicPeriod"/>
-            </a:pPr>
-            <a:r>
-              <a:rPr lang="he-IL" sz="1200" b="0" i="0" kern="1200" dirty="0">
-                <a:solidFill>
-                  <a:schemeClr val="tx1"/>
-                </a:solidFill>
-                <a:effectLst/>
-                <a:latin typeface="+mn-lt"/>
-                <a:ea typeface="+mn-ea"/>
-                <a:cs typeface="+mn-cs"/>
-              </a:rPr>
-              <a:t>האם מדובר בכל סוגי הסרטן או שאמצא את הקורלציה רק בסוגי סרטן ספציפיים?</a:t>
-            </a:r>
-            <a:endParaRPr lang="he-IL" dirty="0"/>
-          </a:p>
           <a:p>
             <a:pPr marL="0" algn="r" defTabSz="914400" rtl="1" eaLnBrk="1" latinLnBrk="0" hangingPunct="1"/>
             <a:endParaRPr lang="he-IL" dirty="0"/>
@@ -7753,100 +5622,7 @@
           <a:lstStyle/>
           <a:p>
             <a:pPr marL="0" algn="r" defTabSz="914400" rtl="1" eaLnBrk="1" latinLnBrk="0" hangingPunct="1"/>
-            <a:r>
-              <a:rPr lang="he-IL" dirty="0"/>
-              <a:t>ל-</a:t>
-            </a:r>
-            <a:r>
-              <a:rPr lang="en-US" dirty="0"/>
-              <a:t>GENIE</a:t>
-            </a:r>
-            <a:r>
-              <a:rPr lang="he-IL" dirty="0"/>
-              <a:t> יש מתוך 271 אלף </a:t>
-            </a:r>
-            <a:r>
-              <a:rPr lang="he-IL" dirty="0" err="1"/>
-              <a:t>סאמפלים</a:t>
-            </a:r>
-            <a:r>
-              <a:rPr lang="he-IL" dirty="0"/>
-              <a:t>, בערך 100 אלף עם פרמטר בשם </a:t>
-            </a:r>
-            <a:r>
-              <a:rPr lang="en-US" dirty="0"/>
-              <a:t>Fraction Genome Altered</a:t>
-            </a:r>
-            <a:r>
-              <a:rPr lang="he-IL" dirty="0"/>
-              <a:t>, שהוא בעצם פרמטר שמתאר את כל ה-</a:t>
-            </a:r>
-            <a:r>
-              <a:rPr lang="en-US" dirty="0"/>
-              <a:t>CNA</a:t>
-            </a:r>
-            <a:r>
-              <a:rPr lang="he-IL" dirty="0"/>
-              <a:t> רק לכל הגנום.</a:t>
-            </a:r>
-          </a:p>
-          <a:p>
-            <a:pPr algn="r" rtl="1"/>
-            <a:r>
-              <a:rPr lang="he-IL" dirty="0"/>
-              <a:t>אז </a:t>
-            </a:r>
-            <a:r>
-              <a:rPr lang="en-US" dirty="0"/>
-              <a:t>FGA</a:t>
-            </a:r>
-            <a:r>
-              <a:rPr lang="he-IL" dirty="0"/>
-              <a:t> בודק בכמה מהגנום יש לנו </a:t>
-            </a:r>
-            <a:r>
-              <a:rPr lang="en-US" dirty="0"/>
-              <a:t>CNA</a:t>
-            </a:r>
-            <a:r>
-              <a:rPr lang="he-IL" dirty="0"/>
-              <a:t>.</a:t>
-            </a:r>
-          </a:p>
-          <a:p>
-            <a:pPr algn="r" rtl="1"/>
-            <a:r>
-              <a:rPr lang="en-US" dirty="0"/>
-              <a:t>CNA</a:t>
-            </a:r>
-            <a:r>
-              <a:rPr lang="he-IL" dirty="0"/>
-              <a:t> מתייחס למקרה ספציפי, </a:t>
-            </a:r>
-            <a:r>
-              <a:rPr lang="en-US" dirty="0"/>
-              <a:t>FGA</a:t>
-            </a:r>
-            <a:r>
-              <a:rPr lang="he-IL" dirty="0"/>
-              <a:t> הוא </a:t>
-            </a:r>
-            <a:r>
-              <a:rPr lang="he-IL" dirty="0" err="1"/>
-              <a:t>סקאלאר</a:t>
-            </a:r>
-            <a:r>
-              <a:rPr lang="he-IL" dirty="0"/>
-              <a:t> אחד שמתאר את ה-</a:t>
-            </a:r>
-            <a:r>
-              <a:rPr lang="en-US" dirty="0"/>
-              <a:t>burden</a:t>
-            </a:r>
-            <a:r>
-              <a:rPr lang="he-IL" dirty="0"/>
-              <a:t> של כל האירועים האלו.</a:t>
-            </a:r>
+            <a:endParaRPr lang="he-IL" dirty="0"/>
           </a:p>
         </p:txBody>
       </p:sp>
@@ -8146,7 +5922,7 @@
             <a:fld id="{A37D6D71-8B28-4ED6-B932-04B197003D23}" type="datetimeFigureOut">
               <a:rPr lang="en-US" smtClean="0"/>
               <a:pPr algn="r"/>
-              <a:t>3/12/26</a:t>
+              <a:t>3/19/26</a:t>
             </a:fld>
             <a:endParaRPr lang="en-US" dirty="0"/>
           </a:p>
@@ -8416,7 +6192,7 @@
             <a:fld id="{A37D6D71-8B28-4ED6-B932-04B197003D23}" type="datetimeFigureOut">
               <a:rPr lang="en-US" smtClean="0"/>
               <a:pPr algn="r"/>
-              <a:t>3/12/26</a:t>
+              <a:t>3/19/26</a:t>
             </a:fld>
             <a:endParaRPr lang="en-US" dirty="0"/>
           </a:p>
@@ -8659,7 +6435,7 @@
             <a:fld id="{A37D6D71-8B28-4ED6-B932-04B197003D23}" type="datetimeFigureOut">
               <a:rPr lang="en-US" smtClean="0"/>
               <a:pPr algn="r"/>
-              <a:t>3/12/26</a:t>
+              <a:t>3/19/26</a:t>
             </a:fld>
             <a:endParaRPr lang="en-US" dirty="0"/>
           </a:p>
@@ -8914,7 +6690,7 @@
             <a:fld id="{A37D6D71-8B28-4ED6-B932-04B197003D23}" type="datetimeFigureOut">
               <a:rPr lang="en-US" smtClean="0"/>
               <a:pPr algn="r"/>
-              <a:t>3/15/26</a:t>
+              <a:t>3/19/26</a:t>
             </a:fld>
             <a:endParaRPr lang="en-US" dirty="0"/>
           </a:p>
@@ -9229,7 +7005,7 @@
             <a:fld id="{A37D6D71-8B28-4ED6-B932-04B197003D23}" type="datetimeFigureOut">
               <a:rPr lang="en-US" smtClean="0"/>
               <a:pPr algn="r"/>
-              <a:t>3/12/26</a:t>
+              <a:t>3/19/26</a:t>
             </a:fld>
             <a:endParaRPr lang="en-US" dirty="0"/>
           </a:p>
@@ -9539,7 +7315,7 @@
             <a:fld id="{A37D6D71-8B28-4ED6-B932-04B197003D23}" type="datetimeFigureOut">
               <a:rPr lang="en-US" smtClean="0"/>
               <a:pPr algn="r"/>
-              <a:t>3/12/26</a:t>
+              <a:t>3/19/26</a:t>
             </a:fld>
             <a:endParaRPr lang="en-US" dirty="0"/>
           </a:p>
@@ -9969,7 +7745,7 @@
             <a:fld id="{A37D6D71-8B28-4ED6-B932-04B197003D23}" type="datetimeFigureOut">
               <a:rPr lang="en-US" smtClean="0"/>
               <a:pPr algn="r"/>
-              <a:t>3/12/26</a:t>
+              <a:t>3/19/26</a:t>
             </a:fld>
             <a:endParaRPr lang="en-US" spc="50" dirty="0"/>
           </a:p>
@@ -10135,7 +7911,7 @@
             <a:fld id="{A37D6D71-8B28-4ED6-B932-04B197003D23}" type="datetimeFigureOut">
               <a:rPr lang="en-US" smtClean="0"/>
               <a:pPr algn="r"/>
-              <a:t>3/12/26</a:t>
+              <a:t>3/19/26</a:t>
             </a:fld>
             <a:endParaRPr lang="en-US" dirty="0"/>
           </a:p>
@@ -10238,7 +8014,7 @@
             <a:fld id="{A37D6D71-8B28-4ED6-B932-04B197003D23}" type="datetimeFigureOut">
               <a:rPr lang="en-US" smtClean="0"/>
               <a:pPr algn="r"/>
-              <a:t>3/12/26</a:t>
+              <a:t>3/19/26</a:t>
             </a:fld>
             <a:endParaRPr lang="en-US" dirty="0"/>
           </a:p>
@@ -10624,7 +8400,7 @@
             <a:fld id="{A37D6D71-8B28-4ED6-B932-04B197003D23}" type="datetimeFigureOut">
               <a:rPr lang="en-US" smtClean="0"/>
               <a:pPr algn="r"/>
-              <a:t>3/12/26</a:t>
+              <a:t>3/19/26</a:t>
             </a:fld>
             <a:endParaRPr lang="en-US" dirty="0"/>
           </a:p>
@@ -10921,7 +8697,7 @@
             <a:fld id="{A37D6D71-8B28-4ED6-B932-04B197003D23}" type="datetimeFigureOut">
               <a:rPr lang="en-US" smtClean="0"/>
               <a:pPr algn="r"/>
-              <a:t>3/12/26</a:t>
+              <a:t>3/19/26</a:t>
             </a:fld>
             <a:endParaRPr lang="en-US" spc="50" dirty="0"/>
           </a:p>
@@ -11136,7 +8912,7 @@
             <a:fld id="{A37D6D71-8B28-4ED6-B932-04B197003D23}" type="datetimeFigureOut">
               <a:rPr lang="en-US" smtClean="0"/>
               <a:pPr algn="r"/>
-              <a:t>3/12/26</a:t>
+              <a:t>3/19/26</a:t>
             </a:fld>
             <a:endParaRPr lang="en-US" spc="50" dirty="0"/>
           </a:p>
@@ -11891,486 +9667,6 @@
 </file>
 
 <file path=ppt/slides/slide10.xml><?xml version="1.0" encoding="utf-8"?>
-<p:sld xmlns:a="http://schemas.openxmlformats.org/drawingml/2006/main" xmlns:r="http://schemas.openxmlformats.org/officeDocument/2006/relationships" xmlns:p="http://schemas.openxmlformats.org/presentationml/2006/main" show="0">
-  <p:cSld>
-    <p:spTree>
-      <p:nvGrpSpPr>
-        <p:cNvPr id="1" name="">
-          <a:extLst>
-            <a:ext uri="{FF2B5EF4-FFF2-40B4-BE49-F238E27FC236}">
-              <a16:creationId xmlns:a16="http://schemas.microsoft.com/office/drawing/2014/main" id="{1FF058A4-57BA-A749-DF2C-A825D38E444F}"/>
-            </a:ext>
-          </a:extLst>
-        </p:cNvPr>
-        <p:cNvGrpSpPr/>
-        <p:nvPr/>
-      </p:nvGrpSpPr>
-      <p:grpSpPr>
-        <a:xfrm>
-          <a:off x="0" y="0"/>
-          <a:ext cx="0" cy="0"/>
-          <a:chOff x="0" y="0"/>
-          <a:chExt cx="0" cy="0"/>
-        </a:xfrm>
-      </p:grpSpPr>
-      <p:sp>
-        <p:nvSpPr>
-          <p:cNvPr id="2" name="Title 1">
-            <a:extLst>
-              <a:ext uri="{FF2B5EF4-FFF2-40B4-BE49-F238E27FC236}">
-                <a16:creationId xmlns:a16="http://schemas.microsoft.com/office/drawing/2014/main" id="{7E5DE122-7CBA-DB38-60AE-8DC39D99F120}"/>
-              </a:ext>
-            </a:extLst>
-          </p:cNvPr>
-          <p:cNvSpPr>
-            <a:spLocks noGrp="1"/>
-          </p:cNvSpPr>
-          <p:nvPr>
-            <p:ph type="title"/>
-          </p:nvPr>
-        </p:nvSpPr>
-        <p:spPr>
-          <a:xfrm>
-            <a:off x="1079942" y="350293"/>
-            <a:ext cx="10464799" cy="1320800"/>
-          </a:xfrm>
-        </p:spPr>
-        <p:txBody>
-          <a:bodyPr>
-            <a:normAutofit/>
-          </a:bodyPr>
-          <a:lstStyle/>
-          <a:p>
-            <a:r>
-              <a:rPr lang="en-US" dirty="0"/>
-              <a:t>Data Sources:</a:t>
-            </a:r>
-            <a:br>
-              <a:rPr lang="en-US" dirty="0"/>
-            </a:br>
-            <a:r>
-              <a:rPr lang="en-US" dirty="0"/>
-              <a:t>Integrating Phenotype &amp; Genotype</a:t>
-            </a:r>
-            <a:endParaRPr lang="en-IL" dirty="0"/>
-          </a:p>
-        </p:txBody>
-      </p:sp>
-      <p:sp>
-        <p:nvSpPr>
-          <p:cNvPr id="4" name="Content Placeholder 2">
-            <a:extLst>
-              <a:ext uri="{FF2B5EF4-FFF2-40B4-BE49-F238E27FC236}">
-                <a16:creationId xmlns:a16="http://schemas.microsoft.com/office/drawing/2014/main" id="{9C276440-F483-71DF-A071-F88FD52C4130}"/>
-              </a:ext>
-            </a:extLst>
-          </p:cNvPr>
-          <p:cNvSpPr txBox="1">
-            <a:spLocks/>
-          </p:cNvSpPr>
-          <p:nvPr/>
-        </p:nvSpPr>
-        <p:spPr>
-          <a:xfrm>
-            <a:off x="2294591" y="2689908"/>
-            <a:ext cx="8583045" cy="2025766"/>
-          </a:xfrm>
-          <a:prstGeom prst="rect">
-            <a:avLst/>
-          </a:prstGeom>
-        </p:spPr>
-        <p:txBody>
-          <a:bodyPr vert="horz" lIns="91440" tIns="45720" rIns="91440" bIns="45720" rtlCol="0">
-            <a:normAutofit/>
-          </a:bodyPr>
-          <a:lstStyle>
-            <a:lvl1pPr marL="342900" indent="-342900" algn="l" defTabSz="457200" rtl="0" eaLnBrk="1" latinLnBrk="0" hangingPunct="1">
-              <a:spcBef>
-                <a:spcPts val="1000"/>
-              </a:spcBef>
-              <a:spcAft>
-                <a:spcPts val="0"/>
-              </a:spcAft>
-              <a:buClr>
-                <a:schemeClr val="accent1"/>
-              </a:buClr>
-              <a:buSzPct val="80000"/>
-              <a:buFont typeface="Wingdings 3" charset="2"/>
-              <a:buChar char=""/>
-              <a:defRPr sz="1800" kern="1200">
-                <a:solidFill>
-                  <a:schemeClr val="tx1">
-                    <a:lumMod val="75000"/>
-                    <a:lumOff val="25000"/>
-                  </a:schemeClr>
-                </a:solidFill>
-                <a:latin typeface="+mn-lt"/>
-                <a:ea typeface="+mn-ea"/>
-                <a:cs typeface="+mn-cs"/>
-              </a:defRPr>
-            </a:lvl1pPr>
-            <a:lvl2pPr marL="742950" indent="-285750" algn="l" defTabSz="457200" rtl="0" eaLnBrk="1" latinLnBrk="0" hangingPunct="1">
-              <a:spcBef>
-                <a:spcPts val="1000"/>
-              </a:spcBef>
-              <a:spcAft>
-                <a:spcPts val="0"/>
-              </a:spcAft>
-              <a:buClr>
-                <a:schemeClr val="accent1"/>
-              </a:buClr>
-              <a:buSzPct val="80000"/>
-              <a:buFont typeface="Wingdings 3" charset="2"/>
-              <a:buChar char=""/>
-              <a:defRPr sz="1600" kern="1200">
-                <a:solidFill>
-                  <a:schemeClr val="tx1">
-                    <a:lumMod val="75000"/>
-                    <a:lumOff val="25000"/>
-                  </a:schemeClr>
-                </a:solidFill>
-                <a:latin typeface="+mn-lt"/>
-                <a:ea typeface="+mn-ea"/>
-                <a:cs typeface="+mn-cs"/>
-              </a:defRPr>
-            </a:lvl2pPr>
-            <a:lvl3pPr marL="1143000" indent="-228600" algn="l" defTabSz="457200" rtl="0" eaLnBrk="1" latinLnBrk="0" hangingPunct="1">
-              <a:spcBef>
-                <a:spcPts val="1000"/>
-              </a:spcBef>
-              <a:spcAft>
-                <a:spcPts val="0"/>
-              </a:spcAft>
-              <a:buClr>
-                <a:schemeClr val="accent1"/>
-              </a:buClr>
-              <a:buSzPct val="80000"/>
-              <a:buFont typeface="Wingdings 3" charset="2"/>
-              <a:buChar char=""/>
-              <a:defRPr sz="1400" kern="1200">
-                <a:solidFill>
-                  <a:schemeClr val="tx1">
-                    <a:lumMod val="75000"/>
-                    <a:lumOff val="25000"/>
-                  </a:schemeClr>
-                </a:solidFill>
-                <a:latin typeface="+mn-lt"/>
-                <a:ea typeface="+mn-ea"/>
-                <a:cs typeface="+mn-cs"/>
-              </a:defRPr>
-            </a:lvl3pPr>
-            <a:lvl4pPr marL="1600200" indent="-228600" algn="l" defTabSz="457200" rtl="0" eaLnBrk="1" latinLnBrk="0" hangingPunct="1">
-              <a:spcBef>
-                <a:spcPts val="1000"/>
-              </a:spcBef>
-              <a:spcAft>
-                <a:spcPts val="0"/>
-              </a:spcAft>
-              <a:buClr>
-                <a:schemeClr val="accent1"/>
-              </a:buClr>
-              <a:buSzPct val="80000"/>
-              <a:buFont typeface="Wingdings 3" charset="2"/>
-              <a:buChar char=""/>
-              <a:defRPr sz="1200" kern="1200">
-                <a:solidFill>
-                  <a:schemeClr val="tx1">
-                    <a:lumMod val="75000"/>
-                    <a:lumOff val="25000"/>
-                  </a:schemeClr>
-                </a:solidFill>
-                <a:latin typeface="+mn-lt"/>
-                <a:ea typeface="+mn-ea"/>
-                <a:cs typeface="+mn-cs"/>
-              </a:defRPr>
-            </a:lvl4pPr>
-            <a:lvl5pPr marL="2057400" indent="-228600" algn="l" defTabSz="457200" rtl="0" eaLnBrk="1" latinLnBrk="0" hangingPunct="1">
-              <a:spcBef>
-                <a:spcPts val="1000"/>
-              </a:spcBef>
-              <a:spcAft>
-                <a:spcPts val="0"/>
-              </a:spcAft>
-              <a:buClr>
-                <a:schemeClr val="accent1"/>
-              </a:buClr>
-              <a:buSzPct val="80000"/>
-              <a:buFont typeface="Wingdings 3" charset="2"/>
-              <a:buChar char=""/>
-              <a:defRPr sz="1200" kern="1200">
-                <a:solidFill>
-                  <a:schemeClr val="tx1">
-                    <a:lumMod val="75000"/>
-                    <a:lumOff val="25000"/>
-                  </a:schemeClr>
-                </a:solidFill>
-                <a:latin typeface="+mn-lt"/>
-                <a:ea typeface="+mn-ea"/>
-                <a:cs typeface="+mn-cs"/>
-              </a:defRPr>
-            </a:lvl5pPr>
-            <a:lvl6pPr marL="2514600" indent="-228600" algn="l" defTabSz="457200" rtl="0" eaLnBrk="1" latinLnBrk="0" hangingPunct="1">
-              <a:spcBef>
-                <a:spcPts val="1000"/>
-              </a:spcBef>
-              <a:spcAft>
-                <a:spcPts val="0"/>
-              </a:spcAft>
-              <a:buClr>
-                <a:schemeClr val="accent1"/>
-              </a:buClr>
-              <a:buSzPct val="80000"/>
-              <a:buFont typeface="Wingdings 3" charset="2"/>
-              <a:buChar char=""/>
-              <a:defRPr sz="1200" kern="1200">
-                <a:solidFill>
-                  <a:schemeClr val="tx1">
-                    <a:lumMod val="75000"/>
-                    <a:lumOff val="25000"/>
-                  </a:schemeClr>
-                </a:solidFill>
-                <a:latin typeface="+mn-lt"/>
-                <a:ea typeface="+mn-ea"/>
-                <a:cs typeface="+mn-cs"/>
-              </a:defRPr>
-            </a:lvl6pPr>
-            <a:lvl7pPr marL="2971800" indent="-228600" algn="l" defTabSz="457200" rtl="0" eaLnBrk="1" latinLnBrk="0" hangingPunct="1">
-              <a:spcBef>
-                <a:spcPts val="1000"/>
-              </a:spcBef>
-              <a:spcAft>
-                <a:spcPts val="0"/>
-              </a:spcAft>
-              <a:buClr>
-                <a:schemeClr val="accent1"/>
-              </a:buClr>
-              <a:buSzPct val="80000"/>
-              <a:buFont typeface="Wingdings 3" charset="2"/>
-              <a:buChar char=""/>
-              <a:defRPr sz="1200" kern="1200">
-                <a:solidFill>
-                  <a:schemeClr val="tx1">
-                    <a:lumMod val="75000"/>
-                    <a:lumOff val="25000"/>
-                  </a:schemeClr>
-                </a:solidFill>
-                <a:latin typeface="+mn-lt"/>
-                <a:ea typeface="+mn-ea"/>
-                <a:cs typeface="+mn-cs"/>
-              </a:defRPr>
-            </a:lvl7pPr>
-            <a:lvl8pPr marL="3429000" indent="-228600" algn="l" defTabSz="457200" rtl="0" eaLnBrk="1" latinLnBrk="0" hangingPunct="1">
-              <a:spcBef>
-                <a:spcPts val="1000"/>
-              </a:spcBef>
-              <a:spcAft>
-                <a:spcPts val="0"/>
-              </a:spcAft>
-              <a:buClr>
-                <a:schemeClr val="accent1"/>
-              </a:buClr>
-              <a:buSzPct val="80000"/>
-              <a:buFont typeface="Wingdings 3" charset="2"/>
-              <a:buChar char=""/>
-              <a:defRPr sz="1200" kern="1200">
-                <a:solidFill>
-                  <a:schemeClr val="tx1">
-                    <a:lumMod val="75000"/>
-                    <a:lumOff val="25000"/>
-                  </a:schemeClr>
-                </a:solidFill>
-                <a:latin typeface="+mn-lt"/>
-                <a:ea typeface="+mn-ea"/>
-                <a:cs typeface="+mn-cs"/>
-              </a:defRPr>
-            </a:lvl8pPr>
-            <a:lvl9pPr marL="3886200" indent="-228600" algn="l" defTabSz="457200" rtl="0" eaLnBrk="1" latinLnBrk="0" hangingPunct="1">
-              <a:spcBef>
-                <a:spcPts val="1000"/>
-              </a:spcBef>
-              <a:spcAft>
-                <a:spcPts val="0"/>
-              </a:spcAft>
-              <a:buClr>
-                <a:schemeClr val="accent1"/>
-              </a:buClr>
-              <a:buSzPct val="80000"/>
-              <a:buFont typeface="Wingdings 3" charset="2"/>
-              <a:buChar char=""/>
-              <a:defRPr sz="1200" kern="1200">
-                <a:solidFill>
-                  <a:schemeClr val="tx1">
-                    <a:lumMod val="75000"/>
-                    <a:lumOff val="25000"/>
-                  </a:schemeClr>
-                </a:solidFill>
-                <a:latin typeface="+mn-lt"/>
-                <a:ea typeface="+mn-ea"/>
-                <a:cs typeface="+mn-cs"/>
-              </a:defRPr>
-            </a:lvl9pPr>
-          </a:lstStyle>
-          <a:p>
-            <a:r>
-              <a:rPr lang="en-US" dirty="0"/>
-              <a:t>MSK-IMPACT (53,292 samples, 505 cancer genes).</a:t>
-            </a:r>
-          </a:p>
-          <a:p>
-            <a:r>
-              <a:rPr lang="en-US" dirty="0"/>
-              <a:t>Role: Genome-wide CNA data to identify which pathways are altered when TP53 breaks</a:t>
-            </a:r>
-          </a:p>
-          <a:p>
-            <a:r>
-              <a:rPr lang="en-US" dirty="0"/>
-              <a:t>Compared 800 high-FGA TP53-mutant vs 800 low-FGA TP53-WT</a:t>
-            </a:r>
-          </a:p>
-        </p:txBody>
-      </p:sp>
-      <p:sp>
-        <p:nvSpPr>
-          <p:cNvPr id="5" name="TextBox 4">
-            <a:extLst>
-              <a:ext uri="{FF2B5EF4-FFF2-40B4-BE49-F238E27FC236}">
-                <a16:creationId xmlns:a16="http://schemas.microsoft.com/office/drawing/2014/main" id="{78444B93-A15C-1CB2-2E6C-9C3050449F23}"/>
-              </a:ext>
-            </a:extLst>
-          </p:cNvPr>
-          <p:cNvSpPr txBox="1"/>
-          <p:nvPr/>
-        </p:nvSpPr>
-        <p:spPr>
-          <a:xfrm>
-            <a:off x="2294592" y="2139135"/>
-            <a:ext cx="2222147" cy="369332"/>
-          </a:xfrm>
-          <a:prstGeom prst="rect">
-            <a:avLst/>
-          </a:prstGeom>
-          <a:noFill/>
-        </p:spPr>
-        <p:txBody>
-          <a:bodyPr wrap="none" rtlCol="0">
-            <a:spAutoFit/>
-          </a:bodyPr>
-          <a:lstStyle/>
-          <a:p>
-            <a:r>
-              <a:rPr lang="en-IL" b="1" dirty="0"/>
-              <a:t>Secondary Analysis</a:t>
-            </a:r>
-          </a:p>
-        </p:txBody>
-      </p:sp>
-      <p:sp>
-        <p:nvSpPr>
-          <p:cNvPr id="3" name="TextBox 2">
-            <a:extLst>
-              <a:ext uri="{FF2B5EF4-FFF2-40B4-BE49-F238E27FC236}">
-                <a16:creationId xmlns:a16="http://schemas.microsoft.com/office/drawing/2014/main" id="{D3A7E258-78D3-3BAE-3E76-B1374DE35592}"/>
-              </a:ext>
-            </a:extLst>
-          </p:cNvPr>
-          <p:cNvSpPr txBox="1"/>
-          <p:nvPr/>
-        </p:nvSpPr>
-        <p:spPr>
-          <a:xfrm>
-            <a:off x="2692664" y="6216715"/>
-            <a:ext cx="6806672" cy="369332"/>
-          </a:xfrm>
-          <a:prstGeom prst="rect">
-            <a:avLst/>
-          </a:prstGeom>
-          <a:noFill/>
-        </p:spPr>
-        <p:txBody>
-          <a:bodyPr wrap="none" rtlCol="0">
-            <a:spAutoFit/>
-          </a:bodyPr>
-          <a:lstStyle/>
-          <a:p>
-            <a:r>
-              <a:rPr lang="en-US" b="1" dirty="0">
-                <a:solidFill>
-                  <a:srgbClr val="C00000"/>
-                </a:solidFill>
-              </a:rPr>
-              <a:t>Goal: to conclude what are the major pathways are triggered</a:t>
-            </a:r>
-          </a:p>
-        </p:txBody>
-      </p:sp>
-      <p:sp>
-        <p:nvSpPr>
-          <p:cNvPr id="9" name="TextBox 8">
-            <a:extLst>
-              <a:ext uri="{FF2B5EF4-FFF2-40B4-BE49-F238E27FC236}">
-                <a16:creationId xmlns:a16="http://schemas.microsoft.com/office/drawing/2014/main" id="{81385257-0E5C-B594-BC2A-4AAAC6E6631F}"/>
-              </a:ext>
-            </a:extLst>
-          </p:cNvPr>
-          <p:cNvSpPr txBox="1"/>
-          <p:nvPr/>
-        </p:nvSpPr>
-        <p:spPr>
-          <a:xfrm>
-            <a:off x="446568" y="-1"/>
-            <a:ext cx="3712984" cy="468000"/>
-          </a:xfrm>
-          <a:prstGeom prst="rect">
-            <a:avLst/>
-          </a:prstGeom>
-          <a:solidFill>
-            <a:srgbClr val="4D1434"/>
-          </a:solidFill>
-        </p:spPr>
-        <p:txBody>
-          <a:bodyPr wrap="square" rtlCol="0">
-            <a:spAutoFit/>
-          </a:bodyPr>
-          <a:lstStyle/>
-          <a:p>
-            <a:pPr algn="ctr"/>
-            <a:endParaRPr lang="en-IL" sz="700" dirty="0">
-              <a:solidFill>
-                <a:schemeClr val="bg1"/>
-              </a:solidFill>
-            </a:endParaRPr>
-          </a:p>
-          <a:p>
-            <a:pPr algn="ctr"/>
-            <a:r>
-              <a:rPr lang="en-IL" sz="1400" i="1" dirty="0">
-                <a:solidFill>
-                  <a:schemeClr val="bg1"/>
-                </a:solidFill>
-                <a:latin typeface="Abadi MT Condensed Light" panose="020B0306030101010103" pitchFamily="34" charset="77"/>
-                <a:ea typeface="Batang" panose="02030600000101010101" pitchFamily="18" charset="-127"/>
-                <a:cs typeface="Corsiva Hebrew" pitchFamily="2" charset="-79"/>
-              </a:rPr>
-              <a:t>Background</a:t>
-            </a:r>
-          </a:p>
-        </p:txBody>
-      </p:sp>
-    </p:spTree>
-    <p:extLst>
-      <p:ext uri="{BB962C8B-B14F-4D97-AF65-F5344CB8AC3E}">
-        <p14:creationId xmlns:p14="http://schemas.microsoft.com/office/powerpoint/2010/main" val="738907949"/>
-      </p:ext>
-    </p:extLst>
-  </p:cSld>
-  <p:clrMapOvr>
-    <a:masterClrMapping/>
-  </p:clrMapOvr>
-</p:sld>
-</file>
-
-<file path=ppt/slides/slide11.xml><?xml version="1.0" encoding="utf-8"?>
 <p:sld xmlns:a="http://schemas.openxmlformats.org/drawingml/2006/main" xmlns:r="http://schemas.openxmlformats.org/officeDocument/2006/relationships" xmlns:p="http://schemas.openxmlformats.org/presentationml/2006/main">
   <p:cSld>
     <p:bg>
@@ -12639,10 +9935,143 @@
   <p:clrMapOvr>
     <a:masterClrMapping/>
   </p:clrMapOvr>
+  <p:timing>
+    <p:tnLst>
+      <p:par>
+        <p:cTn id="1" dur="indefinite" restart="never" nodeType="tmRoot">
+          <p:childTnLst>
+            <p:seq concurrent="1" nextAc="seek">
+              <p:cTn id="2" dur="indefinite" nodeType="mainSeq">
+                <p:childTnLst>
+                  <p:par>
+                    <p:cTn id="3" fill="hold">
+                      <p:stCondLst>
+                        <p:cond delay="indefinite"/>
+                      </p:stCondLst>
+                      <p:childTnLst>
+                        <p:par>
+                          <p:cTn id="4" fill="hold">
+                            <p:stCondLst>
+                              <p:cond delay="0"/>
+                            </p:stCondLst>
+                            <p:childTnLst>
+                              <p:par>
+                                <p:cTn id="5" presetID="1" presetClass="entr" presetSubtype="0" fill="hold" grpId="0" nodeType="clickEffect">
+                                  <p:stCondLst>
+                                    <p:cond delay="0"/>
+                                  </p:stCondLst>
+                                  <p:childTnLst>
+                                    <p:set>
+                                      <p:cBhvr>
+                                        <p:cTn id="6" dur="1" fill="hold">
+                                          <p:stCondLst>
+                                            <p:cond delay="0"/>
+                                          </p:stCondLst>
+                                        </p:cTn>
+                                        <p:tgtEl>
+                                          <p:spTgt spid="7"/>
+                                        </p:tgtEl>
+                                        <p:attrNameLst>
+                                          <p:attrName>style.visibility</p:attrName>
+                                        </p:attrNameLst>
+                                      </p:cBhvr>
+                                      <p:to>
+                                        <p:strVal val="visible"/>
+                                      </p:to>
+                                    </p:set>
+                                  </p:childTnLst>
+                                </p:cTn>
+                              </p:par>
+                              <p:par>
+                                <p:cTn id="7" presetID="1" presetClass="entr" presetSubtype="0" fill="hold" nodeType="withEffect">
+                                  <p:stCondLst>
+                                    <p:cond delay="0"/>
+                                  </p:stCondLst>
+                                  <p:childTnLst>
+                                    <p:set>
+                                      <p:cBhvr>
+                                        <p:cTn id="8" dur="1" fill="hold">
+                                          <p:stCondLst>
+                                            <p:cond delay="0"/>
+                                          </p:stCondLst>
+                                        </p:cTn>
+                                        <p:tgtEl>
+                                          <p:spTgt spid="14"/>
+                                        </p:tgtEl>
+                                        <p:attrNameLst>
+                                          <p:attrName>style.visibility</p:attrName>
+                                        </p:attrNameLst>
+                                      </p:cBhvr>
+                                      <p:to>
+                                        <p:strVal val="visible"/>
+                                      </p:to>
+                                    </p:set>
+                                  </p:childTnLst>
+                                </p:cTn>
+                              </p:par>
+                              <p:par>
+                                <p:cTn id="9" presetID="1" presetClass="entr" presetSubtype="0" fill="hold" grpId="0" nodeType="withEffect">
+                                  <p:stCondLst>
+                                    <p:cond delay="0"/>
+                                  </p:stCondLst>
+                                  <p:childTnLst>
+                                    <p:set>
+                                      <p:cBhvr>
+                                        <p:cTn id="10" dur="1" fill="hold">
+                                          <p:stCondLst>
+                                            <p:cond delay="0"/>
+                                          </p:stCondLst>
+                                        </p:cTn>
+                                        <p:tgtEl>
+                                          <p:spTgt spid="13"/>
+                                        </p:tgtEl>
+                                        <p:attrNameLst>
+                                          <p:attrName>style.visibility</p:attrName>
+                                        </p:attrNameLst>
+                                      </p:cBhvr>
+                                      <p:to>
+                                        <p:strVal val="visible"/>
+                                      </p:to>
+                                    </p:set>
+                                  </p:childTnLst>
+                                </p:cTn>
+                              </p:par>
+                            </p:childTnLst>
+                          </p:cTn>
+                        </p:par>
+                      </p:childTnLst>
+                    </p:cTn>
+                  </p:par>
+                </p:childTnLst>
+              </p:cTn>
+              <p:prevCondLst>
+                <p:cond evt="onPrev" delay="0">
+                  <p:tgtEl>
+                    <p:sldTgt/>
+                  </p:tgtEl>
+                </p:cond>
+              </p:prevCondLst>
+              <p:nextCondLst>
+                <p:cond evt="onNext" delay="0">
+                  <p:tgtEl>
+                    <p:sldTgt/>
+                  </p:tgtEl>
+                </p:cond>
+              </p:nextCondLst>
+            </p:seq>
+          </p:childTnLst>
+        </p:cTn>
+      </p:par>
+    </p:tnLst>
+    <p:bldLst>
+      <p:bldP spid="7" grpId="0"/>
+      <p:bldP spid="13" grpId="0"/>
+    </p:bldLst>
+  </p:timing>
 </p:sld>
 </file>
 
-<file path=ppt/slides/slide12.xml><?xml version="1.0" encoding="utf-8"?>
+<file path=ppt/slides/slide11.xml><?xml version="1.0" encoding="utf-8"?>
 <p:sld xmlns:a="http://schemas.openxmlformats.org/drawingml/2006/main" xmlns:r="http://schemas.openxmlformats.org/officeDocument/2006/relationships" xmlns:p="http://schemas.openxmlformats.org/presentationml/2006/main">
   <p:cSld>
     <p:spTree>
@@ -12862,10 +10291,10 @@
       </p:sp>
       <p:pic>
         <p:nvPicPr>
-          <p:cNvPr id="5" name="Picture 4">
+          <p:cNvPr id="3" name="Picture 2">
             <a:extLst>
               <a:ext uri="{FF2B5EF4-FFF2-40B4-BE49-F238E27FC236}">
-                <a16:creationId xmlns:a16="http://schemas.microsoft.com/office/drawing/2014/main" id="{4BDB3D5D-6379-7396-68F4-896AC6A7FB60}"/>
+                <a16:creationId xmlns:a16="http://schemas.microsoft.com/office/drawing/2014/main" id="{27C1CB25-1DF6-0CAF-F6B5-069EF6524031}"/>
               </a:ext>
             </a:extLst>
           </p:cNvPr>
@@ -12876,14 +10305,15 @@
         </p:nvPicPr>
         <p:blipFill>
           <a:blip r:embed="rId3"/>
+          <a:srcRect r="50000"/>
           <a:stretch>
             <a:fillRect/>
           </a:stretch>
         </p:blipFill>
         <p:spPr>
           <a:xfrm>
-            <a:off x="1977685" y="2195771"/>
-            <a:ext cx="8236629" cy="3492647"/>
+            <a:off x="3817096" y="2064852"/>
+            <a:ext cx="4553129" cy="3948596"/>
           </a:xfrm>
           <a:prstGeom prst="rect">
             <a:avLst/>
@@ -12903,7 +10333,7 @@
 </p:sld>
 </file>
 
-<file path=ppt/slides/slide13.xml><?xml version="1.0" encoding="utf-8"?>
+<file path=ppt/slides/slide12.xml><?xml version="1.0" encoding="utf-8"?>
 <p:sld xmlns:a="http://schemas.openxmlformats.org/drawingml/2006/main" xmlns:r="http://schemas.openxmlformats.org/officeDocument/2006/relationships" xmlns:p="http://schemas.openxmlformats.org/presentationml/2006/main">
   <p:cSld>
     <p:spTree>
@@ -13167,7 +10597,7 @@
 </p:sld>
 </file>
 
-<file path=ppt/slides/slide14.xml><?xml version="1.0" encoding="utf-8"?>
+<file path=ppt/slides/slide13.xml><?xml version="1.0" encoding="utf-8"?>
 <p:sld xmlns:a="http://schemas.openxmlformats.org/drawingml/2006/main" xmlns:r="http://schemas.openxmlformats.org/officeDocument/2006/relationships" xmlns:p="http://schemas.openxmlformats.org/presentationml/2006/main">
   <p:cSld>
     <p:spTree>
@@ -13432,7 +10862,7 @@
 </p:sld>
 </file>
 
-<file path=ppt/slides/slide15.xml><?xml version="1.0" encoding="utf-8"?>
+<file path=ppt/slides/slide14.xml><?xml version="1.0" encoding="utf-8"?>
 <p:sld xmlns:a="http://schemas.openxmlformats.org/drawingml/2006/main" xmlns:r="http://schemas.openxmlformats.org/officeDocument/2006/relationships" xmlns:p="http://schemas.openxmlformats.org/presentationml/2006/main">
   <p:cSld>
     <p:spTree>
@@ -13701,538 +11131,7 @@
 </p:sld>
 </file>
 
-<file path=ppt/slides/slide16.xml><?xml version="1.0" encoding="utf-8"?>
-<p:sld xmlns:a="http://schemas.openxmlformats.org/drawingml/2006/main" xmlns:r="http://schemas.openxmlformats.org/officeDocument/2006/relationships" xmlns:p="http://schemas.openxmlformats.org/presentationml/2006/main" show="0">
-  <p:cSld>
-    <p:spTree>
-      <p:nvGrpSpPr>
-        <p:cNvPr id="1" name="">
-          <a:extLst>
-            <a:ext uri="{FF2B5EF4-FFF2-40B4-BE49-F238E27FC236}">
-              <a16:creationId xmlns:a16="http://schemas.microsoft.com/office/drawing/2014/main" id="{B71F9D83-37A7-8B2B-13EA-9778AA5CEE89}"/>
-            </a:ext>
-          </a:extLst>
-        </p:cNvPr>
-        <p:cNvGrpSpPr/>
-        <p:nvPr/>
-      </p:nvGrpSpPr>
-      <p:grpSpPr>
-        <a:xfrm>
-          <a:off x="0" y="0"/>
-          <a:ext cx="0" cy="0"/>
-          <a:chOff x="0" y="0"/>
-          <a:chExt cx="0" cy="0"/>
-        </a:xfrm>
-      </p:grpSpPr>
-      <p:sp>
-        <p:nvSpPr>
-          <p:cNvPr id="4" name="TextBox 3">
-            <a:extLst>
-              <a:ext uri="{FF2B5EF4-FFF2-40B4-BE49-F238E27FC236}">
-                <a16:creationId xmlns:a16="http://schemas.microsoft.com/office/drawing/2014/main" id="{29B4E23B-D913-7F67-0C59-89B31B5CA576}"/>
-              </a:ext>
-            </a:extLst>
-          </p:cNvPr>
-          <p:cNvSpPr txBox="1"/>
-          <p:nvPr/>
-        </p:nvSpPr>
-        <p:spPr>
-          <a:xfrm>
-            <a:off x="4244454" y="6210"/>
-            <a:ext cx="3698414" cy="468000"/>
-          </a:xfrm>
-          <a:prstGeom prst="rect">
-            <a:avLst/>
-          </a:prstGeom>
-          <a:solidFill>
-            <a:srgbClr val="903063"/>
-          </a:solidFill>
-        </p:spPr>
-        <p:txBody>
-          <a:bodyPr wrap="square" rtlCol="0">
-            <a:spAutoFit/>
-          </a:bodyPr>
-          <a:lstStyle/>
-          <a:p>
-            <a:pPr algn="ctr"/>
-            <a:endParaRPr lang="en-IL" sz="700" dirty="0">
-              <a:solidFill>
-                <a:schemeClr val="bg1"/>
-              </a:solidFill>
-            </a:endParaRPr>
-          </a:p>
-          <a:p>
-            <a:pPr algn="ctr"/>
-            <a:r>
-              <a:rPr lang="en-IL" sz="1400" i="1" dirty="0">
-                <a:solidFill>
-                  <a:schemeClr val="bg1"/>
-                </a:solidFill>
-                <a:latin typeface="Abadi MT Condensed Light" panose="020B0306030101010103" pitchFamily="34" charset="77"/>
-                <a:ea typeface="Batang" panose="02030600000101010101" pitchFamily="18" charset="-127"/>
-                <a:cs typeface="Corsiva Hebrew" pitchFamily="2" charset="-79"/>
-              </a:rPr>
-              <a:t>Results</a:t>
-            </a:r>
-          </a:p>
-        </p:txBody>
-      </p:sp>
-      <p:sp>
-        <p:nvSpPr>
-          <p:cNvPr id="7" name="Title 1">
-            <a:extLst>
-              <a:ext uri="{FF2B5EF4-FFF2-40B4-BE49-F238E27FC236}">
-                <a16:creationId xmlns:a16="http://schemas.microsoft.com/office/drawing/2014/main" id="{A044A0AF-B79F-783D-A827-DC56678B4433}"/>
-              </a:ext>
-            </a:extLst>
-          </p:cNvPr>
-          <p:cNvSpPr txBox="1">
-            <a:spLocks/>
-          </p:cNvSpPr>
-          <p:nvPr/>
-        </p:nvSpPr>
-        <p:spPr>
-          <a:xfrm>
-            <a:off x="1020801" y="822800"/>
-            <a:ext cx="10395551" cy="624060"/>
-          </a:xfrm>
-          <a:prstGeom prst="rect">
-            <a:avLst/>
-          </a:prstGeom>
-        </p:spPr>
-        <p:txBody>
-          <a:bodyPr vert="horz" lIns="91440" tIns="45720" rIns="91440" bIns="45720" rtlCol="0" anchor="b">
-            <a:normAutofit fontScale="77500" lnSpcReduction="20000"/>
-          </a:bodyPr>
-          <a:lstStyle>
-            <a:lvl1pPr algn="l" defTabSz="457200" rtl="0" eaLnBrk="1" latinLnBrk="0" hangingPunct="1">
-              <a:spcBef>
-                <a:spcPct val="0"/>
-              </a:spcBef>
-              <a:buNone/>
-              <a:defRPr sz="2800" b="0" kern="1200" cap="all">
-                <a:solidFill>
-                  <a:schemeClr val="bg1"/>
-                </a:solidFill>
-                <a:latin typeface="+mj-lt"/>
-                <a:ea typeface="+mj-ea"/>
-                <a:cs typeface="+mj-cs"/>
-              </a:defRPr>
-            </a:lvl1pPr>
-            <a:lvl2pPr eaLnBrk="1" hangingPunct="1">
-              <a:defRPr>
-                <a:solidFill>
-                  <a:schemeClr val="tx2"/>
-                </a:solidFill>
-              </a:defRPr>
-            </a:lvl2pPr>
-            <a:lvl3pPr eaLnBrk="1" hangingPunct="1">
-              <a:defRPr>
-                <a:solidFill>
-                  <a:schemeClr val="tx2"/>
-                </a:solidFill>
-              </a:defRPr>
-            </a:lvl3pPr>
-            <a:lvl4pPr eaLnBrk="1" hangingPunct="1">
-              <a:defRPr>
-                <a:solidFill>
-                  <a:schemeClr val="tx2"/>
-                </a:solidFill>
-              </a:defRPr>
-            </a:lvl4pPr>
-            <a:lvl5pPr eaLnBrk="1" hangingPunct="1">
-              <a:defRPr>
-                <a:solidFill>
-                  <a:schemeClr val="tx2"/>
-                </a:solidFill>
-              </a:defRPr>
-            </a:lvl5pPr>
-            <a:lvl6pPr eaLnBrk="1" hangingPunct="1">
-              <a:defRPr>
-                <a:solidFill>
-                  <a:schemeClr val="tx2"/>
-                </a:solidFill>
-              </a:defRPr>
-            </a:lvl6pPr>
-            <a:lvl7pPr eaLnBrk="1" hangingPunct="1">
-              <a:defRPr>
-                <a:solidFill>
-                  <a:schemeClr val="tx2"/>
-                </a:solidFill>
-              </a:defRPr>
-            </a:lvl7pPr>
-            <a:lvl8pPr eaLnBrk="1" hangingPunct="1">
-              <a:defRPr>
-                <a:solidFill>
-                  <a:schemeClr val="tx2"/>
-                </a:solidFill>
-              </a:defRPr>
-            </a:lvl8pPr>
-            <a:lvl9pPr eaLnBrk="1" hangingPunct="1">
-              <a:defRPr>
-                <a:solidFill>
-                  <a:schemeClr val="tx2"/>
-                </a:solidFill>
-              </a:defRPr>
-            </a:lvl9pPr>
-          </a:lstStyle>
-          <a:p>
-            <a:r>
-              <a:rPr lang="en-US" dirty="0"/>
-              <a:t>which known cancer genes co-occur with TP53 loss and high FGA?</a:t>
-            </a:r>
-          </a:p>
-        </p:txBody>
-      </p:sp>
-      <p:sp>
-        <p:nvSpPr>
-          <p:cNvPr id="13" name="TextBox 12">
-            <a:extLst>
-              <a:ext uri="{FF2B5EF4-FFF2-40B4-BE49-F238E27FC236}">
-                <a16:creationId xmlns:a16="http://schemas.microsoft.com/office/drawing/2014/main" id="{85491A5D-BF4D-4D90-0CCC-5AF81947488E}"/>
-              </a:ext>
-            </a:extLst>
-          </p:cNvPr>
-          <p:cNvSpPr txBox="1"/>
-          <p:nvPr/>
-        </p:nvSpPr>
-        <p:spPr>
-          <a:xfrm>
-            <a:off x="3082043" y="6035200"/>
-            <a:ext cx="6273064" cy="646331"/>
-          </a:xfrm>
-          <a:prstGeom prst="rect">
-            <a:avLst/>
-          </a:prstGeom>
-          <a:noFill/>
-        </p:spPr>
-        <p:txBody>
-          <a:bodyPr wrap="none" rtlCol="0">
-            <a:spAutoFit/>
-          </a:bodyPr>
-          <a:lstStyle/>
-          <a:p>
-            <a:pPr algn="ctr"/>
-            <a:r>
-              <a:rPr lang="en-US" dirty="0"/>
-              <a:t>Amplified genes (left panel): oncogenes being turned ON</a:t>
-            </a:r>
-          </a:p>
-          <a:p>
-            <a:pPr algn="ctr"/>
-            <a:r>
-              <a:rPr lang="en-US" dirty="0"/>
-              <a:t>Deleted genes (right panel): tumor suppressors being turned OFF</a:t>
-            </a:r>
-          </a:p>
-        </p:txBody>
-      </p:sp>
-      <p:pic>
-        <p:nvPicPr>
-          <p:cNvPr id="2" name="Picture 1">
-            <a:extLst>
-              <a:ext uri="{FF2B5EF4-FFF2-40B4-BE49-F238E27FC236}">
-                <a16:creationId xmlns:a16="http://schemas.microsoft.com/office/drawing/2014/main" id="{E27A9F89-4795-F6D5-36DF-485D3CEDCFFA}"/>
-              </a:ext>
-            </a:extLst>
-          </p:cNvPr>
-          <p:cNvPicPr>
-            <a:picLocks noChangeAspect="1"/>
-          </p:cNvPicPr>
-          <p:nvPr/>
-        </p:nvPicPr>
-        <p:blipFill>
-          <a:blip r:embed="rId3"/>
-          <a:stretch>
-            <a:fillRect/>
-          </a:stretch>
-        </p:blipFill>
-        <p:spPr>
-          <a:xfrm>
-            <a:off x="2301135" y="1947450"/>
-            <a:ext cx="7589729" cy="3914062"/>
-          </a:xfrm>
-          <a:prstGeom prst="rect">
-            <a:avLst/>
-          </a:prstGeom>
-        </p:spPr>
-      </p:pic>
-    </p:spTree>
-    <p:extLst>
-      <p:ext uri="{BB962C8B-B14F-4D97-AF65-F5344CB8AC3E}">
-        <p14:creationId xmlns:p14="http://schemas.microsoft.com/office/powerpoint/2010/main" val="1861490624"/>
-      </p:ext>
-    </p:extLst>
-  </p:cSld>
-  <p:clrMapOvr>
-    <a:masterClrMapping/>
-  </p:clrMapOvr>
-</p:sld>
-</file>
-
-<file path=ppt/slides/slide17.xml><?xml version="1.0" encoding="utf-8"?>
-<p:sld xmlns:a="http://schemas.openxmlformats.org/drawingml/2006/main" xmlns:r="http://schemas.openxmlformats.org/officeDocument/2006/relationships" xmlns:p="http://schemas.openxmlformats.org/presentationml/2006/main" show="0">
-  <p:cSld>
-    <p:spTree>
-      <p:nvGrpSpPr>
-        <p:cNvPr id="1" name="">
-          <a:extLst>
-            <a:ext uri="{FF2B5EF4-FFF2-40B4-BE49-F238E27FC236}">
-              <a16:creationId xmlns:a16="http://schemas.microsoft.com/office/drawing/2014/main" id="{1E1A3BEB-D12B-CB91-CABF-F7664DD59EE9}"/>
-            </a:ext>
-          </a:extLst>
-        </p:cNvPr>
-        <p:cNvGrpSpPr/>
-        <p:nvPr/>
-      </p:nvGrpSpPr>
-      <p:grpSpPr>
-        <a:xfrm>
-          <a:off x="0" y="0"/>
-          <a:ext cx="0" cy="0"/>
-          <a:chOff x="0" y="0"/>
-          <a:chExt cx="0" cy="0"/>
-        </a:xfrm>
-      </p:grpSpPr>
-      <p:sp>
-        <p:nvSpPr>
-          <p:cNvPr id="4" name="TextBox 3">
-            <a:extLst>
-              <a:ext uri="{FF2B5EF4-FFF2-40B4-BE49-F238E27FC236}">
-                <a16:creationId xmlns:a16="http://schemas.microsoft.com/office/drawing/2014/main" id="{A193E180-EB01-9ECE-1243-D31F5973EB3E}"/>
-              </a:ext>
-            </a:extLst>
-          </p:cNvPr>
-          <p:cNvSpPr txBox="1"/>
-          <p:nvPr/>
-        </p:nvSpPr>
-        <p:spPr>
-          <a:xfrm>
-            <a:off x="4244454" y="6210"/>
-            <a:ext cx="3698414" cy="468000"/>
-          </a:xfrm>
-          <a:prstGeom prst="rect">
-            <a:avLst/>
-          </a:prstGeom>
-          <a:solidFill>
-            <a:srgbClr val="903063"/>
-          </a:solidFill>
-        </p:spPr>
-        <p:txBody>
-          <a:bodyPr wrap="square" rtlCol="0">
-            <a:spAutoFit/>
-          </a:bodyPr>
-          <a:lstStyle/>
-          <a:p>
-            <a:pPr algn="ctr"/>
-            <a:endParaRPr lang="en-IL" sz="700" dirty="0">
-              <a:solidFill>
-                <a:schemeClr val="bg1"/>
-              </a:solidFill>
-            </a:endParaRPr>
-          </a:p>
-          <a:p>
-            <a:pPr algn="ctr"/>
-            <a:r>
-              <a:rPr lang="en-IL" sz="1400" i="1" dirty="0">
-                <a:solidFill>
-                  <a:schemeClr val="bg1"/>
-                </a:solidFill>
-                <a:latin typeface="Abadi MT Condensed Light" panose="020B0306030101010103" pitchFamily="34" charset="77"/>
-                <a:ea typeface="Batang" panose="02030600000101010101" pitchFamily="18" charset="-127"/>
-                <a:cs typeface="Corsiva Hebrew" pitchFamily="2" charset="-79"/>
-              </a:rPr>
-              <a:t>Results</a:t>
-            </a:r>
-          </a:p>
-        </p:txBody>
-      </p:sp>
-      <p:sp>
-        <p:nvSpPr>
-          <p:cNvPr id="7" name="Title 1">
-            <a:extLst>
-              <a:ext uri="{FF2B5EF4-FFF2-40B4-BE49-F238E27FC236}">
-                <a16:creationId xmlns:a16="http://schemas.microsoft.com/office/drawing/2014/main" id="{536CA0E1-8570-4D19-76A9-3451F87062A2}"/>
-              </a:ext>
-            </a:extLst>
-          </p:cNvPr>
-          <p:cNvSpPr txBox="1">
-            <a:spLocks/>
-          </p:cNvSpPr>
-          <p:nvPr/>
-        </p:nvSpPr>
-        <p:spPr>
-          <a:xfrm>
-            <a:off x="1020801" y="822800"/>
-            <a:ext cx="10395551" cy="624060"/>
-          </a:xfrm>
-          <a:prstGeom prst="rect">
-            <a:avLst/>
-          </a:prstGeom>
-        </p:spPr>
-        <p:txBody>
-          <a:bodyPr vert="horz" lIns="91440" tIns="45720" rIns="91440" bIns="45720" rtlCol="0" anchor="b">
-            <a:normAutofit/>
-          </a:bodyPr>
-          <a:lstStyle>
-            <a:lvl1pPr algn="l" defTabSz="457200" rtl="0" eaLnBrk="1" latinLnBrk="0" hangingPunct="1">
-              <a:spcBef>
-                <a:spcPct val="0"/>
-              </a:spcBef>
-              <a:buNone/>
-              <a:defRPr sz="2800" b="0" kern="1200" cap="all">
-                <a:solidFill>
-                  <a:schemeClr val="bg1"/>
-                </a:solidFill>
-                <a:latin typeface="+mj-lt"/>
-                <a:ea typeface="+mj-ea"/>
-                <a:cs typeface="+mj-cs"/>
-              </a:defRPr>
-            </a:lvl1pPr>
-            <a:lvl2pPr eaLnBrk="1" hangingPunct="1">
-              <a:defRPr>
-                <a:solidFill>
-                  <a:schemeClr val="tx2"/>
-                </a:solidFill>
-              </a:defRPr>
-            </a:lvl2pPr>
-            <a:lvl3pPr eaLnBrk="1" hangingPunct="1">
-              <a:defRPr>
-                <a:solidFill>
-                  <a:schemeClr val="tx2"/>
-                </a:solidFill>
-              </a:defRPr>
-            </a:lvl3pPr>
-            <a:lvl4pPr eaLnBrk="1" hangingPunct="1">
-              <a:defRPr>
-                <a:solidFill>
-                  <a:schemeClr val="tx2"/>
-                </a:solidFill>
-              </a:defRPr>
-            </a:lvl4pPr>
-            <a:lvl5pPr eaLnBrk="1" hangingPunct="1">
-              <a:defRPr>
-                <a:solidFill>
-                  <a:schemeClr val="tx2"/>
-                </a:solidFill>
-              </a:defRPr>
-            </a:lvl5pPr>
-            <a:lvl6pPr eaLnBrk="1" hangingPunct="1">
-              <a:defRPr>
-                <a:solidFill>
-                  <a:schemeClr val="tx2"/>
-                </a:solidFill>
-              </a:defRPr>
-            </a:lvl6pPr>
-            <a:lvl7pPr eaLnBrk="1" hangingPunct="1">
-              <a:defRPr>
-                <a:solidFill>
-                  <a:schemeClr val="tx2"/>
-                </a:solidFill>
-              </a:defRPr>
-            </a:lvl7pPr>
-            <a:lvl8pPr eaLnBrk="1" hangingPunct="1">
-              <a:defRPr>
-                <a:solidFill>
-                  <a:schemeClr val="tx2"/>
-                </a:solidFill>
-              </a:defRPr>
-            </a:lvl8pPr>
-            <a:lvl9pPr eaLnBrk="1" hangingPunct="1">
-              <a:defRPr>
-                <a:solidFill>
-                  <a:schemeClr val="tx2"/>
-                </a:solidFill>
-              </a:defRPr>
-            </a:lvl9pPr>
-          </a:lstStyle>
-          <a:p>
-            <a:r>
-              <a:rPr lang="en-US" dirty="0"/>
-              <a:t>which pathways are triggered?</a:t>
-            </a:r>
-          </a:p>
-        </p:txBody>
-      </p:sp>
-      <p:sp>
-        <p:nvSpPr>
-          <p:cNvPr id="13" name="TextBox 12">
-            <a:extLst>
-              <a:ext uri="{FF2B5EF4-FFF2-40B4-BE49-F238E27FC236}">
-                <a16:creationId xmlns:a16="http://schemas.microsoft.com/office/drawing/2014/main" id="{DE2D1785-4F39-48A7-21A4-CC375FCE1ADD}"/>
-              </a:ext>
-            </a:extLst>
-          </p:cNvPr>
-          <p:cNvSpPr txBox="1"/>
-          <p:nvPr/>
-        </p:nvSpPr>
-        <p:spPr>
-          <a:xfrm>
-            <a:off x="1826190" y="6035200"/>
-            <a:ext cx="9079595" cy="646331"/>
-          </a:xfrm>
-          <a:prstGeom prst="rect">
-            <a:avLst/>
-          </a:prstGeom>
-          <a:noFill/>
-        </p:spPr>
-        <p:txBody>
-          <a:bodyPr wrap="square" rtlCol="0">
-            <a:spAutoFit/>
-          </a:bodyPr>
-          <a:lstStyle/>
-          <a:p>
-            <a:pPr algn="ctr"/>
-            <a:r>
-              <a:rPr lang="en-US" dirty="0"/>
-              <a:t>When TP53 breaks and FGA is high, cell cycle control (E2F, G2-M) and growth signaling (PI3K/AKT/mTOR) pathways are the main downstream consequences</a:t>
-            </a:r>
-          </a:p>
-        </p:txBody>
-      </p:sp>
-      <p:pic>
-        <p:nvPicPr>
-          <p:cNvPr id="2" name="Picture 1">
-            <a:extLst>
-              <a:ext uri="{FF2B5EF4-FFF2-40B4-BE49-F238E27FC236}">
-                <a16:creationId xmlns:a16="http://schemas.microsoft.com/office/drawing/2014/main" id="{0B860F4F-D332-2A94-21C1-B599432884A2}"/>
-              </a:ext>
-            </a:extLst>
-          </p:cNvPr>
-          <p:cNvPicPr>
-            <a:picLocks noChangeAspect="1"/>
-          </p:cNvPicPr>
-          <p:nvPr/>
-        </p:nvPicPr>
-        <p:blipFill>
-          <a:blip r:embed="rId3"/>
-          <a:stretch>
-            <a:fillRect/>
-          </a:stretch>
-        </p:blipFill>
-        <p:spPr>
-          <a:xfrm>
-            <a:off x="1286215" y="2020945"/>
-            <a:ext cx="9619570" cy="3772530"/>
-          </a:xfrm>
-          <a:prstGeom prst="rect">
-            <a:avLst/>
-          </a:prstGeom>
-        </p:spPr>
-      </p:pic>
-    </p:spTree>
-    <p:extLst>
-      <p:ext uri="{BB962C8B-B14F-4D97-AF65-F5344CB8AC3E}">
-        <p14:creationId xmlns:p14="http://schemas.microsoft.com/office/powerpoint/2010/main" val="2378245227"/>
-      </p:ext>
-    </p:extLst>
-  </p:cSld>
-  <p:clrMapOvr>
-    <a:masterClrMapping/>
-  </p:clrMapOvr>
-</p:sld>
-</file>
-
-<file path=ppt/slides/slide18.xml><?xml version="1.0" encoding="utf-8"?>
+<file path=ppt/slides/slide15.xml><?xml version="1.0" encoding="utf-8"?>
 <p:sld xmlns:a="http://schemas.openxmlformats.org/drawingml/2006/main" xmlns:r="http://schemas.openxmlformats.org/officeDocument/2006/relationships" xmlns:p="http://schemas.openxmlformats.org/presentationml/2006/main">
   <p:cSld>
     <p:bg>
@@ -14418,7 +11317,7 @@
           <a:p>
             <a:r>
               <a:rPr lang="en-US" dirty="0"/>
-              <a:t>Binary effect VS. CONTINUOUS EFFECT</a:t>
+              <a:t>Conclusions</a:t>
             </a:r>
           </a:p>
         </p:txBody>
@@ -14505,7 +11404,7 @@
             </a:r>
             <a:r>
               <a:rPr lang="en-US" sz="2800" dirty="0"/>
-              <a:t>: once TP53 loses function, genomic chaos follows, but the </a:t>
+              <a:t>: once TP53 changes its function, genomic chaos follows, but the </a:t>
             </a:r>
             <a:r>
               <a:rPr lang="en-US" sz="2800" u="sng" dirty="0"/>
@@ -14573,10 +11472,180 @@
   <p:clrMapOvr>
     <a:masterClrMapping/>
   </p:clrMapOvr>
+  <p:timing>
+    <p:tnLst>
+      <p:par>
+        <p:cTn id="1" dur="indefinite" restart="never" nodeType="tmRoot">
+          <p:childTnLst>
+            <p:seq concurrent="1" nextAc="seek">
+              <p:cTn id="2" dur="indefinite" nodeType="mainSeq">
+                <p:childTnLst>
+                  <p:par>
+                    <p:cTn id="3" fill="hold">
+                      <p:stCondLst>
+                        <p:cond delay="indefinite"/>
+                      </p:stCondLst>
+                      <p:childTnLst>
+                        <p:par>
+                          <p:cTn id="4" fill="hold">
+                            <p:stCondLst>
+                              <p:cond delay="0"/>
+                            </p:stCondLst>
+                            <p:childTnLst>
+                              <p:par>
+                                <p:cTn id="5" presetID="1" presetClass="entr" presetSubtype="0" fill="hold" grpId="0" nodeType="clickEffect">
+                                  <p:stCondLst>
+                                    <p:cond delay="0"/>
+                                  </p:stCondLst>
+                                  <p:childTnLst>
+                                    <p:set>
+                                      <p:cBhvr>
+                                        <p:cTn id="6" dur="1" fill="hold">
+                                          <p:stCondLst>
+                                            <p:cond delay="0"/>
+                                          </p:stCondLst>
+                                        </p:cTn>
+                                        <p:tgtEl>
+                                          <p:spTgt spid="7"/>
+                                        </p:tgtEl>
+                                        <p:attrNameLst>
+                                          <p:attrName>style.visibility</p:attrName>
+                                        </p:attrNameLst>
+                                      </p:cBhvr>
+                                      <p:to>
+                                        <p:strVal val="visible"/>
+                                      </p:to>
+                                    </p:set>
+                                  </p:childTnLst>
+                                </p:cTn>
+                              </p:par>
+                            </p:childTnLst>
+                          </p:cTn>
+                        </p:par>
+                      </p:childTnLst>
+                    </p:cTn>
+                  </p:par>
+                  <p:par>
+                    <p:cTn id="7" fill="hold">
+                      <p:stCondLst>
+                        <p:cond delay="indefinite"/>
+                      </p:stCondLst>
+                      <p:childTnLst>
+                        <p:par>
+                          <p:cTn id="8" fill="hold">
+                            <p:stCondLst>
+                              <p:cond delay="0"/>
+                            </p:stCondLst>
+                            <p:childTnLst>
+                              <p:par>
+                                <p:cTn id="9" presetID="1" presetClass="entr" presetSubtype="0" fill="hold" grpId="0" nodeType="clickEffect">
+                                  <p:stCondLst>
+                                    <p:cond delay="0"/>
+                                  </p:stCondLst>
+                                  <p:childTnLst>
+                                    <p:set>
+                                      <p:cBhvr>
+                                        <p:cTn id="10" dur="1" fill="hold">
+                                          <p:stCondLst>
+                                            <p:cond delay="0"/>
+                                          </p:stCondLst>
+                                        </p:cTn>
+                                        <p:tgtEl>
+                                          <p:spTgt spid="8"/>
+                                        </p:tgtEl>
+                                        <p:attrNameLst>
+                                          <p:attrName>style.visibility</p:attrName>
+                                        </p:attrNameLst>
+                                      </p:cBhvr>
+                                      <p:to>
+                                        <p:strVal val="visible"/>
+                                      </p:to>
+                                    </p:set>
+                                  </p:childTnLst>
+                                </p:cTn>
+                              </p:par>
+                            </p:childTnLst>
+                          </p:cTn>
+                        </p:par>
+                      </p:childTnLst>
+                    </p:cTn>
+                  </p:par>
+                  <p:par>
+                    <p:cTn id="11" fill="hold">
+                      <p:stCondLst>
+                        <p:cond delay="indefinite"/>
+                      </p:stCondLst>
+                      <p:childTnLst>
+                        <p:par>
+                          <p:cTn id="12" fill="hold">
+                            <p:stCondLst>
+                              <p:cond delay="0"/>
+                            </p:stCondLst>
+                            <p:childTnLst>
+                              <p:par>
+                                <p:cTn id="13" presetID="1" presetClass="entr" presetSubtype="0" fill="hold" grpId="0" nodeType="clickEffect">
+                                  <p:stCondLst>
+                                    <p:cond delay="0"/>
+                                  </p:stCondLst>
+                                  <p:childTnLst>
+                                    <p:set>
+                                      <p:cBhvr>
+                                        <p:cTn id="14" dur="1" fill="hold">
+                                          <p:stCondLst>
+                                            <p:cond delay="0"/>
+                                          </p:stCondLst>
+                                        </p:cTn>
+                                        <p:tgtEl>
+                                          <p:spTgt spid="9"/>
+                                        </p:tgtEl>
+                                        <p:attrNameLst>
+                                          <p:attrName>style.visibility</p:attrName>
+                                        </p:attrNameLst>
+                                      </p:cBhvr>
+                                      <p:to>
+                                        <p:strVal val="visible"/>
+                                      </p:to>
+                                    </p:set>
+                                  </p:childTnLst>
+                                </p:cTn>
+                              </p:par>
+                            </p:childTnLst>
+                          </p:cTn>
+                        </p:par>
+                      </p:childTnLst>
+                    </p:cTn>
+                  </p:par>
+                </p:childTnLst>
+              </p:cTn>
+              <p:prevCondLst>
+                <p:cond evt="onPrev" delay="0">
+                  <p:tgtEl>
+                    <p:sldTgt/>
+                  </p:tgtEl>
+                </p:cond>
+              </p:prevCondLst>
+              <p:nextCondLst>
+                <p:cond evt="onNext" delay="0">
+                  <p:tgtEl>
+                    <p:sldTgt/>
+                  </p:tgtEl>
+                </p:cond>
+              </p:nextCondLst>
+            </p:seq>
+          </p:childTnLst>
+        </p:cTn>
+      </p:par>
+    </p:tnLst>
+    <p:bldLst>
+      <p:bldP spid="7" grpId="0"/>
+      <p:bldP spid="8" grpId="0"/>
+      <p:bldP spid="9" grpId="0"/>
+    </p:bldLst>
+  </p:timing>
 </p:sld>
 </file>
 
-<file path=ppt/slides/slide19.xml><?xml version="1.0" encoding="utf-8"?>
+<file path=ppt/slides/slide16.xml><?xml version="1.0" encoding="utf-8"?>
 <p:sld xmlns:a="http://schemas.openxmlformats.org/drawingml/2006/main" xmlns:r="http://schemas.openxmlformats.org/officeDocument/2006/relationships" xmlns:p="http://schemas.openxmlformats.org/presentationml/2006/main">
   <p:cSld>
     <p:bg>
@@ -14762,7 +11831,7 @@
           <a:p>
             <a:r>
               <a:rPr lang="en-US" dirty="0"/>
-              <a:t>The hotspot paradox</a:t>
+              <a:t>Conclusions</a:t>
             </a:r>
           </a:p>
         </p:txBody>
@@ -14810,6 +11879,498 @@
     <p:extLst>
       <p:ext uri="{BB962C8B-B14F-4D97-AF65-F5344CB8AC3E}">
         <p14:creationId xmlns:p14="http://schemas.microsoft.com/office/powerpoint/2010/main" val="16790379"/>
+      </p:ext>
+    </p:extLst>
+  </p:cSld>
+  <p:clrMapOvr>
+    <a:masterClrMapping/>
+  </p:clrMapOvr>
+</p:sld>
+</file>
+
+<file path=ppt/slides/slide17.xml><?xml version="1.0" encoding="utf-8"?>
+<p:sld xmlns:a="http://schemas.openxmlformats.org/drawingml/2006/main" xmlns:r="http://schemas.openxmlformats.org/officeDocument/2006/relationships" xmlns:p="http://schemas.openxmlformats.org/presentationml/2006/main">
+  <p:cSld>
+    <p:bg>
+      <p:bgPr>
+        <a:solidFill>
+          <a:schemeClr val="bg1"/>
+        </a:solidFill>
+        <a:effectLst/>
+      </p:bgPr>
+    </p:bg>
+    <p:spTree>
+      <p:nvGrpSpPr>
+        <p:cNvPr id="1" name="">
+          <a:extLst>
+            <a:ext uri="{FF2B5EF4-FFF2-40B4-BE49-F238E27FC236}">
+              <a16:creationId xmlns:a16="http://schemas.microsoft.com/office/drawing/2014/main" id="{804B59AA-C2FC-5D5B-688C-2CB4457CBB3D}"/>
+            </a:ext>
+          </a:extLst>
+        </p:cNvPr>
+        <p:cNvGrpSpPr/>
+        <p:nvPr/>
+      </p:nvGrpSpPr>
+      <p:grpSpPr>
+        <a:xfrm>
+          <a:off x="0" y="0"/>
+          <a:ext cx="0" cy="0"/>
+          <a:chOff x="0" y="0"/>
+          <a:chExt cx="0" cy="0"/>
+        </a:xfrm>
+      </p:grpSpPr>
+      <p:sp>
+        <p:nvSpPr>
+          <p:cNvPr id="5" name="TextBox 4">
+            <a:extLst>
+              <a:ext uri="{FF2B5EF4-FFF2-40B4-BE49-F238E27FC236}">
+                <a16:creationId xmlns:a16="http://schemas.microsoft.com/office/drawing/2014/main" id="{C51EFF4C-6D0D-B1A7-7ACD-A1722EFC2D36}"/>
+              </a:ext>
+            </a:extLst>
+          </p:cNvPr>
+          <p:cNvSpPr txBox="1"/>
+          <p:nvPr/>
+        </p:nvSpPr>
+        <p:spPr>
+          <a:xfrm>
+            <a:off x="8043084" y="0"/>
+            <a:ext cx="3700815" cy="468000"/>
+          </a:xfrm>
+          <a:prstGeom prst="rect">
+            <a:avLst/>
+          </a:prstGeom>
+          <a:solidFill>
+            <a:srgbClr val="96A0A7"/>
+          </a:solidFill>
+        </p:spPr>
+        <p:txBody>
+          <a:bodyPr wrap="square" rtlCol="0">
+            <a:spAutoFit/>
+          </a:bodyPr>
+          <a:lstStyle/>
+          <a:p>
+            <a:pPr algn="ctr"/>
+            <a:endParaRPr lang="en-IL" sz="700" dirty="0">
+              <a:solidFill>
+                <a:schemeClr val="bg1"/>
+              </a:solidFill>
+            </a:endParaRPr>
+          </a:p>
+          <a:p>
+            <a:pPr algn="ctr"/>
+            <a:r>
+              <a:rPr lang="en-IL" sz="1400" i="1" dirty="0">
+                <a:solidFill>
+                  <a:schemeClr val="bg1"/>
+                </a:solidFill>
+                <a:latin typeface="Abadi MT Condensed Light" panose="020B0306030101010103" pitchFamily="34" charset="77"/>
+                <a:ea typeface="Batang" panose="02030600000101010101" pitchFamily="18" charset="-127"/>
+                <a:cs typeface="Corsiva Hebrew" pitchFamily="2" charset="-79"/>
+              </a:rPr>
+              <a:t>Discussion</a:t>
+            </a:r>
+          </a:p>
+        </p:txBody>
+      </p:sp>
+      <p:sp>
+        <p:nvSpPr>
+          <p:cNvPr id="3" name="Title 1">
+            <a:extLst>
+              <a:ext uri="{FF2B5EF4-FFF2-40B4-BE49-F238E27FC236}">
+                <a16:creationId xmlns:a16="http://schemas.microsoft.com/office/drawing/2014/main" id="{763DACFC-91D9-69A5-56DC-A764E8036EC8}"/>
+              </a:ext>
+            </a:extLst>
+          </p:cNvPr>
+          <p:cNvSpPr txBox="1">
+            <a:spLocks/>
+          </p:cNvSpPr>
+          <p:nvPr/>
+        </p:nvSpPr>
+        <p:spPr>
+          <a:xfrm>
+            <a:off x="1020801" y="822800"/>
+            <a:ext cx="10395551" cy="624060"/>
+          </a:xfrm>
+          <a:prstGeom prst="rect">
+            <a:avLst/>
+          </a:prstGeom>
+        </p:spPr>
+        <p:txBody>
+          <a:bodyPr vert="horz" lIns="91440" tIns="45720" rIns="91440" bIns="45720" rtlCol="0" anchor="b">
+            <a:normAutofit/>
+          </a:bodyPr>
+          <a:lstStyle>
+            <a:lvl1pPr algn="l" defTabSz="457200" rtl="0" eaLnBrk="1" latinLnBrk="0" hangingPunct="1">
+              <a:spcBef>
+                <a:spcPct val="0"/>
+              </a:spcBef>
+              <a:buNone/>
+              <a:defRPr sz="2800" b="0" kern="1200" cap="all">
+                <a:solidFill>
+                  <a:schemeClr val="bg1"/>
+                </a:solidFill>
+                <a:latin typeface="+mj-lt"/>
+                <a:ea typeface="+mj-ea"/>
+                <a:cs typeface="+mj-cs"/>
+              </a:defRPr>
+            </a:lvl1pPr>
+            <a:lvl2pPr eaLnBrk="1" hangingPunct="1">
+              <a:defRPr>
+                <a:solidFill>
+                  <a:schemeClr val="tx2"/>
+                </a:solidFill>
+              </a:defRPr>
+            </a:lvl2pPr>
+            <a:lvl3pPr eaLnBrk="1" hangingPunct="1">
+              <a:defRPr>
+                <a:solidFill>
+                  <a:schemeClr val="tx2"/>
+                </a:solidFill>
+              </a:defRPr>
+            </a:lvl3pPr>
+            <a:lvl4pPr eaLnBrk="1" hangingPunct="1">
+              <a:defRPr>
+                <a:solidFill>
+                  <a:schemeClr val="tx2"/>
+                </a:solidFill>
+              </a:defRPr>
+            </a:lvl4pPr>
+            <a:lvl5pPr eaLnBrk="1" hangingPunct="1">
+              <a:defRPr>
+                <a:solidFill>
+                  <a:schemeClr val="tx2"/>
+                </a:solidFill>
+              </a:defRPr>
+            </a:lvl5pPr>
+            <a:lvl6pPr eaLnBrk="1" hangingPunct="1">
+              <a:defRPr>
+                <a:solidFill>
+                  <a:schemeClr val="tx2"/>
+                </a:solidFill>
+              </a:defRPr>
+            </a:lvl6pPr>
+            <a:lvl7pPr eaLnBrk="1" hangingPunct="1">
+              <a:defRPr>
+                <a:solidFill>
+                  <a:schemeClr val="tx2"/>
+                </a:solidFill>
+              </a:defRPr>
+            </a:lvl7pPr>
+            <a:lvl8pPr eaLnBrk="1" hangingPunct="1">
+              <a:defRPr>
+                <a:solidFill>
+                  <a:schemeClr val="tx2"/>
+                </a:solidFill>
+              </a:defRPr>
+            </a:lvl8pPr>
+            <a:lvl9pPr eaLnBrk="1" hangingPunct="1">
+              <a:defRPr>
+                <a:solidFill>
+                  <a:schemeClr val="tx2"/>
+                </a:solidFill>
+              </a:defRPr>
+            </a:lvl9pPr>
+          </a:lstStyle>
+          <a:p>
+            <a:r>
+              <a:rPr lang="en-US" dirty="0"/>
+              <a:t>Constrains and future directions</a:t>
+            </a:r>
+          </a:p>
+        </p:txBody>
+      </p:sp>
+      <p:sp>
+        <p:nvSpPr>
+          <p:cNvPr id="7" name="TextBox 6">
+            <a:extLst>
+              <a:ext uri="{FF2B5EF4-FFF2-40B4-BE49-F238E27FC236}">
+                <a16:creationId xmlns:a16="http://schemas.microsoft.com/office/drawing/2014/main" id="{B5508A9F-418E-84DC-5FE9-AABEE2687AFA}"/>
+              </a:ext>
+            </a:extLst>
+          </p:cNvPr>
+          <p:cNvSpPr txBox="1"/>
+          <p:nvPr/>
+        </p:nvSpPr>
+        <p:spPr>
+          <a:xfrm>
+            <a:off x="1020801" y="2333767"/>
+            <a:ext cx="9931527" cy="954107"/>
+          </a:xfrm>
+          <a:prstGeom prst="rect">
+            <a:avLst/>
+          </a:prstGeom>
+          <a:noFill/>
+        </p:spPr>
+        <p:txBody>
+          <a:bodyPr wrap="square" rtlCol="0">
+            <a:spAutoFit/>
+          </a:bodyPr>
+          <a:lstStyle/>
+          <a:p>
+            <a:pPr marL="285750" indent="-285750">
+              <a:buFont typeface="Wingdings" pitchFamily="2" charset="2"/>
+              <a:buChar char="Ø"/>
+            </a:pPr>
+            <a:r>
+              <a:rPr lang="en-US" sz="2800" dirty="0"/>
+              <a:t>EFS derived from one lung cell line. That may not generalize across tissues</a:t>
+            </a:r>
+          </a:p>
+        </p:txBody>
+      </p:sp>
+      <p:sp>
+        <p:nvSpPr>
+          <p:cNvPr id="2" name="TextBox 1">
+            <a:extLst>
+              <a:ext uri="{FF2B5EF4-FFF2-40B4-BE49-F238E27FC236}">
+                <a16:creationId xmlns:a16="http://schemas.microsoft.com/office/drawing/2014/main" id="{5B443CA9-DD0B-9E6C-F746-8A4B863685D0}"/>
+              </a:ext>
+            </a:extLst>
+          </p:cNvPr>
+          <p:cNvSpPr txBox="1"/>
+          <p:nvPr/>
+        </p:nvSpPr>
+        <p:spPr>
+          <a:xfrm>
+            <a:off x="1020801" y="3570127"/>
+            <a:ext cx="9931527" cy="954107"/>
+          </a:xfrm>
+          <a:prstGeom prst="rect">
+            <a:avLst/>
+          </a:prstGeom>
+          <a:noFill/>
+        </p:spPr>
+        <p:txBody>
+          <a:bodyPr wrap="square" rtlCol="0">
+            <a:spAutoFit/>
+          </a:bodyPr>
+          <a:lstStyle/>
+          <a:p>
+            <a:pPr marL="285750" indent="-285750">
+              <a:buFont typeface="Wingdings" pitchFamily="2" charset="2"/>
+              <a:buChar char="Ø"/>
+            </a:pPr>
+            <a:r>
+              <a:rPr lang="en-US" sz="2800" dirty="0"/>
+              <a:t>FGA is a bulk measure, and it doesn’t capture which specific chromosomal regions break</a:t>
+            </a:r>
+          </a:p>
+        </p:txBody>
+      </p:sp>
+    </p:spTree>
+    <p:extLst>
+      <p:ext uri="{BB962C8B-B14F-4D97-AF65-F5344CB8AC3E}">
+        <p14:creationId xmlns:p14="http://schemas.microsoft.com/office/powerpoint/2010/main" val="1871680158"/>
+      </p:ext>
+    </p:extLst>
+  </p:cSld>
+  <p:clrMapOvr>
+    <a:masterClrMapping/>
+  </p:clrMapOvr>
+  <p:timing>
+    <p:tnLst>
+      <p:par>
+        <p:cTn id="1" dur="indefinite" restart="never" nodeType="tmRoot">
+          <p:childTnLst>
+            <p:seq concurrent="1" nextAc="seek">
+              <p:cTn id="2" dur="indefinite" nodeType="mainSeq">
+                <p:childTnLst>
+                  <p:par>
+                    <p:cTn id="3" fill="hold">
+                      <p:stCondLst>
+                        <p:cond delay="indefinite"/>
+                      </p:stCondLst>
+                      <p:childTnLst>
+                        <p:par>
+                          <p:cTn id="4" fill="hold">
+                            <p:stCondLst>
+                              <p:cond delay="0"/>
+                            </p:stCondLst>
+                            <p:childTnLst>
+                              <p:par>
+                                <p:cTn id="5" presetID="1" presetClass="entr" presetSubtype="0" fill="hold" grpId="0" nodeType="clickEffect">
+                                  <p:stCondLst>
+                                    <p:cond delay="0"/>
+                                  </p:stCondLst>
+                                  <p:childTnLst>
+                                    <p:set>
+                                      <p:cBhvr>
+                                        <p:cTn id="6" dur="1" fill="hold">
+                                          <p:stCondLst>
+                                            <p:cond delay="0"/>
+                                          </p:stCondLst>
+                                        </p:cTn>
+                                        <p:tgtEl>
+                                          <p:spTgt spid="7"/>
+                                        </p:tgtEl>
+                                        <p:attrNameLst>
+                                          <p:attrName>style.visibility</p:attrName>
+                                        </p:attrNameLst>
+                                      </p:cBhvr>
+                                      <p:to>
+                                        <p:strVal val="visible"/>
+                                      </p:to>
+                                    </p:set>
+                                  </p:childTnLst>
+                                </p:cTn>
+                              </p:par>
+                            </p:childTnLst>
+                          </p:cTn>
+                        </p:par>
+                      </p:childTnLst>
+                    </p:cTn>
+                  </p:par>
+                  <p:par>
+                    <p:cTn id="7" fill="hold">
+                      <p:stCondLst>
+                        <p:cond delay="indefinite"/>
+                      </p:stCondLst>
+                      <p:childTnLst>
+                        <p:par>
+                          <p:cTn id="8" fill="hold">
+                            <p:stCondLst>
+                              <p:cond delay="0"/>
+                            </p:stCondLst>
+                            <p:childTnLst>
+                              <p:par>
+                                <p:cTn id="9" presetID="1" presetClass="entr" presetSubtype="0" fill="hold" grpId="0" nodeType="clickEffect">
+                                  <p:stCondLst>
+                                    <p:cond delay="0"/>
+                                  </p:stCondLst>
+                                  <p:childTnLst>
+                                    <p:set>
+                                      <p:cBhvr>
+                                        <p:cTn id="10" dur="1" fill="hold">
+                                          <p:stCondLst>
+                                            <p:cond delay="0"/>
+                                          </p:stCondLst>
+                                        </p:cTn>
+                                        <p:tgtEl>
+                                          <p:spTgt spid="2"/>
+                                        </p:tgtEl>
+                                        <p:attrNameLst>
+                                          <p:attrName>style.visibility</p:attrName>
+                                        </p:attrNameLst>
+                                      </p:cBhvr>
+                                      <p:to>
+                                        <p:strVal val="visible"/>
+                                      </p:to>
+                                    </p:set>
+                                  </p:childTnLst>
+                                </p:cTn>
+                              </p:par>
+                            </p:childTnLst>
+                          </p:cTn>
+                        </p:par>
+                      </p:childTnLst>
+                    </p:cTn>
+                  </p:par>
+                </p:childTnLst>
+              </p:cTn>
+              <p:prevCondLst>
+                <p:cond evt="onPrev" delay="0">
+                  <p:tgtEl>
+                    <p:sldTgt/>
+                  </p:tgtEl>
+                </p:cond>
+              </p:prevCondLst>
+              <p:nextCondLst>
+                <p:cond evt="onNext" delay="0">
+                  <p:tgtEl>
+                    <p:sldTgt/>
+                  </p:tgtEl>
+                </p:cond>
+              </p:nextCondLst>
+            </p:seq>
+          </p:childTnLst>
+        </p:cTn>
+      </p:par>
+    </p:tnLst>
+    <p:bldLst>
+      <p:bldP spid="7" grpId="0"/>
+      <p:bldP spid="2" grpId="0"/>
+    </p:bldLst>
+  </p:timing>
+</p:sld>
+</file>
+
+<file path=ppt/slides/slide18.xml><?xml version="1.0" encoding="utf-8"?>
+<p:sld xmlns:a="http://schemas.openxmlformats.org/drawingml/2006/main" xmlns:r="http://schemas.openxmlformats.org/officeDocument/2006/relationships" xmlns:p="http://schemas.openxmlformats.org/presentationml/2006/main">
+  <p:cSld>
+    <p:bg>
+      <p:bgPr>
+        <a:solidFill>
+          <a:schemeClr val="bg1"/>
+        </a:solidFill>
+        <a:effectLst/>
+      </p:bgPr>
+    </p:bg>
+    <p:spTree>
+      <p:nvGrpSpPr>
+        <p:cNvPr id="1" name="">
+          <a:extLst>
+            <a:ext uri="{FF2B5EF4-FFF2-40B4-BE49-F238E27FC236}">
+              <a16:creationId xmlns:a16="http://schemas.microsoft.com/office/drawing/2014/main" id="{0C7B6FD1-38A4-D753-E777-86AD4369D57A}"/>
+            </a:ext>
+          </a:extLst>
+        </p:cNvPr>
+        <p:cNvGrpSpPr/>
+        <p:nvPr/>
+      </p:nvGrpSpPr>
+      <p:grpSpPr>
+        <a:xfrm>
+          <a:off x="0" y="0"/>
+          <a:ext cx="0" cy="0"/>
+          <a:chOff x="0" y="0"/>
+          <a:chExt cx="0" cy="0"/>
+        </a:xfrm>
+      </p:grpSpPr>
+      <p:sp>
+        <p:nvSpPr>
+          <p:cNvPr id="2" name="Title 1">
+            <a:extLst>
+              <a:ext uri="{FF2B5EF4-FFF2-40B4-BE49-F238E27FC236}">
+                <a16:creationId xmlns:a16="http://schemas.microsoft.com/office/drawing/2014/main" id="{42BE7E1C-DBED-BE8A-25C1-FF54E557790A}"/>
+              </a:ext>
+            </a:extLst>
+          </p:cNvPr>
+          <p:cNvSpPr>
+            <a:spLocks noGrp="1"/>
+          </p:cNvSpPr>
+          <p:nvPr>
+            <p:ph type="ctrTitle"/>
+          </p:nvPr>
+        </p:nvSpPr>
+        <p:spPr>
+          <a:xfrm>
+            <a:off x="1852977" y="378485"/>
+            <a:ext cx="8486046" cy="2876471"/>
+          </a:xfrm>
+        </p:spPr>
+        <p:txBody>
+          <a:bodyPr anchor="ctr">
+            <a:normAutofit/>
+          </a:bodyPr>
+          <a:lstStyle/>
+          <a:p>
+            <a:pPr algn="ctr"/>
+            <a:r>
+              <a:rPr lang="en-US" dirty="0">
+                <a:solidFill>
+                  <a:schemeClr val="accent1">
+                    <a:lumMod val="50000"/>
+                  </a:schemeClr>
+                </a:solidFill>
+              </a:rPr>
+              <a:t>Thank you!</a:t>
+            </a:r>
+          </a:p>
+        </p:txBody>
+      </p:sp>
+    </p:spTree>
+    <p:extLst>
+      <p:ext uri="{BB962C8B-B14F-4D97-AF65-F5344CB8AC3E}">
+        <p14:creationId xmlns:p14="http://schemas.microsoft.com/office/powerpoint/2010/main" val="3900602769"/>
       </p:ext>
     </p:extLst>
   </p:cSld>
@@ -15450,615 +13011,6 @@
 </p:sld>
 </file>
 
-<file path=ppt/slides/slide20.xml><?xml version="1.0" encoding="utf-8"?>
-<p:sld xmlns:a="http://schemas.openxmlformats.org/drawingml/2006/main" xmlns:r="http://schemas.openxmlformats.org/officeDocument/2006/relationships" xmlns:p="http://schemas.openxmlformats.org/presentationml/2006/main">
-  <p:cSld>
-    <p:bg>
-      <p:bgPr>
-        <a:solidFill>
-          <a:schemeClr val="bg1"/>
-        </a:solidFill>
-        <a:effectLst/>
-      </p:bgPr>
-    </p:bg>
-    <p:spTree>
-      <p:nvGrpSpPr>
-        <p:cNvPr id="1" name="">
-          <a:extLst>
-            <a:ext uri="{FF2B5EF4-FFF2-40B4-BE49-F238E27FC236}">
-              <a16:creationId xmlns:a16="http://schemas.microsoft.com/office/drawing/2014/main" id="{804B59AA-C2FC-5D5B-688C-2CB4457CBB3D}"/>
-            </a:ext>
-          </a:extLst>
-        </p:cNvPr>
-        <p:cNvGrpSpPr/>
-        <p:nvPr/>
-      </p:nvGrpSpPr>
-      <p:grpSpPr>
-        <a:xfrm>
-          <a:off x="0" y="0"/>
-          <a:ext cx="0" cy="0"/>
-          <a:chOff x="0" y="0"/>
-          <a:chExt cx="0" cy="0"/>
-        </a:xfrm>
-      </p:grpSpPr>
-      <p:sp>
-        <p:nvSpPr>
-          <p:cNvPr id="5" name="TextBox 4">
-            <a:extLst>
-              <a:ext uri="{FF2B5EF4-FFF2-40B4-BE49-F238E27FC236}">
-                <a16:creationId xmlns:a16="http://schemas.microsoft.com/office/drawing/2014/main" id="{C51EFF4C-6D0D-B1A7-7ACD-A1722EFC2D36}"/>
-              </a:ext>
-            </a:extLst>
-          </p:cNvPr>
-          <p:cNvSpPr txBox="1"/>
-          <p:nvPr/>
-        </p:nvSpPr>
-        <p:spPr>
-          <a:xfrm>
-            <a:off x="8043084" y="0"/>
-            <a:ext cx="3700815" cy="468000"/>
-          </a:xfrm>
-          <a:prstGeom prst="rect">
-            <a:avLst/>
-          </a:prstGeom>
-          <a:solidFill>
-            <a:srgbClr val="96A0A7"/>
-          </a:solidFill>
-        </p:spPr>
-        <p:txBody>
-          <a:bodyPr wrap="square" rtlCol="0">
-            <a:spAutoFit/>
-          </a:bodyPr>
-          <a:lstStyle/>
-          <a:p>
-            <a:pPr algn="ctr"/>
-            <a:endParaRPr lang="en-IL" sz="700" dirty="0">
-              <a:solidFill>
-                <a:schemeClr val="bg1"/>
-              </a:solidFill>
-            </a:endParaRPr>
-          </a:p>
-          <a:p>
-            <a:pPr algn="ctr"/>
-            <a:r>
-              <a:rPr lang="en-IL" sz="1400" i="1" dirty="0">
-                <a:solidFill>
-                  <a:schemeClr val="bg1"/>
-                </a:solidFill>
-                <a:latin typeface="Abadi MT Condensed Light" panose="020B0306030101010103" pitchFamily="34" charset="77"/>
-                <a:ea typeface="Batang" panose="02030600000101010101" pitchFamily="18" charset="-127"/>
-                <a:cs typeface="Corsiva Hebrew" pitchFamily="2" charset="-79"/>
-              </a:rPr>
-              <a:t>Discussion</a:t>
-            </a:r>
-          </a:p>
-        </p:txBody>
-      </p:sp>
-      <p:sp>
-        <p:nvSpPr>
-          <p:cNvPr id="3" name="Title 1">
-            <a:extLst>
-              <a:ext uri="{FF2B5EF4-FFF2-40B4-BE49-F238E27FC236}">
-                <a16:creationId xmlns:a16="http://schemas.microsoft.com/office/drawing/2014/main" id="{763DACFC-91D9-69A5-56DC-A764E8036EC8}"/>
-              </a:ext>
-            </a:extLst>
-          </p:cNvPr>
-          <p:cNvSpPr txBox="1">
-            <a:spLocks/>
-          </p:cNvSpPr>
-          <p:nvPr/>
-        </p:nvSpPr>
-        <p:spPr>
-          <a:xfrm>
-            <a:off x="1020801" y="822800"/>
-            <a:ext cx="10395551" cy="624060"/>
-          </a:xfrm>
-          <a:prstGeom prst="rect">
-            <a:avLst/>
-          </a:prstGeom>
-        </p:spPr>
-        <p:txBody>
-          <a:bodyPr vert="horz" lIns="91440" tIns="45720" rIns="91440" bIns="45720" rtlCol="0" anchor="b">
-            <a:normAutofit/>
-          </a:bodyPr>
-          <a:lstStyle>
-            <a:lvl1pPr algn="l" defTabSz="457200" rtl="0" eaLnBrk="1" latinLnBrk="0" hangingPunct="1">
-              <a:spcBef>
-                <a:spcPct val="0"/>
-              </a:spcBef>
-              <a:buNone/>
-              <a:defRPr sz="2800" b="0" kern="1200" cap="all">
-                <a:solidFill>
-                  <a:schemeClr val="bg1"/>
-                </a:solidFill>
-                <a:latin typeface="+mj-lt"/>
-                <a:ea typeface="+mj-ea"/>
-                <a:cs typeface="+mj-cs"/>
-              </a:defRPr>
-            </a:lvl1pPr>
-            <a:lvl2pPr eaLnBrk="1" hangingPunct="1">
-              <a:defRPr>
-                <a:solidFill>
-                  <a:schemeClr val="tx2"/>
-                </a:solidFill>
-              </a:defRPr>
-            </a:lvl2pPr>
-            <a:lvl3pPr eaLnBrk="1" hangingPunct="1">
-              <a:defRPr>
-                <a:solidFill>
-                  <a:schemeClr val="tx2"/>
-                </a:solidFill>
-              </a:defRPr>
-            </a:lvl3pPr>
-            <a:lvl4pPr eaLnBrk="1" hangingPunct="1">
-              <a:defRPr>
-                <a:solidFill>
-                  <a:schemeClr val="tx2"/>
-                </a:solidFill>
-              </a:defRPr>
-            </a:lvl4pPr>
-            <a:lvl5pPr eaLnBrk="1" hangingPunct="1">
-              <a:defRPr>
-                <a:solidFill>
-                  <a:schemeClr val="tx2"/>
-                </a:solidFill>
-              </a:defRPr>
-            </a:lvl5pPr>
-            <a:lvl6pPr eaLnBrk="1" hangingPunct="1">
-              <a:defRPr>
-                <a:solidFill>
-                  <a:schemeClr val="tx2"/>
-                </a:solidFill>
-              </a:defRPr>
-            </a:lvl6pPr>
-            <a:lvl7pPr eaLnBrk="1" hangingPunct="1">
-              <a:defRPr>
-                <a:solidFill>
-                  <a:schemeClr val="tx2"/>
-                </a:solidFill>
-              </a:defRPr>
-            </a:lvl7pPr>
-            <a:lvl8pPr eaLnBrk="1" hangingPunct="1">
-              <a:defRPr>
-                <a:solidFill>
-                  <a:schemeClr val="tx2"/>
-                </a:solidFill>
-              </a:defRPr>
-            </a:lvl8pPr>
-            <a:lvl9pPr eaLnBrk="1" hangingPunct="1">
-              <a:defRPr>
-                <a:solidFill>
-                  <a:schemeClr val="tx2"/>
-                </a:solidFill>
-              </a:defRPr>
-            </a:lvl9pPr>
-          </a:lstStyle>
-          <a:p>
-            <a:r>
-              <a:rPr lang="en-US" dirty="0" err="1"/>
-              <a:t>lIMITATIONS</a:t>
-            </a:r>
-            <a:endParaRPr lang="en-US" dirty="0"/>
-          </a:p>
-        </p:txBody>
-      </p:sp>
-      <p:sp>
-        <p:nvSpPr>
-          <p:cNvPr id="7" name="TextBox 6">
-            <a:extLst>
-              <a:ext uri="{FF2B5EF4-FFF2-40B4-BE49-F238E27FC236}">
-                <a16:creationId xmlns:a16="http://schemas.microsoft.com/office/drawing/2014/main" id="{B5508A9F-418E-84DC-5FE9-AABEE2687AFA}"/>
-              </a:ext>
-            </a:extLst>
-          </p:cNvPr>
-          <p:cNvSpPr txBox="1"/>
-          <p:nvPr/>
-        </p:nvSpPr>
-        <p:spPr>
-          <a:xfrm>
-            <a:off x="1020801" y="2333767"/>
-            <a:ext cx="9931527" cy="954107"/>
-          </a:xfrm>
-          <a:prstGeom prst="rect">
-            <a:avLst/>
-          </a:prstGeom>
-          <a:noFill/>
-        </p:spPr>
-        <p:txBody>
-          <a:bodyPr wrap="square" rtlCol="0">
-            <a:spAutoFit/>
-          </a:bodyPr>
-          <a:lstStyle/>
-          <a:p>
-            <a:pPr marL="285750" indent="-285750">
-              <a:buFont typeface="Wingdings" pitchFamily="2" charset="2"/>
-              <a:buChar char="Ø"/>
-            </a:pPr>
-            <a:r>
-              <a:rPr lang="en-US" sz="2800" dirty="0"/>
-              <a:t>EFS derived from one lung cell line. That may not generalize across tissues</a:t>
-            </a:r>
-          </a:p>
-        </p:txBody>
-      </p:sp>
-      <p:sp>
-        <p:nvSpPr>
-          <p:cNvPr id="2" name="TextBox 1">
-            <a:extLst>
-              <a:ext uri="{FF2B5EF4-FFF2-40B4-BE49-F238E27FC236}">
-                <a16:creationId xmlns:a16="http://schemas.microsoft.com/office/drawing/2014/main" id="{5B443CA9-DD0B-9E6C-F746-8A4B863685D0}"/>
-              </a:ext>
-            </a:extLst>
-          </p:cNvPr>
-          <p:cNvSpPr txBox="1"/>
-          <p:nvPr/>
-        </p:nvSpPr>
-        <p:spPr>
-          <a:xfrm>
-            <a:off x="1020801" y="3570127"/>
-            <a:ext cx="9931527" cy="954107"/>
-          </a:xfrm>
-          <a:prstGeom prst="rect">
-            <a:avLst/>
-          </a:prstGeom>
-          <a:noFill/>
-        </p:spPr>
-        <p:txBody>
-          <a:bodyPr wrap="square" rtlCol="0">
-            <a:spAutoFit/>
-          </a:bodyPr>
-          <a:lstStyle/>
-          <a:p>
-            <a:pPr marL="285750" indent="-285750">
-              <a:buFont typeface="Wingdings" pitchFamily="2" charset="2"/>
-              <a:buChar char="Ø"/>
-            </a:pPr>
-            <a:r>
-              <a:rPr lang="en-US" sz="2800" dirty="0"/>
-              <a:t>FGA is a bulk measure, and it doesn’t capture which specific chromosomal regions break</a:t>
-            </a:r>
-          </a:p>
-        </p:txBody>
-      </p:sp>
-    </p:spTree>
-    <p:extLst>
-      <p:ext uri="{BB962C8B-B14F-4D97-AF65-F5344CB8AC3E}">
-        <p14:creationId xmlns:p14="http://schemas.microsoft.com/office/powerpoint/2010/main" val="1871680158"/>
-      </p:ext>
-    </p:extLst>
-  </p:cSld>
-  <p:clrMapOvr>
-    <a:masterClrMapping/>
-  </p:clrMapOvr>
-</p:sld>
-</file>
-
-<file path=ppt/slides/slide21.xml><?xml version="1.0" encoding="utf-8"?>
-<p:sld xmlns:a="http://schemas.openxmlformats.org/drawingml/2006/main" xmlns:r="http://schemas.openxmlformats.org/officeDocument/2006/relationships" xmlns:p="http://schemas.openxmlformats.org/presentationml/2006/main">
-  <p:cSld>
-    <p:bg>
-      <p:bgPr>
-        <a:solidFill>
-          <a:schemeClr val="bg1"/>
-        </a:solidFill>
-        <a:effectLst/>
-      </p:bgPr>
-    </p:bg>
-    <p:spTree>
-      <p:nvGrpSpPr>
-        <p:cNvPr id="1" name="">
-          <a:extLst>
-            <a:ext uri="{FF2B5EF4-FFF2-40B4-BE49-F238E27FC236}">
-              <a16:creationId xmlns:a16="http://schemas.microsoft.com/office/drawing/2014/main" id="{C4659005-9761-7A24-3731-DDAE032BB353}"/>
-            </a:ext>
-          </a:extLst>
-        </p:cNvPr>
-        <p:cNvGrpSpPr/>
-        <p:nvPr/>
-      </p:nvGrpSpPr>
-      <p:grpSpPr>
-        <a:xfrm>
-          <a:off x="0" y="0"/>
-          <a:ext cx="0" cy="0"/>
-          <a:chOff x="0" y="0"/>
-          <a:chExt cx="0" cy="0"/>
-        </a:xfrm>
-      </p:grpSpPr>
-      <p:sp>
-        <p:nvSpPr>
-          <p:cNvPr id="5" name="TextBox 4">
-            <a:extLst>
-              <a:ext uri="{FF2B5EF4-FFF2-40B4-BE49-F238E27FC236}">
-                <a16:creationId xmlns:a16="http://schemas.microsoft.com/office/drawing/2014/main" id="{9D08189D-EE63-A69D-B4E2-FAAF437EAC02}"/>
-              </a:ext>
-            </a:extLst>
-          </p:cNvPr>
-          <p:cNvSpPr txBox="1"/>
-          <p:nvPr/>
-        </p:nvSpPr>
-        <p:spPr>
-          <a:xfrm>
-            <a:off x="8043084" y="0"/>
-            <a:ext cx="3700815" cy="468000"/>
-          </a:xfrm>
-          <a:prstGeom prst="rect">
-            <a:avLst/>
-          </a:prstGeom>
-          <a:solidFill>
-            <a:srgbClr val="96A0A7"/>
-          </a:solidFill>
-        </p:spPr>
-        <p:txBody>
-          <a:bodyPr wrap="square" rtlCol="0">
-            <a:spAutoFit/>
-          </a:bodyPr>
-          <a:lstStyle/>
-          <a:p>
-            <a:pPr algn="ctr"/>
-            <a:endParaRPr lang="en-IL" sz="700" dirty="0">
-              <a:solidFill>
-                <a:schemeClr val="bg1"/>
-              </a:solidFill>
-            </a:endParaRPr>
-          </a:p>
-          <a:p>
-            <a:pPr algn="ctr"/>
-            <a:r>
-              <a:rPr lang="en-IL" sz="1400" i="1" dirty="0">
-                <a:solidFill>
-                  <a:schemeClr val="bg1"/>
-                </a:solidFill>
-                <a:latin typeface="Abadi MT Condensed Light" panose="020B0306030101010103" pitchFamily="34" charset="77"/>
-                <a:ea typeface="Batang" panose="02030600000101010101" pitchFamily="18" charset="-127"/>
-                <a:cs typeface="Corsiva Hebrew" pitchFamily="2" charset="-79"/>
-              </a:rPr>
-              <a:t>Discussion</a:t>
-            </a:r>
-          </a:p>
-        </p:txBody>
-      </p:sp>
-      <p:sp>
-        <p:nvSpPr>
-          <p:cNvPr id="3" name="Title 1">
-            <a:extLst>
-              <a:ext uri="{FF2B5EF4-FFF2-40B4-BE49-F238E27FC236}">
-                <a16:creationId xmlns:a16="http://schemas.microsoft.com/office/drawing/2014/main" id="{2315B551-78A5-80AC-8BF1-AFBB22F5C9A4}"/>
-              </a:ext>
-            </a:extLst>
-          </p:cNvPr>
-          <p:cNvSpPr txBox="1">
-            <a:spLocks/>
-          </p:cNvSpPr>
-          <p:nvPr/>
-        </p:nvSpPr>
-        <p:spPr>
-          <a:xfrm>
-            <a:off x="1020801" y="822800"/>
-            <a:ext cx="10395551" cy="624060"/>
-          </a:xfrm>
-          <a:prstGeom prst="rect">
-            <a:avLst/>
-          </a:prstGeom>
-        </p:spPr>
-        <p:txBody>
-          <a:bodyPr vert="horz" lIns="91440" tIns="45720" rIns="91440" bIns="45720" rtlCol="0" anchor="b">
-            <a:normAutofit/>
-          </a:bodyPr>
-          <a:lstStyle>
-            <a:lvl1pPr algn="l" defTabSz="457200" rtl="0" eaLnBrk="1" latinLnBrk="0" hangingPunct="1">
-              <a:spcBef>
-                <a:spcPct val="0"/>
-              </a:spcBef>
-              <a:buNone/>
-              <a:defRPr sz="2800" b="0" kern="1200" cap="all">
-                <a:solidFill>
-                  <a:schemeClr val="bg1"/>
-                </a:solidFill>
-                <a:latin typeface="+mj-lt"/>
-                <a:ea typeface="+mj-ea"/>
-                <a:cs typeface="+mj-cs"/>
-              </a:defRPr>
-            </a:lvl1pPr>
-            <a:lvl2pPr eaLnBrk="1" hangingPunct="1">
-              <a:defRPr>
-                <a:solidFill>
-                  <a:schemeClr val="tx2"/>
-                </a:solidFill>
-              </a:defRPr>
-            </a:lvl2pPr>
-            <a:lvl3pPr eaLnBrk="1" hangingPunct="1">
-              <a:defRPr>
-                <a:solidFill>
-                  <a:schemeClr val="tx2"/>
-                </a:solidFill>
-              </a:defRPr>
-            </a:lvl3pPr>
-            <a:lvl4pPr eaLnBrk="1" hangingPunct="1">
-              <a:defRPr>
-                <a:solidFill>
-                  <a:schemeClr val="tx2"/>
-                </a:solidFill>
-              </a:defRPr>
-            </a:lvl4pPr>
-            <a:lvl5pPr eaLnBrk="1" hangingPunct="1">
-              <a:defRPr>
-                <a:solidFill>
-                  <a:schemeClr val="tx2"/>
-                </a:solidFill>
-              </a:defRPr>
-            </a:lvl5pPr>
-            <a:lvl6pPr eaLnBrk="1" hangingPunct="1">
-              <a:defRPr>
-                <a:solidFill>
-                  <a:schemeClr val="tx2"/>
-                </a:solidFill>
-              </a:defRPr>
-            </a:lvl6pPr>
-            <a:lvl7pPr eaLnBrk="1" hangingPunct="1">
-              <a:defRPr>
-                <a:solidFill>
-                  <a:schemeClr val="tx2"/>
-                </a:solidFill>
-              </a:defRPr>
-            </a:lvl7pPr>
-            <a:lvl8pPr eaLnBrk="1" hangingPunct="1">
-              <a:defRPr>
-                <a:solidFill>
-                  <a:schemeClr val="tx2"/>
-                </a:solidFill>
-              </a:defRPr>
-            </a:lvl8pPr>
-            <a:lvl9pPr eaLnBrk="1" hangingPunct="1">
-              <a:defRPr>
-                <a:solidFill>
-                  <a:schemeClr val="tx2"/>
-                </a:solidFill>
-              </a:defRPr>
-            </a:lvl9pPr>
-          </a:lstStyle>
-          <a:p>
-            <a:r>
-              <a:rPr lang="en-US" dirty="0"/>
-              <a:t>Conclusion</a:t>
-            </a:r>
-          </a:p>
-        </p:txBody>
-      </p:sp>
-      <p:sp>
-        <p:nvSpPr>
-          <p:cNvPr id="7" name="TextBox 6">
-            <a:extLst>
-              <a:ext uri="{FF2B5EF4-FFF2-40B4-BE49-F238E27FC236}">
-                <a16:creationId xmlns:a16="http://schemas.microsoft.com/office/drawing/2014/main" id="{515D867E-2040-5650-B54E-F434E6687274}"/>
-              </a:ext>
-            </a:extLst>
-          </p:cNvPr>
-          <p:cNvSpPr txBox="1"/>
-          <p:nvPr/>
-        </p:nvSpPr>
-        <p:spPr>
-          <a:xfrm>
-            <a:off x="1130236" y="2929190"/>
-            <a:ext cx="9931527" cy="1384995"/>
-          </a:xfrm>
-          <a:prstGeom prst="rect">
-            <a:avLst/>
-          </a:prstGeom>
-          <a:noFill/>
-        </p:spPr>
-        <p:txBody>
-          <a:bodyPr wrap="square" rtlCol="0">
-            <a:spAutoFit/>
-          </a:bodyPr>
-          <a:lstStyle/>
-          <a:p>
-            <a:pPr algn="ctr"/>
-            <a:r>
-              <a:rPr lang="en-US" sz="2800" dirty="0"/>
-              <a:t>TP53 loss drives genomic instability as a class effect, which in turn selectively amplifies oncogenic growth pathways, which explains why TP53 mutation is such a universal and aggressive cancer event.</a:t>
-            </a:r>
-          </a:p>
-        </p:txBody>
-      </p:sp>
-    </p:spTree>
-    <p:extLst>
-      <p:ext uri="{BB962C8B-B14F-4D97-AF65-F5344CB8AC3E}">
-        <p14:creationId xmlns:p14="http://schemas.microsoft.com/office/powerpoint/2010/main" val="1256860430"/>
-      </p:ext>
-    </p:extLst>
-  </p:cSld>
-  <p:clrMapOvr>
-    <a:masterClrMapping/>
-  </p:clrMapOvr>
-</p:sld>
-</file>
-
-<file path=ppt/slides/slide22.xml><?xml version="1.0" encoding="utf-8"?>
-<p:sld xmlns:a="http://schemas.openxmlformats.org/drawingml/2006/main" xmlns:r="http://schemas.openxmlformats.org/officeDocument/2006/relationships" xmlns:p="http://schemas.openxmlformats.org/presentationml/2006/main">
-  <p:cSld>
-    <p:bg>
-      <p:bgPr>
-        <a:solidFill>
-          <a:schemeClr val="bg1"/>
-        </a:solidFill>
-        <a:effectLst/>
-      </p:bgPr>
-    </p:bg>
-    <p:spTree>
-      <p:nvGrpSpPr>
-        <p:cNvPr id="1" name="">
-          <a:extLst>
-            <a:ext uri="{FF2B5EF4-FFF2-40B4-BE49-F238E27FC236}">
-              <a16:creationId xmlns:a16="http://schemas.microsoft.com/office/drawing/2014/main" id="{0C7B6FD1-38A4-D753-E777-86AD4369D57A}"/>
-            </a:ext>
-          </a:extLst>
-        </p:cNvPr>
-        <p:cNvGrpSpPr/>
-        <p:nvPr/>
-      </p:nvGrpSpPr>
-      <p:grpSpPr>
-        <a:xfrm>
-          <a:off x="0" y="0"/>
-          <a:ext cx="0" cy="0"/>
-          <a:chOff x="0" y="0"/>
-          <a:chExt cx="0" cy="0"/>
-        </a:xfrm>
-      </p:grpSpPr>
-      <p:sp>
-        <p:nvSpPr>
-          <p:cNvPr id="2" name="Title 1">
-            <a:extLst>
-              <a:ext uri="{FF2B5EF4-FFF2-40B4-BE49-F238E27FC236}">
-                <a16:creationId xmlns:a16="http://schemas.microsoft.com/office/drawing/2014/main" id="{42BE7E1C-DBED-BE8A-25C1-FF54E557790A}"/>
-              </a:ext>
-            </a:extLst>
-          </p:cNvPr>
-          <p:cNvSpPr>
-            <a:spLocks noGrp="1"/>
-          </p:cNvSpPr>
-          <p:nvPr>
-            <p:ph type="ctrTitle"/>
-          </p:nvPr>
-        </p:nvSpPr>
-        <p:spPr>
-          <a:xfrm>
-            <a:off x="1852977" y="378485"/>
-            <a:ext cx="8486046" cy="2876471"/>
-          </a:xfrm>
-        </p:spPr>
-        <p:txBody>
-          <a:bodyPr anchor="ctr">
-            <a:normAutofit/>
-          </a:bodyPr>
-          <a:lstStyle/>
-          <a:p>
-            <a:pPr algn="ctr"/>
-            <a:r>
-              <a:rPr lang="en-US" dirty="0">
-                <a:solidFill>
-                  <a:schemeClr val="accent1">
-                    <a:lumMod val="50000"/>
-                  </a:schemeClr>
-                </a:solidFill>
-              </a:rPr>
-              <a:t>Thank you!</a:t>
-            </a:r>
-          </a:p>
-        </p:txBody>
-      </p:sp>
-    </p:spTree>
-    <p:extLst>
-      <p:ext uri="{BB962C8B-B14F-4D97-AF65-F5344CB8AC3E}">
-        <p14:creationId xmlns:p14="http://schemas.microsoft.com/office/powerpoint/2010/main" val="3900602769"/>
-      </p:ext>
-    </p:extLst>
-  </p:cSld>
-  <p:clrMapOvr>
-    <a:masterClrMapping/>
-  </p:clrMapOvr>
-</p:sld>
-</file>
-
 <file path=ppt/slides/slide3.xml><?xml version="1.0" encoding="utf-8"?>
 <p:sld xmlns:a="http://schemas.openxmlformats.org/drawingml/2006/main" xmlns:r="http://schemas.openxmlformats.org/officeDocument/2006/relationships" xmlns:p="http://schemas.openxmlformats.org/presentationml/2006/main">
   <p:cSld>
@@ -16759,6 +13711,168 @@
   <p:clrMapOvr>
     <a:masterClrMapping/>
   </p:clrMapOvr>
+  <p:timing>
+    <p:tnLst>
+      <p:par>
+        <p:cTn id="1" dur="indefinite" restart="never" nodeType="tmRoot">
+          <p:childTnLst>
+            <p:seq concurrent="1" nextAc="seek">
+              <p:cTn id="2" dur="indefinite" nodeType="mainSeq">
+                <p:childTnLst>
+                  <p:par>
+                    <p:cTn id="3" fill="hold">
+                      <p:stCondLst>
+                        <p:cond delay="indefinite"/>
+                      </p:stCondLst>
+                      <p:childTnLst>
+                        <p:par>
+                          <p:cTn id="4" fill="hold">
+                            <p:stCondLst>
+                              <p:cond delay="0"/>
+                            </p:stCondLst>
+                            <p:childTnLst>
+                              <p:par>
+                                <p:cTn id="5" presetID="1" presetClass="entr" presetSubtype="0" fill="hold" grpId="0" nodeType="clickEffect">
+                                  <p:stCondLst>
+                                    <p:cond delay="0"/>
+                                  </p:stCondLst>
+                                  <p:childTnLst>
+                                    <p:set>
+                                      <p:cBhvr>
+                                        <p:cTn id="6" dur="1" fill="hold">
+                                          <p:stCondLst>
+                                            <p:cond delay="0"/>
+                                          </p:stCondLst>
+                                        </p:cTn>
+                                        <p:tgtEl>
+                                          <p:spTgt spid="10"/>
+                                        </p:tgtEl>
+                                        <p:attrNameLst>
+                                          <p:attrName>style.visibility</p:attrName>
+                                        </p:attrNameLst>
+                                      </p:cBhvr>
+                                      <p:to>
+                                        <p:strVal val="visible"/>
+                                      </p:to>
+                                    </p:set>
+                                  </p:childTnLst>
+                                </p:cTn>
+                              </p:par>
+                              <p:par>
+                                <p:cTn id="7" presetID="1" presetClass="entr" presetSubtype="0" fill="hold" grpId="0" nodeType="withEffect">
+                                  <p:stCondLst>
+                                    <p:cond delay="0"/>
+                                  </p:stCondLst>
+                                  <p:childTnLst>
+                                    <p:set>
+                                      <p:cBhvr>
+                                        <p:cTn id="8" dur="1" fill="hold">
+                                          <p:stCondLst>
+                                            <p:cond delay="0"/>
+                                          </p:stCondLst>
+                                        </p:cTn>
+                                        <p:tgtEl>
+                                          <p:spTgt spid="15"/>
+                                        </p:tgtEl>
+                                        <p:attrNameLst>
+                                          <p:attrName>style.visibility</p:attrName>
+                                        </p:attrNameLst>
+                                      </p:cBhvr>
+                                      <p:to>
+                                        <p:strVal val="visible"/>
+                                      </p:to>
+                                    </p:set>
+                                  </p:childTnLst>
+                                </p:cTn>
+                              </p:par>
+                              <p:par>
+                                <p:cTn id="9" presetID="1" presetClass="entr" presetSubtype="0" fill="hold" grpId="0" nodeType="withEffect">
+                                  <p:stCondLst>
+                                    <p:cond delay="0"/>
+                                  </p:stCondLst>
+                                  <p:childTnLst>
+                                    <p:set>
+                                      <p:cBhvr>
+                                        <p:cTn id="10" dur="1" fill="hold">
+                                          <p:stCondLst>
+                                            <p:cond delay="0"/>
+                                          </p:stCondLst>
+                                        </p:cTn>
+                                        <p:tgtEl>
+                                          <p:spTgt spid="16"/>
+                                        </p:tgtEl>
+                                        <p:attrNameLst>
+                                          <p:attrName>style.visibility</p:attrName>
+                                        </p:attrNameLst>
+                                      </p:cBhvr>
+                                      <p:to>
+                                        <p:strVal val="visible"/>
+                                      </p:to>
+                                    </p:set>
+                                  </p:childTnLst>
+                                </p:cTn>
+                              </p:par>
+                              <p:par>
+                                <p:cTn id="11" presetID="1" presetClass="entr" presetSubtype="0" fill="hold" grpId="0" nodeType="withEffect">
+                                  <p:stCondLst>
+                                    <p:cond delay="0"/>
+                                  </p:stCondLst>
+                                  <p:childTnLst>
+                                    <p:set>
+                                      <p:cBhvr>
+                                        <p:cTn id="12" dur="1" fill="hold">
+                                          <p:stCondLst>
+                                            <p:cond delay="0"/>
+                                          </p:stCondLst>
+                                        </p:cTn>
+                                        <p:tgtEl>
+                                          <p:spTgt spid="17"/>
+                                        </p:tgtEl>
+                                        <p:attrNameLst>
+                                          <p:attrName>style.visibility</p:attrName>
+                                        </p:attrNameLst>
+                                      </p:cBhvr>
+                                      <p:to>
+                                        <p:strVal val="visible"/>
+                                      </p:to>
+                                    </p:set>
+                                  </p:childTnLst>
+                                </p:cTn>
+                              </p:par>
+                            </p:childTnLst>
+                          </p:cTn>
+                        </p:par>
+                      </p:childTnLst>
+                    </p:cTn>
+                  </p:par>
+                </p:childTnLst>
+              </p:cTn>
+              <p:prevCondLst>
+                <p:cond evt="onPrev" delay="0">
+                  <p:tgtEl>
+                    <p:sldTgt/>
+                  </p:tgtEl>
+                </p:cond>
+              </p:prevCondLst>
+              <p:nextCondLst>
+                <p:cond evt="onNext" delay="0">
+                  <p:tgtEl>
+                    <p:sldTgt/>
+                  </p:tgtEl>
+                </p:cond>
+              </p:nextCondLst>
+            </p:seq>
+          </p:childTnLst>
+        </p:cTn>
+      </p:par>
+    </p:tnLst>
+    <p:bldLst>
+      <p:bldP spid="10" grpId="0"/>
+      <p:bldP spid="15" grpId="0"/>
+      <p:bldP spid="16" grpId="0"/>
+      <p:bldP spid="17" grpId="0"/>
+    </p:bldLst>
+  </p:timing>
 </p:sld>
 </file>
 
@@ -18179,41 +15293,6 @@
       </p:sp>
       <p:sp>
         <p:nvSpPr>
-          <p:cNvPr id="25" name="TextBox 24">
-            <a:extLst>
-              <a:ext uri="{FF2B5EF4-FFF2-40B4-BE49-F238E27FC236}">
-                <a16:creationId xmlns:a16="http://schemas.microsoft.com/office/drawing/2014/main" id="{DCC035F0-2526-D268-0E3B-75AB79A12D8E}"/>
-              </a:ext>
-            </a:extLst>
-          </p:cNvPr>
-          <p:cNvSpPr txBox="1"/>
-          <p:nvPr/>
-        </p:nvSpPr>
-        <p:spPr>
-          <a:xfrm>
-            <a:off x="8712017" y="4732140"/>
-            <a:ext cx="3276783" cy="400110"/>
-          </a:xfrm>
-          <a:prstGeom prst="rect">
-            <a:avLst/>
-          </a:prstGeom>
-          <a:noFill/>
-        </p:spPr>
-        <p:txBody>
-          <a:bodyPr wrap="square" lIns="0" rIns="0" rtlCol="0" anchor="b">
-            <a:spAutoFit/>
-          </a:bodyPr>
-          <a:lstStyle/>
-          <a:p>
-            <a:r>
-              <a:rPr lang="en-US" sz="2000" b="1" noProof="1"/>
-              <a:t>Calculate Functional Score</a:t>
-            </a:r>
-          </a:p>
-        </p:txBody>
-      </p:sp>
-      <p:sp>
-        <p:nvSpPr>
           <p:cNvPr id="28" name="TextBox 27">
             <a:extLst>
               <a:ext uri="{FF2B5EF4-FFF2-40B4-BE49-F238E27FC236}">
@@ -18351,66 +15430,6 @@
           </a:p>
           <a:p>
             <a:endParaRPr lang="en-IL" dirty="0"/>
-          </a:p>
-        </p:txBody>
-      </p:sp>
-      <p:sp>
-        <p:nvSpPr>
-          <p:cNvPr id="43" name="TextBox 42">
-            <a:extLst>
-              <a:ext uri="{FF2B5EF4-FFF2-40B4-BE49-F238E27FC236}">
-                <a16:creationId xmlns:a16="http://schemas.microsoft.com/office/drawing/2014/main" id="{AA5A31B5-9DA9-E651-98CD-877FEF8DF613}"/>
-              </a:ext>
-            </a:extLst>
-          </p:cNvPr>
-          <p:cNvSpPr txBox="1"/>
-          <p:nvPr/>
-        </p:nvSpPr>
-        <p:spPr>
-          <a:xfrm>
-            <a:off x="8712017" y="4224828"/>
-            <a:ext cx="3092506" cy="523220"/>
-          </a:xfrm>
-          <a:prstGeom prst="rect">
-            <a:avLst/>
-          </a:prstGeom>
-          <a:noFill/>
-        </p:spPr>
-        <p:txBody>
-          <a:bodyPr wrap="square" rtlCol="0">
-            <a:spAutoFit/>
-          </a:bodyPr>
-          <a:lstStyle/>
-          <a:p>
-            <a:pPr algn="ctr"/>
-            <a:r>
-              <a:rPr lang="en-US" sz="1400" dirty="0"/>
-              <a:t>EFS = [Z(</a:t>
-            </a:r>
-            <a:r>
-              <a:rPr lang="en-US" sz="1400" dirty="0" err="1"/>
-              <a:t>WT+nutlin</a:t>
-            </a:r>
-            <a:r>
-              <a:rPr lang="en-US" sz="1400" dirty="0"/>
-              <a:t>) + Z(</a:t>
-            </a:r>
-            <a:r>
-              <a:rPr lang="en-US" sz="1400" dirty="0" err="1"/>
-              <a:t>NULL+nutlin</a:t>
-            </a:r>
-            <a:r>
-              <a:rPr lang="en-US" sz="1400" dirty="0"/>
-              <a:t>) − Z(</a:t>
-            </a:r>
-            <a:r>
-              <a:rPr lang="en-US" sz="1400" dirty="0" err="1"/>
-              <a:t>NULL+etop</a:t>
-            </a:r>
-            <a:r>
-              <a:rPr lang="en-US" sz="1400" dirty="0"/>
-              <a:t>)] / 3</a:t>
-            </a:r>
           </a:p>
         </p:txBody>
       </p:sp>
@@ -18519,6 +15538,41 @@
           </a:extLst>
         </p:spPr>
       </p:pic>
+      <p:sp>
+        <p:nvSpPr>
+          <p:cNvPr id="5" name="TextBox 4">
+            <a:extLst>
+              <a:ext uri="{FF2B5EF4-FFF2-40B4-BE49-F238E27FC236}">
+                <a16:creationId xmlns:a16="http://schemas.microsoft.com/office/drawing/2014/main" id="{B2017DD6-D740-DA0B-9FD4-35A26585108D}"/>
+              </a:ext>
+            </a:extLst>
+          </p:cNvPr>
+          <p:cNvSpPr txBox="1"/>
+          <p:nvPr/>
+        </p:nvSpPr>
+        <p:spPr>
+          <a:xfrm>
+            <a:off x="8559805" y="4600659"/>
+            <a:ext cx="3276783" cy="400110"/>
+          </a:xfrm>
+          <a:prstGeom prst="rect">
+            <a:avLst/>
+          </a:prstGeom>
+          <a:noFill/>
+        </p:spPr>
+        <p:txBody>
+          <a:bodyPr wrap="square" lIns="0" rIns="0" rtlCol="0" anchor="b">
+            <a:spAutoFit/>
+          </a:bodyPr>
+          <a:lstStyle/>
+          <a:p>
+            <a:r>
+              <a:rPr lang="en-US" sz="2000" b="1" noProof="1"/>
+              <a:t>Calculate Functional Score</a:t>
+            </a:r>
+          </a:p>
+        </p:txBody>
+      </p:sp>
     </p:spTree>
     <p:extLst>
       <p:ext uri="{BB962C8B-B14F-4D97-AF65-F5344CB8AC3E}">
@@ -19478,41 +16532,6 @@
       </p:sp>
       <p:sp>
         <p:nvSpPr>
-          <p:cNvPr id="25" name="TextBox 24">
-            <a:extLst>
-              <a:ext uri="{FF2B5EF4-FFF2-40B4-BE49-F238E27FC236}">
-                <a16:creationId xmlns:a16="http://schemas.microsoft.com/office/drawing/2014/main" id="{7C206EAE-24D6-0255-9D94-60DBD39D8975}"/>
-              </a:ext>
-            </a:extLst>
-          </p:cNvPr>
-          <p:cNvSpPr txBox="1"/>
-          <p:nvPr/>
-        </p:nvSpPr>
-        <p:spPr>
-          <a:xfrm>
-            <a:off x="8712017" y="4732140"/>
-            <a:ext cx="3276783" cy="400110"/>
-          </a:xfrm>
-          <a:prstGeom prst="rect">
-            <a:avLst/>
-          </a:prstGeom>
-          <a:noFill/>
-        </p:spPr>
-        <p:txBody>
-          <a:bodyPr wrap="square" lIns="0" rIns="0" rtlCol="0" anchor="b">
-            <a:spAutoFit/>
-          </a:bodyPr>
-          <a:lstStyle/>
-          <a:p>
-            <a:r>
-              <a:rPr lang="en-US" sz="2000" b="1" noProof="1"/>
-              <a:t>Calculate Functional Score</a:t>
-            </a:r>
-          </a:p>
-        </p:txBody>
-      </p:sp>
-      <p:sp>
-        <p:nvSpPr>
           <p:cNvPr id="28" name="TextBox 27">
             <a:extLst>
               <a:ext uri="{FF2B5EF4-FFF2-40B4-BE49-F238E27FC236}">
@@ -19656,66 +16675,6 @@
           </a:p>
           <a:p>
             <a:endParaRPr lang="en-IL" dirty="0"/>
-          </a:p>
-        </p:txBody>
-      </p:sp>
-      <p:sp>
-        <p:nvSpPr>
-          <p:cNvPr id="43" name="TextBox 42">
-            <a:extLst>
-              <a:ext uri="{FF2B5EF4-FFF2-40B4-BE49-F238E27FC236}">
-                <a16:creationId xmlns:a16="http://schemas.microsoft.com/office/drawing/2014/main" id="{338E2388-7BE2-2CA4-E9D7-BA57778CFDE0}"/>
-              </a:ext>
-            </a:extLst>
-          </p:cNvPr>
-          <p:cNvSpPr txBox="1"/>
-          <p:nvPr/>
-        </p:nvSpPr>
-        <p:spPr>
-          <a:xfrm>
-            <a:off x="8712017" y="4224828"/>
-            <a:ext cx="3092506" cy="523220"/>
-          </a:xfrm>
-          <a:prstGeom prst="rect">
-            <a:avLst/>
-          </a:prstGeom>
-          <a:noFill/>
-        </p:spPr>
-        <p:txBody>
-          <a:bodyPr wrap="square" rtlCol="0">
-            <a:spAutoFit/>
-          </a:bodyPr>
-          <a:lstStyle/>
-          <a:p>
-            <a:pPr algn="ctr"/>
-            <a:r>
-              <a:rPr lang="en-US" sz="1400" dirty="0"/>
-              <a:t>EFS = [Z(</a:t>
-            </a:r>
-            <a:r>
-              <a:rPr lang="en-US" sz="1400" dirty="0" err="1"/>
-              <a:t>WT+nutlin</a:t>
-            </a:r>
-            <a:r>
-              <a:rPr lang="en-US" sz="1400" dirty="0"/>
-              <a:t>) + Z(</a:t>
-            </a:r>
-            <a:r>
-              <a:rPr lang="en-US" sz="1400" dirty="0" err="1"/>
-              <a:t>NULL+nutlin</a:t>
-            </a:r>
-            <a:r>
-              <a:rPr lang="en-US" sz="1400" dirty="0"/>
-              <a:t>) − Z(</a:t>
-            </a:r>
-            <a:r>
-              <a:rPr lang="en-US" sz="1400" dirty="0" err="1"/>
-              <a:t>NULL+etop</a:t>
-            </a:r>
-            <a:r>
-              <a:rPr lang="en-US" sz="1400" dirty="0"/>
-              <a:t>)] / 3</a:t>
-            </a:r>
           </a:p>
         </p:txBody>
       </p:sp>
@@ -20117,6 +17076,41 @@
           </a:extLst>
         </p:spPr>
       </p:pic>
+      <p:sp>
+        <p:nvSpPr>
+          <p:cNvPr id="22" name="TextBox 21">
+            <a:extLst>
+              <a:ext uri="{FF2B5EF4-FFF2-40B4-BE49-F238E27FC236}">
+                <a16:creationId xmlns:a16="http://schemas.microsoft.com/office/drawing/2014/main" id="{E2C4D7A4-18DC-99E0-5260-56985152EFDE}"/>
+              </a:ext>
+            </a:extLst>
+          </p:cNvPr>
+          <p:cNvSpPr txBox="1"/>
+          <p:nvPr/>
+        </p:nvSpPr>
+        <p:spPr>
+          <a:xfrm>
+            <a:off x="8559805" y="4600659"/>
+            <a:ext cx="3276783" cy="400110"/>
+          </a:xfrm>
+          <a:prstGeom prst="rect">
+            <a:avLst/>
+          </a:prstGeom>
+          <a:noFill/>
+        </p:spPr>
+        <p:txBody>
+          <a:bodyPr wrap="square" lIns="0" rIns="0" rtlCol="0" anchor="b">
+            <a:spAutoFit/>
+          </a:bodyPr>
+          <a:lstStyle/>
+          <a:p>
+            <a:r>
+              <a:rPr lang="en-US" sz="2000" b="1" noProof="1"/>
+              <a:t>Calculate Functional Score</a:t>
+            </a:r>
+          </a:p>
+        </p:txBody>
+      </p:sp>
     </p:spTree>
     <p:extLst>
       <p:ext uri="{BB962C8B-B14F-4D97-AF65-F5344CB8AC3E}">
@@ -21076,47 +18070,6 @@
       </p:sp>
       <p:sp>
         <p:nvSpPr>
-          <p:cNvPr id="25" name="TextBox 24">
-            <a:extLst>
-              <a:ext uri="{FF2B5EF4-FFF2-40B4-BE49-F238E27FC236}">
-                <a16:creationId xmlns:a16="http://schemas.microsoft.com/office/drawing/2014/main" id="{3EC68F3A-B7C4-4F8F-BD77-324C6DCFED45}"/>
-              </a:ext>
-            </a:extLst>
-          </p:cNvPr>
-          <p:cNvSpPr txBox="1"/>
-          <p:nvPr/>
-        </p:nvSpPr>
-        <p:spPr>
-          <a:xfrm>
-            <a:off x="8712017" y="4732140"/>
-            <a:ext cx="3276783" cy="400110"/>
-          </a:xfrm>
-          <a:prstGeom prst="rect">
-            <a:avLst/>
-          </a:prstGeom>
-          <a:noFill/>
-        </p:spPr>
-        <p:txBody>
-          <a:bodyPr wrap="square" lIns="0" rIns="0" rtlCol="0" anchor="b">
-            <a:spAutoFit/>
-          </a:bodyPr>
-          <a:lstStyle/>
-          <a:p>
-            <a:r>
-              <a:rPr lang="en-US" sz="2000" b="1" noProof="1">
-                <a:solidFill>
-                  <a:schemeClr val="accent3">
-                    <a:lumMod val="75000"/>
-                  </a:schemeClr>
-                </a:solidFill>
-              </a:rPr>
-              <a:t>Calculate Functional Score</a:t>
-            </a:r>
-          </a:p>
-        </p:txBody>
-      </p:sp>
-      <p:sp>
-        <p:nvSpPr>
           <p:cNvPr id="28" name="TextBox 27">
             <a:extLst>
               <a:ext uri="{FF2B5EF4-FFF2-40B4-BE49-F238E27FC236}">
@@ -21248,66 +18201,6 @@
           </a:p>
           <a:p>
             <a:endParaRPr lang="en-IL" dirty="0"/>
-          </a:p>
-        </p:txBody>
-      </p:sp>
-      <p:sp>
-        <p:nvSpPr>
-          <p:cNvPr id="43" name="TextBox 42">
-            <a:extLst>
-              <a:ext uri="{FF2B5EF4-FFF2-40B4-BE49-F238E27FC236}">
-                <a16:creationId xmlns:a16="http://schemas.microsoft.com/office/drawing/2014/main" id="{C6BC8DFC-F7CE-F022-5C20-BE6977408000}"/>
-              </a:ext>
-            </a:extLst>
-          </p:cNvPr>
-          <p:cNvSpPr txBox="1"/>
-          <p:nvPr/>
-        </p:nvSpPr>
-        <p:spPr>
-          <a:xfrm>
-            <a:off x="8712017" y="4224828"/>
-            <a:ext cx="3092506" cy="523220"/>
-          </a:xfrm>
-          <a:prstGeom prst="rect">
-            <a:avLst/>
-          </a:prstGeom>
-          <a:noFill/>
-        </p:spPr>
-        <p:txBody>
-          <a:bodyPr wrap="square" rtlCol="0">
-            <a:spAutoFit/>
-          </a:bodyPr>
-          <a:lstStyle/>
-          <a:p>
-            <a:pPr algn="ctr"/>
-            <a:r>
-              <a:rPr lang="en-US" sz="1400" dirty="0"/>
-              <a:t>EFS = [Z(</a:t>
-            </a:r>
-            <a:r>
-              <a:rPr lang="en-US" sz="1400" dirty="0" err="1"/>
-              <a:t>WT+nutlin</a:t>
-            </a:r>
-            <a:r>
-              <a:rPr lang="en-US" sz="1400" dirty="0"/>
-              <a:t>) + Z(</a:t>
-            </a:r>
-            <a:r>
-              <a:rPr lang="en-US" sz="1400" dirty="0" err="1"/>
-              <a:t>NULL+nutlin</a:t>
-            </a:r>
-            <a:r>
-              <a:rPr lang="en-US" sz="1400" dirty="0"/>
-              <a:t>) − Z(</a:t>
-            </a:r>
-            <a:r>
-              <a:rPr lang="en-US" sz="1400" dirty="0" err="1"/>
-              <a:t>NULL+etop</a:t>
-            </a:r>
-            <a:r>
-              <a:rPr lang="en-US" sz="1400" dirty="0"/>
-              <a:t>)] / 3</a:t>
-            </a:r>
           </a:p>
         </p:txBody>
       </p:sp>
@@ -21657,58 +18550,193 @@
           </a:p>
         </p:txBody>
       </p:sp>
-      <p:pic>
-        <p:nvPicPr>
-          <p:cNvPr id="3074" name="Picture 2" descr="Fig. 2: Comprehensive mutational scanning of TP53.">
+      <p:sp>
+        <p:nvSpPr>
+          <p:cNvPr id="11" name="TextBox 10">
             <a:extLst>
               <a:ext uri="{FF2B5EF4-FFF2-40B4-BE49-F238E27FC236}">
-                <a16:creationId xmlns:a16="http://schemas.microsoft.com/office/drawing/2014/main" id="{4A796C30-8577-A525-450C-DAEC0E23AD6E}"/>
+                <a16:creationId xmlns:a16="http://schemas.microsoft.com/office/drawing/2014/main" id="{52F7814D-2864-116E-71FD-D49FD17CE8AB}"/>
               </a:ext>
             </a:extLst>
           </p:cNvPr>
-          <p:cNvPicPr>
-            <a:picLocks noChangeAspect="1" noChangeArrowheads="1"/>
-          </p:cNvPicPr>
+          <p:cNvSpPr txBox="1"/>
           <p:nvPr/>
-        </p:nvPicPr>
-        <p:blipFill rotWithShape="1">
-          <a:blip r:embed="rId4">
-            <a:extLst>
-              <a:ext uri="{28A0092B-C50C-407E-A947-70E740481C1C}">
-                <a14:useLocalDpi xmlns:a14="http://schemas.microsoft.com/office/drawing/2010/main" val="0"/>
-              </a:ext>
-            </a:extLst>
-          </a:blip>
-          <a:srcRect l="31186" t="83484" r="-628" b="-1789"/>
-          <a:stretch>
-            <a:fillRect/>
-          </a:stretch>
-        </p:blipFill>
-        <p:spPr bwMode="auto">
+        </p:nvSpPr>
+        <p:spPr>
           <a:xfrm>
-            <a:off x="7532593" y="2169116"/>
-            <a:ext cx="4229434" cy="861774"/>
+            <a:off x="8559805" y="4600659"/>
+            <a:ext cx="3276783" cy="400110"/>
           </a:xfrm>
           <a:prstGeom prst="rect">
             <a:avLst/>
           </a:prstGeom>
           <a:noFill/>
-          <a:ln w="12700">
-            <a:solidFill>
-              <a:schemeClr val="tx1"/>
-            </a:solidFill>
-          </a:ln>
-          <a:extLst>
-            <a:ext uri="{909E8E84-426E-40DD-AFC4-6F175D3DCCD1}">
-              <a14:hiddenFill xmlns:a14="http://schemas.microsoft.com/office/drawing/2010/main">
-                <a:solidFill>
-                  <a:srgbClr val="FFFFFF"/>
-                </a:solidFill>
-              </a14:hiddenFill>
-            </a:ext>
-          </a:extLst>
         </p:spPr>
-      </p:pic>
+        <p:txBody>
+          <a:bodyPr wrap="square" lIns="0" rIns="0" rtlCol="0" anchor="b">
+            <a:spAutoFit/>
+          </a:bodyPr>
+          <a:lstStyle/>
+          <a:p>
+            <a:r>
+              <a:rPr lang="en-US" sz="2000" b="1" noProof="1">
+                <a:solidFill>
+                  <a:srgbClr val="903063"/>
+                </a:solidFill>
+              </a:rPr>
+              <a:t>Calculate Functional Score</a:t>
+            </a:r>
+          </a:p>
+        </p:txBody>
+      </p:sp>
+      <p:sp>
+        <p:nvSpPr>
+          <p:cNvPr id="12" name="TextBox 11">
+            <a:extLst>
+              <a:ext uri="{FF2B5EF4-FFF2-40B4-BE49-F238E27FC236}">
+                <a16:creationId xmlns:a16="http://schemas.microsoft.com/office/drawing/2014/main" id="{C3937F33-FAFC-5F41-1DB1-44F6F9FB5B3D}"/>
+              </a:ext>
+            </a:extLst>
+          </p:cNvPr>
+          <p:cNvSpPr txBox="1"/>
+          <p:nvPr/>
+        </p:nvSpPr>
+        <p:spPr>
+          <a:xfrm>
+            <a:off x="8712017" y="2377178"/>
+            <a:ext cx="3092506" cy="1123384"/>
+          </a:xfrm>
+          <a:prstGeom prst="rect">
+            <a:avLst/>
+          </a:prstGeom>
+          <a:noFill/>
+        </p:spPr>
+        <p:txBody>
+          <a:bodyPr wrap="square" rtlCol="0">
+            <a:spAutoFit/>
+          </a:bodyPr>
+          <a:lstStyle/>
+          <a:p>
+            <a:pPr algn="ctr"/>
+            <a:r>
+              <a:rPr lang="en-US" sz="1400" dirty="0"/>
+              <a:t>[Z(</a:t>
+            </a:r>
+            <a:r>
+              <a:rPr lang="en-US" sz="1400" dirty="0" err="1"/>
+              <a:t>WT+nutlin</a:t>
+            </a:r>
+            <a:r>
+              <a:rPr lang="en-US" sz="1400" dirty="0"/>
+              <a:t>) + Z(</a:t>
+            </a:r>
+            <a:r>
+              <a:rPr lang="en-US" sz="1400" dirty="0" err="1"/>
+              <a:t>NULL+nutlin</a:t>
+            </a:r>
+            <a:r>
+              <a:rPr lang="en-US" sz="1400" dirty="0"/>
+              <a:t>) - Z(</a:t>
+            </a:r>
+            <a:r>
+              <a:rPr lang="en-US" sz="1400" dirty="0" err="1"/>
+              <a:t>NULL+etop</a:t>
+            </a:r>
+            <a:r>
+              <a:rPr lang="en-US" sz="1400" dirty="0"/>
+              <a:t>)]</a:t>
+            </a:r>
+          </a:p>
+          <a:p>
+            <a:pPr algn="ctr"/>
+            <a:r>
+              <a:rPr lang="en-US" sz="1400" dirty="0"/>
+              <a:t>____________________________</a:t>
+            </a:r>
+          </a:p>
+          <a:p>
+            <a:pPr algn="ctr"/>
+            <a:endParaRPr lang="en-US" sz="1100" dirty="0"/>
+          </a:p>
+          <a:p>
+            <a:pPr algn="ctr"/>
+            <a:r>
+              <a:rPr lang="en-US" sz="1400" dirty="0"/>
+              <a:t>3</a:t>
+            </a:r>
+          </a:p>
+        </p:txBody>
+      </p:sp>
+      <p:sp>
+        <p:nvSpPr>
+          <p:cNvPr id="13" name="TextBox 12">
+            <a:extLst>
+              <a:ext uri="{FF2B5EF4-FFF2-40B4-BE49-F238E27FC236}">
+                <a16:creationId xmlns:a16="http://schemas.microsoft.com/office/drawing/2014/main" id="{75673C05-49DD-3F2C-6DF9-6F2930A59569}"/>
+              </a:ext>
+            </a:extLst>
+          </p:cNvPr>
+          <p:cNvSpPr txBox="1"/>
+          <p:nvPr/>
+        </p:nvSpPr>
+        <p:spPr>
+          <a:xfrm>
+            <a:off x="8044920" y="2870577"/>
+            <a:ext cx="514885" cy="369332"/>
+          </a:xfrm>
+          <a:prstGeom prst="rect">
+            <a:avLst/>
+          </a:prstGeom>
+          <a:noFill/>
+        </p:spPr>
+        <p:txBody>
+          <a:bodyPr wrap="none" rtlCol="0">
+            <a:spAutoFit/>
+          </a:bodyPr>
+          <a:lstStyle/>
+          <a:p>
+            <a:r>
+              <a:rPr lang="en-IL" dirty="0"/>
+              <a:t>EFS</a:t>
+            </a:r>
+          </a:p>
+        </p:txBody>
+      </p:sp>
+      <p:sp>
+        <p:nvSpPr>
+          <p:cNvPr id="21" name="TextBox 20">
+            <a:extLst>
+              <a:ext uri="{FF2B5EF4-FFF2-40B4-BE49-F238E27FC236}">
+                <a16:creationId xmlns:a16="http://schemas.microsoft.com/office/drawing/2014/main" id="{B80031CB-6D8D-D75F-F5C7-B4AB49F1FB13}"/>
+              </a:ext>
+            </a:extLst>
+          </p:cNvPr>
+          <p:cNvSpPr txBox="1"/>
+          <p:nvPr/>
+        </p:nvSpPr>
+        <p:spPr>
+          <a:xfrm>
+            <a:off x="8552358" y="2870577"/>
+            <a:ext cx="319318" cy="369332"/>
+          </a:xfrm>
+          <a:prstGeom prst="rect">
+            <a:avLst/>
+          </a:prstGeom>
+          <a:noFill/>
+        </p:spPr>
+        <p:txBody>
+          <a:bodyPr wrap="none" rtlCol="0">
+            <a:spAutoFit/>
+          </a:bodyPr>
+          <a:lstStyle/>
+          <a:p>
+            <a:r>
+              <a:rPr lang="en-IL" dirty="0"/>
+              <a:t>=</a:t>
+            </a:r>
+          </a:p>
+        </p:txBody>
+      </p:sp>
     </p:spTree>
     <p:extLst>
       <p:ext uri="{BB962C8B-B14F-4D97-AF65-F5344CB8AC3E}">
@@ -21823,7 +18851,21 @@
             </a:r>
             <a:r>
               <a:rPr lang="en-US" sz="4000" dirty="0"/>
-              <a:t>the lowest </a:t>
+              <a:t>the</a:t>
+            </a:r>
+            <a:endParaRPr lang="he-IL" sz="4000" dirty="0"/>
+          </a:p>
+          <a:p>
+            <a:pPr marL="0" indent="0" algn="ctr">
+              <a:buNone/>
+            </a:pPr>
+            <a:r>
+              <a:rPr lang="en-US" sz="4000" dirty="0"/>
+              <a:t>lowest</a:t>
+            </a:r>
+            <a:r>
+              <a:rPr lang="he-IL" sz="4000" dirty="0"/>
+              <a:t> </a:t>
             </a:r>
             <a:r>
               <a:rPr lang="en-US" sz="4000" dirty="0">
@@ -21835,7 +18877,17 @@
             </a:r>
             <a:r>
               <a:rPr lang="en-US" sz="4000" dirty="0"/>
-              <a:t>will show the highest </a:t>
+              <a:t>will show </a:t>
+            </a:r>
+            <a:endParaRPr lang="he-IL" sz="4000" dirty="0"/>
+          </a:p>
+          <a:p>
+            <a:pPr marL="0" indent="0" algn="ctr">
+              <a:buNone/>
+            </a:pPr>
+            <a:r>
+              <a:rPr lang="en-US" sz="4000" dirty="0"/>
+              <a:t>the highest </a:t>
             </a:r>
             <a:r>
               <a:rPr lang="en-US" sz="4000" dirty="0">
@@ -22273,7 +19325,7 @@
         </p:nvSpPr>
         <p:spPr>
           <a:xfrm>
-            <a:off x="6096000" y="2125487"/>
+            <a:off x="6784289" y="2018271"/>
             <a:ext cx="3981164" cy="3880773"/>
           </a:xfrm>
         </p:spPr>
@@ -22283,12 +19335,20 @@
           </a:bodyPr>
           <a:lstStyle/>
           <a:p>
+            <a:pPr>
+              <a:buFont typeface="Wingdings" pitchFamily="2" charset="2"/>
+              <a:buChar char="Ø"/>
+            </a:pPr>
             <a:r>
               <a:rPr lang="en-US" dirty="0"/>
               <a:t>Giacomelli et al., Nature Genetics, 2018 (25,217 variants, 8,274 unique)</a:t>
             </a:r>
           </a:p>
           <a:p>
+            <a:pPr>
+              <a:buFont typeface="Wingdings" pitchFamily="2" charset="2"/>
+              <a:buChar char="Ø"/>
+            </a:pPr>
             <a:r>
               <a:rPr lang="en-US" dirty="0"/>
               <a:t>Role: Experimental "fitness" scores for every possible TP53 mutation - </a:t>
@@ -22299,6 +19359,10 @@
             </a:r>
           </a:p>
           <a:p>
+            <a:pPr>
+              <a:buFont typeface="Wingdings" pitchFamily="2" charset="2"/>
+              <a:buChar char="Ø"/>
+            </a:pPr>
             <a:r>
               <a:rPr lang="en-US" dirty="0"/>
               <a:t>Metric: Experimental Functional Score (derived from cell line fitness screens) quantifies exactly how well each specific TP53 mutant can suppress tumor growth in a controlled lab setting</a:t>
@@ -22322,7 +19386,7 @@
         </p:nvSpPr>
         <p:spPr>
           <a:xfrm>
-            <a:off x="2303060" y="2491881"/>
+            <a:off x="1426547" y="2306927"/>
             <a:ext cx="3821288" cy="3880773"/>
           </a:xfrm>
           <a:prstGeom prst="rect">
@@ -22561,12 +19625,20 @@
             </a:lvl9pPr>
           </a:lstStyle>
           <a:p>
+            <a:pPr>
+              <a:buFont typeface="Wingdings" pitchFamily="2" charset="2"/>
+              <a:buChar char="Ø"/>
+            </a:pPr>
             <a:r>
               <a:rPr lang="en-US" dirty="0"/>
               <a:t>AACR GENIE v19.0 (~271,000 samples, 100,418 with FGA).</a:t>
             </a:r>
           </a:p>
           <a:p>
+            <a:pPr>
+              <a:buFont typeface="Wingdings" pitchFamily="2" charset="2"/>
+              <a:buChar char="Ø"/>
+            </a:pPr>
             <a:r>
               <a:rPr lang="en-US" dirty="0"/>
               <a:t>Role: Real-world patient data - </a:t>
@@ -22577,18 +19649,30 @@
             </a:r>
           </a:p>
           <a:p>
+            <a:pPr>
+              <a:buFont typeface="Wingdings" pitchFamily="2" charset="2"/>
+              <a:buChar char="Ø"/>
+            </a:pPr>
             <a:r>
               <a:rPr lang="en-US" dirty="0"/>
               <a:t>Metric: FRACTION_GENOME_ALTERED (FGA), a quantitative measure of chromosomal instability</a:t>
             </a:r>
           </a:p>
           <a:p>
+            <a:pPr>
+              <a:buFont typeface="Wingdings" pitchFamily="2" charset="2"/>
+              <a:buChar char="Ø"/>
+            </a:pPr>
             <a:r>
               <a:rPr lang="en-US" dirty="0"/>
               <a:t>35,357 TP53-mutant</a:t>
             </a:r>
           </a:p>
           <a:p>
+            <a:pPr>
+              <a:buFont typeface="Wingdings" pitchFamily="2" charset="2"/>
+              <a:buChar char="Ø"/>
+            </a:pPr>
             <a:r>
               <a:rPr lang="en-US" dirty="0"/>
               <a:t>65,061 TP53-WT</a:t>
